--- a/Year 1/Постквантова криптографія/UA/2026/PPT/Презентація_7.pptx
+++ b/Year 1/Постквантова криптографія/UA/2026/PPT/Презентація_7.pptx
@@ -13,27 +13,26 @@
     <p:sldId id="335" r:id="rId7"/>
     <p:sldId id="336" r:id="rId8"/>
     <p:sldId id="326" r:id="rId9"/>
-    <p:sldId id="327" r:id="rId10"/>
-    <p:sldId id="328" r:id="rId11"/>
-    <p:sldId id="329" r:id="rId12"/>
-    <p:sldId id="330" r:id="rId13"/>
-    <p:sldId id="331" r:id="rId14"/>
-    <p:sldId id="337" r:id="rId15"/>
-    <p:sldId id="338" r:id="rId16"/>
-    <p:sldId id="339" r:id="rId17"/>
-    <p:sldId id="340" r:id="rId18"/>
-    <p:sldId id="341" r:id="rId19"/>
-    <p:sldId id="342" r:id="rId20"/>
-    <p:sldId id="343" r:id="rId21"/>
-    <p:sldId id="345" r:id="rId22"/>
-    <p:sldId id="346" r:id="rId23"/>
-    <p:sldId id="347" r:id="rId24"/>
-    <p:sldId id="348" r:id="rId25"/>
-    <p:sldId id="349" r:id="rId26"/>
-    <p:sldId id="350" r:id="rId27"/>
-    <p:sldId id="351" r:id="rId28"/>
-    <p:sldId id="352" r:id="rId29"/>
-    <p:sldId id="344" r:id="rId30"/>
+    <p:sldId id="328" r:id="rId10"/>
+    <p:sldId id="329" r:id="rId11"/>
+    <p:sldId id="330" r:id="rId12"/>
+    <p:sldId id="331" r:id="rId13"/>
+    <p:sldId id="337" r:id="rId14"/>
+    <p:sldId id="338" r:id="rId15"/>
+    <p:sldId id="339" r:id="rId16"/>
+    <p:sldId id="340" r:id="rId17"/>
+    <p:sldId id="341" r:id="rId18"/>
+    <p:sldId id="342" r:id="rId19"/>
+    <p:sldId id="343" r:id="rId20"/>
+    <p:sldId id="345" r:id="rId21"/>
+    <p:sldId id="346" r:id="rId22"/>
+    <p:sldId id="347" r:id="rId23"/>
+    <p:sldId id="348" r:id="rId24"/>
+    <p:sldId id="349" r:id="rId25"/>
+    <p:sldId id="350" r:id="rId26"/>
+    <p:sldId id="351" r:id="rId27"/>
+    <p:sldId id="352" r:id="rId28"/>
+    <p:sldId id="344" r:id="rId29"/>
   </p:sldIdLst>
   <p:sldSz cx="12192000" cy="6858000"/>
   <p:notesSz cx="6858000" cy="9144000"/>
@@ -1280,7 +1279,7 @@
           <a:p>
             <a:fld id="{B0E38C6A-C972-4D9E-AA74-333EB6C38D98}" type="datetimeFigureOut">
               <a:rPr lang="en-US" smtClean="0"/>
-              <a:t>5/7/26</a:t>
+              <a:t>5/25/26</a:t>
             </a:fld>
             <a:endParaRPr lang="en-US"/>
           </a:p>
@@ -3501,7 +3500,7 @@
           <a:p>
             <a:fld id="{22B528A8-01FA-4E19-966E-6D8EBDB87570}" type="datetimeFigureOut">
               <a:rPr lang="uk-UA" smtClean="0"/>
-              <a:t>07.05.26</a:t>
+              <a:t>25.05.26</a:t>
             </a:fld>
             <a:endParaRPr lang="uk-UA"/>
           </a:p>
@@ -4106,1035 +4105,6 @@
           <p:cNvPr id="2" name="Title 1">
             <a:extLst>
               <a:ext uri="{FF2B5EF4-FFF2-40B4-BE49-F238E27FC236}">
-                <a16:creationId xmlns:a16="http://schemas.microsoft.com/office/drawing/2014/main" id="{AF1A706C-8A51-C366-F59D-C8D08DDF3D9E}"/>
-              </a:ext>
-            </a:extLst>
-          </p:cNvPr>
-          <p:cNvSpPr>
-            <a:spLocks noGrp="1"/>
-          </p:cNvSpPr>
-          <p:nvPr>
-            <p:ph type="title"/>
-          </p:nvPr>
-        </p:nvSpPr>
-        <p:spPr/>
-        <p:txBody>
-          <a:bodyPr>
-            <a:normAutofit/>
-          </a:bodyPr>
-          <a:lstStyle/>
-          <a:p>
-            <a:pPr algn="ctr"/>
-            <a:r>
-              <a:rPr lang="en-US" b="1" dirty="0">
-                <a:solidFill>
-                  <a:srgbClr val="203864"/>
-                </a:solidFill>
-                <a:latin typeface="Calibri"/>
-              </a:rPr>
-              <a:t>Генерація ключів</a:t>
-            </a:r>
-          </a:p>
-        </p:txBody>
-      </p:sp>
-      <mc:AlternateContent xmlns:mc="http://schemas.openxmlformats.org/markup-compatibility/2006" xmlns:a14="http://schemas.microsoft.com/office/drawing/2010/main">
-        <mc:Choice Requires="a14">
-          <p:sp>
-            <p:nvSpPr>
-              <p:cNvPr id="3" name="Content Placeholder 2">
-                <a:extLst>
-                  <a:ext uri="{FF2B5EF4-FFF2-40B4-BE49-F238E27FC236}">
-                    <a16:creationId xmlns:a16="http://schemas.microsoft.com/office/drawing/2014/main" id="{D36B7EE6-B544-03BD-0F62-90C00428CD7B}"/>
-                  </a:ext>
-                </a:extLst>
-              </p:cNvPr>
-              <p:cNvSpPr>
-                <a:spLocks noGrp="1"/>
-              </p:cNvSpPr>
-              <p:nvPr>
-                <p:ph idx="1"/>
-              </p:nvPr>
-            </p:nvSpPr>
-            <p:spPr>
-              <a:xfrm>
-                <a:off x="1793240" y="1690688"/>
-                <a:ext cx="8305800" cy="4667250"/>
-              </a:xfrm>
-            </p:spPr>
-            <p:txBody>
-              <a:bodyPr/>
-              <a:lstStyle/>
-              <a:p>
-                <a:pPr marL="0" marR="0" lvl="0" indent="0">
-                  <a:lnSpc>
-                    <a:spcPts val="1200"/>
-                  </a:lnSpc>
-                  <a:spcAft>
-                    <a:spcPts val="600"/>
-                  </a:spcAft>
-                  <a:buNone/>
-                  <a:tabLst>
-                    <a:tab pos="685800" algn="l"/>
-                  </a:tabLst>
-                </a:pPr>
-                <a:r>
-                  <a:rPr lang="en-US" sz="1800" dirty="0">
-                    <a:effectLst/>
-                    <a:latin typeface="Calibri"/>
-                    <a:ea typeface="Calibri"/>
-                    <a:cs typeface="Calibri"/>
-                  </a:rPr>
-                  <a:t>Приватний ключ (</a:t>
-                </a:r>
-                <a14:m>
-                  <m:oMath xmlns:m="http://schemas.openxmlformats.org/officeDocument/2006/math">
-                    <m:r>
-                      <a:rPr lang="en-US" sz="1800" i="1" smtClean="0">
-                        <a:effectLst/>
-                        <a:latin typeface="Cambria Math" panose="02040503050406030204" pitchFamily="18" charset="0"/>
-                        <a:ea typeface="Calibri"/>
-                        <a:cs typeface="Calibri"/>
-                      </a:rPr>
-                      <m:t>𝑥</m:t>
-                    </m:r>
-                  </m:oMath>
-                </a14:m>
-                <a:r>
-                  <a:rPr lang="en-US" sz="1800" dirty="0">
-                    <a:effectLst/>
-                    <a:latin typeface="Calibri"/>
-                    <a:ea typeface="Calibri"/>
-                    <a:cs typeface="Calibri"/>
-                  </a:rPr>
-                  <a:t>):</a:t>
-                </a:r>
-              </a:p>
-              <a:p>
-                <a:pPr marL="36000" marR="0" lvl="0" indent="-342900">
-                  <a:lnSpc>
-                    <a:spcPts val="1200"/>
-                  </a:lnSpc>
-                  <a:spcAft>
-                    <a:spcPts val="600"/>
-                  </a:spcAft>
-                  <a:buFont typeface="Symbol" panose="05050102010706020507" pitchFamily="18" charset="2"/>
-                  <a:buChar char=""/>
-                  <a:tabLst>
-                    <a:tab pos="685800" algn="l"/>
-                  </a:tabLst>
-                </a:pPr>
-                <a:r>
-                  <a:rPr lang="en-US" sz="1800" dirty="0">
-                    <a:effectLst/>
-                    <a:latin typeface="Calibri"/>
-                    <a:ea typeface="Calibri"/>
-                    <a:cs typeface="Calibri"/>
-                  </a:rPr>
-                  <a:t>Набір випадкових значень: </a:t>
-                </a:r>
-                <a14:m>
-                  <m:oMath xmlns:m="http://schemas.openxmlformats.org/officeDocument/2006/math">
-                    <m:r>
-                      <a:rPr lang="en-US" sz="1800" i="1" smtClean="0">
-                        <a:effectLst/>
-                        <a:latin typeface="Cambria Math" panose="02040503050406030204" pitchFamily="18" charset="0"/>
-                        <a:ea typeface="Calibri"/>
-                        <a:cs typeface="Calibri"/>
-                      </a:rPr>
-                      <m:t>𝑥</m:t>
-                    </m:r>
-                    <m:r>
-                      <a:rPr lang="en-US" sz="1800">
-                        <a:effectLst/>
-                        <a:latin typeface="Cambria Math" panose="02040503050406030204" pitchFamily="18" charset="0"/>
-                        <a:ea typeface="Calibri"/>
-                        <a:cs typeface="Calibri"/>
-                      </a:rPr>
-                      <m:t>=</m:t>
-                    </m:r>
-                    <m:d>
-                      <m:dPr>
-                        <m:ctrlPr>
-                          <a:rPr lang="en-US" sz="1800" i="1">
-                            <a:effectLst/>
-                            <a:latin typeface="Cambria Math" panose="02040503050406030204" pitchFamily="18" charset="0"/>
-                            <a:ea typeface="Calibri"/>
-                            <a:cs typeface="Calibri"/>
-                          </a:rPr>
-                        </m:ctrlPr>
-                      </m:dPr>
-                      <m:e>
-                        <m:sSub>
-                          <m:sSubPr>
-                            <m:ctrlPr>
-                              <a:rPr lang="en-US" sz="1800" i="1">
-                                <a:effectLst/>
-                                <a:latin typeface="Cambria Math" panose="02040503050406030204" pitchFamily="18" charset="0"/>
-                                <a:ea typeface="Calibri"/>
-                                <a:cs typeface="Calibri"/>
-                              </a:rPr>
-                            </m:ctrlPr>
-                          </m:sSubPr>
-                          <m:e>
-                            <m:r>
-                              <a:rPr lang="en-US" sz="1800" i="1">
-                                <a:effectLst/>
-                                <a:latin typeface="Cambria Math" panose="02040503050406030204" pitchFamily="18" charset="0"/>
-                                <a:ea typeface="Calibri"/>
-                                <a:cs typeface="Calibri"/>
-                              </a:rPr>
-                              <m:t>𝑥</m:t>
-                            </m:r>
-                          </m:e>
-                          <m:sub>
-                            <m:r>
-                              <a:rPr lang="en-US" sz="1800">
-                                <a:effectLst/>
-                                <a:latin typeface="Cambria Math" panose="02040503050406030204" pitchFamily="18" charset="0"/>
-                                <a:ea typeface="Calibri"/>
-                                <a:cs typeface="Calibri"/>
-                              </a:rPr>
-                              <m:t>1</m:t>
-                            </m:r>
-                          </m:sub>
-                        </m:sSub>
-                        <m:r>
-                          <a:rPr lang="en-US" sz="1800">
-                            <a:effectLst/>
-                            <a:latin typeface="Cambria Math" panose="02040503050406030204" pitchFamily="18" charset="0"/>
-                            <a:ea typeface="Calibri"/>
-                            <a:cs typeface="Calibri"/>
-                          </a:rPr>
-                          <m:t>,</m:t>
-                        </m:r>
-                        <m:sSub>
-                          <m:sSubPr>
-                            <m:ctrlPr>
-                              <a:rPr lang="en-US" sz="1800" i="1">
-                                <a:effectLst/>
-                                <a:latin typeface="Cambria Math" panose="02040503050406030204" pitchFamily="18" charset="0"/>
-                                <a:ea typeface="Calibri"/>
-                                <a:cs typeface="Calibri"/>
-                              </a:rPr>
-                            </m:ctrlPr>
-                          </m:sSubPr>
-                          <m:e>
-                            <m:r>
-                              <a:rPr lang="en-US" sz="1800" i="1">
-                                <a:effectLst/>
-                                <a:latin typeface="Cambria Math" panose="02040503050406030204" pitchFamily="18" charset="0"/>
-                                <a:ea typeface="Calibri"/>
-                                <a:cs typeface="Calibri"/>
-                              </a:rPr>
-                              <m:t>𝑥</m:t>
-                            </m:r>
-                          </m:e>
-                          <m:sub>
-                            <m:r>
-                              <a:rPr lang="en-US" sz="1800">
-                                <a:effectLst/>
-                                <a:latin typeface="Cambria Math" panose="02040503050406030204" pitchFamily="18" charset="0"/>
-                                <a:ea typeface="Calibri"/>
-                                <a:cs typeface="Calibri"/>
-                              </a:rPr>
-                              <m:t>2</m:t>
-                            </m:r>
-                          </m:sub>
-                        </m:sSub>
-                        <m:r>
-                          <a:rPr lang="en-US" sz="1800">
-                            <a:effectLst/>
-                            <a:latin typeface="Cambria Math" panose="02040503050406030204" pitchFamily="18" charset="0"/>
-                            <a:ea typeface="Calibri"/>
-                            <a:cs typeface="Calibri"/>
-                          </a:rPr>
-                          <m:t>,…,</m:t>
-                        </m:r>
-                        <m:sSub>
-                          <m:sSubPr>
-                            <m:ctrlPr>
-                              <a:rPr lang="en-US" sz="1800" i="1">
-                                <a:effectLst/>
-                                <a:latin typeface="Cambria Math" panose="02040503050406030204" pitchFamily="18" charset="0"/>
-                                <a:ea typeface="Calibri"/>
-                                <a:cs typeface="Calibri"/>
-                              </a:rPr>
-                            </m:ctrlPr>
-                          </m:sSubPr>
-                          <m:e>
-                            <m:r>
-                              <a:rPr lang="en-US" sz="1800" i="1">
-                                <a:effectLst/>
-                                <a:latin typeface="Cambria Math" panose="02040503050406030204" pitchFamily="18" charset="0"/>
-                                <a:ea typeface="Calibri"/>
-                                <a:cs typeface="Calibri"/>
-                              </a:rPr>
-                              <m:t>𝑥</m:t>
-                            </m:r>
-                          </m:e>
-                          <m:sub>
-                            <m:r>
-                              <a:rPr lang="en-US" sz="1800" i="1">
-                                <a:effectLst/>
-                                <a:latin typeface="Cambria Math" panose="02040503050406030204" pitchFamily="18" charset="0"/>
-                                <a:ea typeface="Calibri"/>
-                                <a:cs typeface="Calibri"/>
-                              </a:rPr>
-                              <m:t>𝑛</m:t>
-                            </m:r>
-                          </m:sub>
-                        </m:sSub>
-                      </m:e>
-                    </m:d>
-                  </m:oMath>
-                </a14:m>
-                <a:endParaRPr lang="en-US" sz="1800" dirty="0">
-                  <a:effectLst/>
-                  <a:latin typeface="Calibri"/>
-                  <a:ea typeface="Calibri"/>
-                  <a:cs typeface="Calibri"/>
-                </a:endParaRPr>
-              </a:p>
-              <a:p>
-                <a:pPr marL="36000" marR="0" lvl="0" indent="-342900">
-                  <a:lnSpc>
-                    <a:spcPts val="1200"/>
-                  </a:lnSpc>
-                  <a:spcAft>
-                    <a:spcPts val="600"/>
-                  </a:spcAft>
-                  <a:buFont typeface="Symbol" panose="05050102010706020507" pitchFamily="18" charset="2"/>
-                  <a:buChar char=""/>
-                  <a:tabLst>
-                    <a:tab pos="685800" algn="l"/>
-                  </a:tabLst>
-                </a:pPr>
-                <a:r>
-                  <a:rPr lang="en-US" sz="1800" dirty="0">
-                    <a:effectLst/>
-                    <a:latin typeface="Calibri"/>
-                    <a:ea typeface="Calibri"/>
-                    <a:cs typeface="Calibri"/>
-                  </a:rPr>
-                  <a:t>Кожен є випадковим числом (наприклад, 256 бітів).</a:t>
-                </a:r>
-              </a:p>
-              <a:p>
-                <a:pPr marL="0" marR="0" lvl="0" indent="0">
-                  <a:lnSpc>
-                    <a:spcPts val="1200"/>
-                  </a:lnSpc>
-                  <a:spcAft>
-                    <a:spcPts val="600"/>
-                  </a:spcAft>
-                  <a:buNone/>
-                  <a:tabLst>
-                    <a:tab pos="685800" algn="l"/>
-                  </a:tabLst>
-                </a:pPr>
-                <a:endParaRPr lang="uk-UA" sz="1800" dirty="0">
-                  <a:effectLst/>
-                  <a:latin typeface="Calibri"/>
-                  <a:ea typeface="Calibri"/>
-                  <a:cs typeface="Calibri"/>
-                </a:endParaRPr>
-              </a:p>
-              <a:p>
-                <a:pPr marL="0" marR="0" lvl="0" indent="0">
-                  <a:lnSpc>
-                    <a:spcPts val="1200"/>
-                  </a:lnSpc>
-                  <a:spcAft>
-                    <a:spcPts val="600"/>
-                  </a:spcAft>
-                  <a:buNone/>
-                  <a:tabLst>
-                    <a:tab pos="685800" algn="l"/>
-                  </a:tabLst>
-                </a:pPr>
-                <a:r>
-                  <a:rPr lang="en-US" sz="1800" dirty="0" err="1">
-                    <a:effectLst/>
-                    <a:latin typeface="Calibri"/>
-                    <a:ea typeface="Calibri"/>
-                    <a:cs typeface="Calibri"/>
-                  </a:rPr>
-                  <a:t>Відкритий</a:t>
-                </a:r>
-                <a:r>
-                  <a:rPr lang="en-US" sz="1800" dirty="0">
-                    <a:effectLst/>
-                    <a:latin typeface="Calibri"/>
-                    <a:ea typeface="Calibri"/>
-                    <a:cs typeface="Calibri"/>
-                  </a:rPr>
-                  <a:t> ключ (y):</a:t>
-                </a:r>
-              </a:p>
-              <a:p>
-                <a:pPr marL="36000" marR="0" lvl="0" indent="-342900">
-                  <a:lnSpc>
-                    <a:spcPts val="1200"/>
-                  </a:lnSpc>
-                  <a:spcAft>
-                    <a:spcPts val="1200"/>
-                  </a:spcAft>
-                  <a:buFont typeface="Symbol" panose="05050102010706020507" pitchFamily="18" charset="2"/>
-                  <a:buChar char=""/>
-                  <a:tabLst>
-                    <a:tab pos="685800" algn="l"/>
-                  </a:tabLst>
-                </a:pPr>
-                <a:r>
-                  <a:rPr lang="en-US" sz="1800" dirty="0">
-                    <a:effectLst/>
-                    <a:latin typeface="Calibri"/>
-                    <a:ea typeface="Calibri"/>
-                    <a:cs typeface="Calibri"/>
-                  </a:rPr>
-                  <a:t>Отримується шляхом застосування хеш-функції </a:t>
-                </a:r>
-                <a14:m>
-                  <m:oMath xmlns:m="http://schemas.openxmlformats.org/officeDocument/2006/math">
-                    <m:r>
-                      <a:rPr lang="en-US" sz="1800" i="1" smtClean="0">
-                        <a:effectLst/>
-                        <a:latin typeface="Cambria Math" panose="02040503050406030204" pitchFamily="18" charset="0"/>
-                        <a:ea typeface="Calibri"/>
-                        <a:cs typeface="Calibri"/>
-                      </a:rPr>
-                      <m:t>𝑤</m:t>
-                    </m:r>
-                    <m:r>
-                      <a:rPr lang="en-US" sz="1800" i="1" smtClean="0">
-                        <a:effectLst/>
-                        <a:latin typeface="Cambria Math" panose="02040503050406030204" pitchFamily="18" charset="0"/>
-                        <a:ea typeface="Calibri"/>
-                        <a:cs typeface="Calibri"/>
-                      </a:rPr>
-                      <m:t> </m:t>
-                    </m:r>
-                  </m:oMath>
-                </a14:m>
-                <a:r>
-                  <a:rPr lang="en-US" sz="1800" dirty="0">
-                    <a:effectLst/>
-                    <a:latin typeface="Calibri"/>
-                    <a:ea typeface="Calibri"/>
-                    <a:cs typeface="Calibri"/>
-                  </a:rPr>
-                  <a:t>разів до кожного </a:t>
-                </a:r>
-                <a14:m>
-                  <m:oMath xmlns:m="http://schemas.openxmlformats.org/officeDocument/2006/math">
-                    <m:sSub>
-                      <m:sSubPr>
-                        <m:ctrlPr>
-                          <a:rPr lang="en-US" sz="1800" i="1">
-                            <a:latin typeface="Cambria Math" panose="02040503050406030204" pitchFamily="18" charset="0"/>
-                            <a:ea typeface="Calibri"/>
-                            <a:cs typeface="Calibri"/>
-                          </a:rPr>
-                        </m:ctrlPr>
-                      </m:sSubPr>
-                      <m:e>
-                        <m:r>
-                          <a:rPr lang="en-US" sz="1800" i="1">
-                            <a:latin typeface="Cambria Math" panose="02040503050406030204" pitchFamily="18" charset="0"/>
-                            <a:ea typeface="Calibri"/>
-                            <a:cs typeface="Calibri"/>
-                          </a:rPr>
-                          <m:t>𝑥</m:t>
-                        </m:r>
-                      </m:e>
-                      <m:sub>
-                        <m:r>
-                          <a:rPr lang="en-US" sz="1800" i="1">
-                            <a:latin typeface="Cambria Math" panose="02040503050406030204" pitchFamily="18" charset="0"/>
-                            <a:ea typeface="Calibri"/>
-                            <a:cs typeface="Calibri"/>
-                          </a:rPr>
-                          <m:t>𝑖</m:t>
-                        </m:r>
-                      </m:sub>
-                    </m:sSub>
-                    <m:r>
-                      <a:rPr lang="en-US" sz="1800" i="1">
-                        <a:latin typeface="Cambria Math" panose="02040503050406030204" pitchFamily="18" charset="0"/>
-                        <a:ea typeface="Calibri"/>
-                        <a:cs typeface="Calibri"/>
-                      </a:rPr>
-                      <m:t> </m:t>
-                    </m:r>
-                  </m:oMath>
-                </a14:m>
-                <a:r>
-                  <a:rPr lang="en-US" sz="1800" dirty="0">
-                    <a:effectLst/>
-                    <a:latin typeface="Calibri"/>
-                    <a:ea typeface="Calibri"/>
-                    <a:cs typeface="Calibri"/>
-                  </a:rPr>
-                  <a:t>:</a:t>
-                </a:r>
-              </a:p>
-              <a:p>
-                <a:pPr marL="36000" marR="0" indent="0">
-                  <a:lnSpc>
-                    <a:spcPts val="1200"/>
-                  </a:lnSpc>
-                  <a:spcAft>
-                    <a:spcPts val="1100"/>
-                  </a:spcAft>
-                  <a:buNone/>
-                </a:pPr>
-                <a14:m>
-                  <m:oMathPara xmlns:m="http://schemas.openxmlformats.org/officeDocument/2006/math">
-                    <m:oMathParaPr>
-                      <m:jc m:val="centerGroup"/>
-                    </m:oMathParaPr>
-                    <m:oMath xmlns:m="http://schemas.openxmlformats.org/officeDocument/2006/math">
-                      <m:r>
-                        <a:rPr lang="en-US" sz="1800" i="1">
-                          <a:effectLst/>
-                          <a:latin typeface="Cambria Math" panose="02040503050406030204" pitchFamily="18" charset="0"/>
-                          <a:ea typeface="Calibri"/>
-                          <a:cs typeface="Calibri"/>
-                        </a:rPr>
-                        <m:t>𝑦</m:t>
-                      </m:r>
-                      <m:r>
-                        <a:rPr lang="en-US" sz="1800">
-                          <a:effectLst/>
-                          <a:latin typeface="Cambria Math" panose="02040503050406030204" pitchFamily="18" charset="0"/>
-                          <a:ea typeface="Calibri"/>
-                          <a:cs typeface="Calibri"/>
-                        </a:rPr>
-                        <m:t>=</m:t>
-                      </m:r>
-                      <m:d>
-                        <m:dPr>
-                          <m:ctrlPr>
-                            <a:rPr lang="en-US" sz="1800" i="1">
-                              <a:effectLst/>
-                              <a:latin typeface="Cambria Math" panose="02040503050406030204" pitchFamily="18" charset="0"/>
-                              <a:ea typeface="Calibri"/>
-                              <a:cs typeface="Calibri"/>
-                            </a:rPr>
-                          </m:ctrlPr>
-                        </m:dPr>
-                        <m:e>
-                          <m:sSup>
-                            <m:sSupPr>
-                              <m:ctrlPr>
-                                <a:rPr lang="en-US" sz="1800" i="1">
-                                  <a:effectLst/>
-                                  <a:latin typeface="Cambria Math" panose="02040503050406030204" pitchFamily="18" charset="0"/>
-                                  <a:ea typeface="Calibri"/>
-                                  <a:cs typeface="Calibri"/>
-                                </a:rPr>
-                              </m:ctrlPr>
-                            </m:sSupPr>
-                            <m:e>
-                              <m:r>
-                                <a:rPr lang="en-US" sz="1800" i="1">
-                                  <a:effectLst/>
-                                  <a:latin typeface="Cambria Math" panose="02040503050406030204" pitchFamily="18" charset="0"/>
-                                  <a:ea typeface="Calibri"/>
-                                  <a:cs typeface="Calibri"/>
-                                </a:rPr>
-                                <m:t>𝐻</m:t>
-                              </m:r>
-                            </m:e>
-                            <m:sup>
-                              <m:r>
-                                <a:rPr lang="en-US" sz="1800" i="1">
-                                  <a:effectLst/>
-                                  <a:latin typeface="Cambria Math" panose="02040503050406030204" pitchFamily="18" charset="0"/>
-                                  <a:ea typeface="Calibri"/>
-                                  <a:cs typeface="Calibri"/>
-                                </a:rPr>
-                                <m:t>𝑤</m:t>
-                              </m:r>
-                            </m:sup>
-                          </m:sSup>
-                          <m:d>
-                            <m:dPr>
-                              <m:ctrlPr>
-                                <a:rPr lang="en-US" sz="1800" i="1">
-                                  <a:effectLst/>
-                                  <a:latin typeface="Cambria Math" panose="02040503050406030204" pitchFamily="18" charset="0"/>
-                                  <a:ea typeface="Calibri"/>
-                                  <a:cs typeface="Calibri"/>
-                                </a:rPr>
-                              </m:ctrlPr>
-                            </m:dPr>
-                            <m:e>
-                              <m:sSub>
-                                <m:sSubPr>
-                                  <m:ctrlPr>
-                                    <a:rPr lang="en-US" sz="1800" i="1">
-                                      <a:effectLst/>
-                                      <a:latin typeface="Cambria Math" panose="02040503050406030204" pitchFamily="18" charset="0"/>
-                                      <a:ea typeface="Calibri"/>
-                                      <a:cs typeface="Calibri"/>
-                                    </a:rPr>
-                                  </m:ctrlPr>
-                                </m:sSubPr>
-                                <m:e>
-                                  <m:r>
-                                    <a:rPr lang="en-US" sz="1800" i="1">
-                                      <a:effectLst/>
-                                      <a:latin typeface="Cambria Math" panose="02040503050406030204" pitchFamily="18" charset="0"/>
-                                      <a:ea typeface="Calibri"/>
-                                      <a:cs typeface="Calibri"/>
-                                    </a:rPr>
-                                    <m:t>𝑥</m:t>
-                                  </m:r>
-                                </m:e>
-                                <m:sub>
-                                  <m:r>
-                                    <a:rPr lang="en-US" sz="1800">
-                                      <a:effectLst/>
-                                      <a:latin typeface="Cambria Math" panose="02040503050406030204" pitchFamily="18" charset="0"/>
-                                      <a:ea typeface="Calibri"/>
-                                      <a:cs typeface="Calibri"/>
-                                    </a:rPr>
-                                    <m:t>1</m:t>
-                                  </m:r>
-                                </m:sub>
-                              </m:sSub>
-                            </m:e>
-                          </m:d>
-                          <m:r>
-                            <a:rPr lang="en-US" sz="1800">
-                              <a:effectLst/>
-                              <a:latin typeface="Cambria Math" panose="02040503050406030204" pitchFamily="18" charset="0"/>
-                              <a:ea typeface="Calibri"/>
-                              <a:cs typeface="Calibri"/>
-                            </a:rPr>
-                            <m:t>,</m:t>
-                          </m:r>
-                          <m:sSup>
-                            <m:sSupPr>
-                              <m:ctrlPr>
-                                <a:rPr lang="en-US" sz="1800" i="1">
-                                  <a:effectLst/>
-                                  <a:latin typeface="Cambria Math" panose="02040503050406030204" pitchFamily="18" charset="0"/>
-                                  <a:ea typeface="Calibri"/>
-                                  <a:cs typeface="Calibri"/>
-                                </a:rPr>
-                              </m:ctrlPr>
-                            </m:sSupPr>
-                            <m:e>
-                              <m:r>
-                                <a:rPr lang="en-US" sz="1800" i="1">
-                                  <a:effectLst/>
-                                  <a:latin typeface="Cambria Math" panose="02040503050406030204" pitchFamily="18" charset="0"/>
-                                  <a:ea typeface="Calibri"/>
-                                  <a:cs typeface="Calibri"/>
-                                </a:rPr>
-                                <m:t>𝐻</m:t>
-                              </m:r>
-                            </m:e>
-                            <m:sup>
-                              <m:r>
-                                <a:rPr lang="en-US" sz="1800" i="1">
-                                  <a:effectLst/>
-                                  <a:latin typeface="Cambria Math" panose="02040503050406030204" pitchFamily="18" charset="0"/>
-                                  <a:ea typeface="Calibri"/>
-                                  <a:cs typeface="Calibri"/>
-                                </a:rPr>
-                                <m:t>𝑤</m:t>
-                              </m:r>
-                            </m:sup>
-                          </m:sSup>
-                          <m:d>
-                            <m:dPr>
-                              <m:ctrlPr>
-                                <a:rPr lang="en-US" sz="1800" i="1">
-                                  <a:effectLst/>
-                                  <a:latin typeface="Cambria Math" panose="02040503050406030204" pitchFamily="18" charset="0"/>
-                                  <a:ea typeface="Calibri"/>
-                                  <a:cs typeface="Calibri"/>
-                                </a:rPr>
-                              </m:ctrlPr>
-                            </m:dPr>
-                            <m:e>
-                              <m:sSub>
-                                <m:sSubPr>
-                                  <m:ctrlPr>
-                                    <a:rPr lang="en-US" sz="1800" i="1">
-                                      <a:effectLst/>
-                                      <a:latin typeface="Cambria Math" panose="02040503050406030204" pitchFamily="18" charset="0"/>
-                                      <a:ea typeface="Calibri"/>
-                                      <a:cs typeface="Calibri"/>
-                                    </a:rPr>
-                                  </m:ctrlPr>
-                                </m:sSubPr>
-                                <m:e>
-                                  <m:r>
-                                    <a:rPr lang="en-US" sz="1800" i="1">
-                                      <a:effectLst/>
-                                      <a:latin typeface="Cambria Math" panose="02040503050406030204" pitchFamily="18" charset="0"/>
-                                      <a:ea typeface="Calibri"/>
-                                      <a:cs typeface="Calibri"/>
-                                    </a:rPr>
-                                    <m:t>𝑥</m:t>
-                                  </m:r>
-                                </m:e>
-                                <m:sub>
-                                  <m:r>
-                                    <a:rPr lang="en-US" sz="1800">
-                                      <a:effectLst/>
-                                      <a:latin typeface="Cambria Math" panose="02040503050406030204" pitchFamily="18" charset="0"/>
-                                      <a:ea typeface="Calibri"/>
-                                      <a:cs typeface="Calibri"/>
-                                    </a:rPr>
-                                    <m:t>2</m:t>
-                                  </m:r>
-                                </m:sub>
-                              </m:sSub>
-                            </m:e>
-                          </m:d>
-                          <m:r>
-                            <a:rPr lang="en-US" sz="1800">
-                              <a:effectLst/>
-                              <a:latin typeface="Cambria Math" panose="02040503050406030204" pitchFamily="18" charset="0"/>
-                              <a:ea typeface="Calibri"/>
-                              <a:cs typeface="Calibri"/>
-                            </a:rPr>
-                            <m:t>,…,</m:t>
-                          </m:r>
-                          <m:sSup>
-                            <m:sSupPr>
-                              <m:ctrlPr>
-                                <a:rPr lang="en-US" sz="1800" i="1">
-                                  <a:effectLst/>
-                                  <a:latin typeface="Cambria Math" panose="02040503050406030204" pitchFamily="18" charset="0"/>
-                                  <a:ea typeface="Calibri"/>
-                                  <a:cs typeface="Calibri"/>
-                                </a:rPr>
-                              </m:ctrlPr>
-                            </m:sSupPr>
-                            <m:e>
-                              <m:r>
-                                <a:rPr lang="en-US" sz="1800" i="1">
-                                  <a:effectLst/>
-                                  <a:latin typeface="Cambria Math" panose="02040503050406030204" pitchFamily="18" charset="0"/>
-                                  <a:ea typeface="Calibri"/>
-                                  <a:cs typeface="Calibri"/>
-                                </a:rPr>
-                                <m:t>𝐻</m:t>
-                              </m:r>
-                            </m:e>
-                            <m:sup>
-                              <m:r>
-                                <a:rPr lang="en-US" sz="1800" i="1">
-                                  <a:effectLst/>
-                                  <a:latin typeface="Cambria Math" panose="02040503050406030204" pitchFamily="18" charset="0"/>
-                                  <a:ea typeface="Calibri"/>
-                                  <a:cs typeface="Calibri"/>
-                                </a:rPr>
-                                <m:t>𝑤</m:t>
-                              </m:r>
-                            </m:sup>
-                          </m:sSup>
-                          <m:d>
-                            <m:dPr>
-                              <m:ctrlPr>
-                                <a:rPr lang="en-US" sz="1800" i="1">
-                                  <a:effectLst/>
-                                  <a:latin typeface="Cambria Math" panose="02040503050406030204" pitchFamily="18" charset="0"/>
-                                  <a:ea typeface="Calibri"/>
-                                  <a:cs typeface="Calibri"/>
-                                </a:rPr>
-                              </m:ctrlPr>
-                            </m:dPr>
-                            <m:e>
-                              <m:sSub>
-                                <m:sSubPr>
-                                  <m:ctrlPr>
-                                    <a:rPr lang="en-US" sz="1800" i="1">
-                                      <a:effectLst/>
-                                      <a:latin typeface="Cambria Math" panose="02040503050406030204" pitchFamily="18" charset="0"/>
-                                      <a:ea typeface="Calibri"/>
-                                      <a:cs typeface="Calibri"/>
-                                    </a:rPr>
-                                  </m:ctrlPr>
-                                </m:sSubPr>
-                                <m:e>
-                                  <m:r>
-                                    <a:rPr lang="en-US" sz="1800" i="1">
-                                      <a:effectLst/>
-                                      <a:latin typeface="Cambria Math" panose="02040503050406030204" pitchFamily="18" charset="0"/>
-                                      <a:ea typeface="Calibri"/>
-                                      <a:cs typeface="Calibri"/>
-                                    </a:rPr>
-                                    <m:t>𝑥</m:t>
-                                  </m:r>
-                                </m:e>
-                                <m:sub>
-                                  <m:r>
-                                    <a:rPr lang="en-US" sz="1800" i="1">
-                                      <a:effectLst/>
-                                      <a:latin typeface="Cambria Math" panose="02040503050406030204" pitchFamily="18" charset="0"/>
-                                      <a:ea typeface="Calibri"/>
-                                      <a:cs typeface="Calibri"/>
-                                    </a:rPr>
-                                    <m:t>𝑛</m:t>
-                                  </m:r>
-                                </m:sub>
-                              </m:sSub>
-                            </m:e>
-                          </m:d>
-                        </m:e>
-                      </m:d>
-                    </m:oMath>
-                  </m:oMathPara>
-                </a14:m>
-                <a:endParaRPr lang="en-US" sz="1800" dirty="0">
-                  <a:effectLst/>
-                  <a:latin typeface="Calibri"/>
-                  <a:ea typeface="Calibri"/>
-                  <a:cs typeface="Calibri"/>
-                </a:endParaRPr>
-              </a:p>
-              <a:p>
-                <a:pPr marL="36000" marR="0" lvl="0" indent="-342900">
-                  <a:lnSpc>
-                    <a:spcPts val="1200"/>
-                  </a:lnSpc>
-                  <a:spcAft>
-                    <a:spcPts val="600"/>
-                  </a:spcAft>
-                  <a:buFont typeface="Symbol" panose="05050102010706020507" pitchFamily="18" charset="2"/>
-                  <a:buChar char=""/>
-                  <a:tabLst>
-                    <a:tab pos="685800" algn="l"/>
-                  </a:tabLst>
-                </a:pPr>
-                <a14:m>
-                  <m:oMath xmlns:m="http://schemas.openxmlformats.org/officeDocument/2006/math">
-                    <m:r>
-                      <a:rPr lang="en-US" sz="1800" i="1" smtClean="0">
-                        <a:effectLst/>
-                        <a:latin typeface="Cambria Math" panose="02040503050406030204" pitchFamily="18" charset="0"/>
-                        <a:ea typeface="Calibri"/>
-                        <a:cs typeface="Calibri"/>
-                      </a:rPr>
-                      <m:t>𝐻</m:t>
-                    </m:r>
-                  </m:oMath>
-                </a14:m>
-                <a:r>
-                  <a:rPr lang="en-US" sz="1800" dirty="0">
-                    <a:effectLst/>
-                    <a:latin typeface="Calibri"/>
-                    <a:ea typeface="Calibri"/>
-                    <a:cs typeface="Calibri"/>
-                  </a:rPr>
-                  <a:t> є криптографічною хеш-функцією (наприклад, SHA-256).</a:t>
-                </a:r>
-              </a:p>
-              <a:p>
-                <a:pPr marL="36000" marR="0" lvl="0" indent="-342900">
-                  <a:lnSpc>
-                    <a:spcPts val="1200"/>
-                  </a:lnSpc>
-                  <a:spcAft>
-                    <a:spcPts val="600"/>
-                  </a:spcAft>
-                  <a:buFont typeface="Symbol" panose="05050102010706020507" pitchFamily="18" charset="2"/>
-                  <a:buChar char=""/>
-                  <a:tabLst>
-                    <a:tab pos="685800" algn="l"/>
-                  </a:tabLst>
-                </a:pPr>
-                <a:r>
-                  <a:rPr lang="en-US" sz="1800" dirty="0">
-                    <a:effectLst/>
-                    <a:latin typeface="Calibri"/>
-                    <a:ea typeface="Calibri"/>
-                    <a:cs typeface="Calibri"/>
-                  </a:rPr>
-                  <a:t> </a:t>
-                </a:r>
-                <a14:m>
-                  <m:oMath xmlns:m="http://schemas.openxmlformats.org/officeDocument/2006/math">
-                    <m:r>
-                      <a:rPr lang="en-US" sz="1800" i="1" smtClean="0">
-                        <a:effectLst/>
-                        <a:latin typeface="Cambria Math" panose="02040503050406030204" pitchFamily="18" charset="0"/>
-                        <a:ea typeface="Calibri"/>
-                        <a:cs typeface="Calibri"/>
-                      </a:rPr>
-                      <m:t>𝑤</m:t>
-                    </m:r>
-                    <m:r>
-                      <a:rPr lang="en-US" sz="1800" i="1" smtClean="0">
-                        <a:effectLst/>
-                        <a:latin typeface="Cambria Math" panose="02040503050406030204" pitchFamily="18" charset="0"/>
-                        <a:ea typeface="Calibri"/>
-                        <a:cs typeface="Calibri"/>
-                      </a:rPr>
-                      <m:t> </m:t>
-                    </m:r>
-                  </m:oMath>
-                </a14:m>
-                <a:r>
-                  <a:rPr lang="en-US" sz="1800" dirty="0">
-                    <a:effectLst/>
-                    <a:latin typeface="Calibri"/>
-                    <a:ea typeface="Calibri"/>
-                    <a:cs typeface="Calibri"/>
-                  </a:rPr>
-                  <a:t>є параметром (</a:t>
-                </a:r>
-                <a:r>
-                  <a:rPr lang="en-US" sz="1800" dirty="0" err="1">
-                    <a:effectLst/>
-                    <a:latin typeface="Calibri"/>
-                    <a:ea typeface="Calibri"/>
-                    <a:cs typeface="Calibri"/>
-                  </a:rPr>
-                  <a:t>наприклад</a:t>
-                </a:r>
-                <a:r>
-                  <a:rPr lang="en-US" sz="1800" dirty="0">
-                    <a:effectLst/>
-                    <a:latin typeface="Calibri"/>
-                    <a:ea typeface="Calibri"/>
-                    <a:cs typeface="Calibri"/>
-                  </a:rPr>
-                  <a:t>,</a:t>
-                </a:r>
-                <a:r>
-                  <a:rPr lang="uk-UA" sz="1800" dirty="0">
-                    <a:effectLst/>
-                    <a:latin typeface="Calibri"/>
-                    <a:ea typeface="Calibri"/>
-                    <a:cs typeface="Calibri"/>
-                  </a:rPr>
-                  <a:t> </a:t>
-                </a:r>
-                <a14:m>
-                  <m:oMath xmlns:m="http://schemas.openxmlformats.org/officeDocument/2006/math">
-                    <m:r>
-                      <a:rPr lang="en-US" sz="1800" i="1">
-                        <a:latin typeface="Cambria Math" panose="02040503050406030204" pitchFamily="18" charset="0"/>
-                        <a:ea typeface="Calibri"/>
-                        <a:cs typeface="Calibri"/>
-                      </a:rPr>
-                      <m:t>𝑤</m:t>
-                    </m:r>
-                    <m:r>
-                      <a:rPr lang="en-US" sz="1800">
-                        <a:latin typeface="Cambria Math" panose="02040503050406030204" pitchFamily="18" charset="0"/>
-                        <a:ea typeface="Calibri"/>
-                        <a:cs typeface="Calibri"/>
-                      </a:rPr>
-                      <m:t>=16</m:t>
-                    </m:r>
-                  </m:oMath>
-                </a14:m>
-                <a:r>
-                  <a:rPr lang="en-US" sz="1800" dirty="0">
-                    <a:effectLst/>
-                    <a:latin typeface="Calibri"/>
-                    <a:ea typeface="Calibri"/>
-                    <a:cs typeface="Calibri"/>
-                  </a:rPr>
-                  <a:t> ).</a:t>
-                </a:r>
-              </a:p>
-              <a:p>
-                <a:endParaRPr lang="en-US" dirty="0"/>
-              </a:p>
-            </p:txBody>
-          </p:sp>
-        </mc:Choice>
-        <mc:Fallback xmlns="">
-          <p:sp>
-            <p:nvSpPr>
-              <p:cNvPr id="3" name="Content Placeholder 2">
-                <a:extLst>
-                  <a:ext uri="{FF2B5EF4-FFF2-40B4-BE49-F238E27FC236}">
-                    <a16:creationId xmlns:a16="http://schemas.microsoft.com/office/drawing/2014/main" id="{D36B7EE6-B544-03BD-0F62-90C00428CD7B}"/>
-                  </a:ext>
-                </a:extLst>
-              </p:cNvPr>
-              <p:cNvSpPr>
-                <a:spLocks noGrp="1" noRot="1" noChangeAspect="1" noMove="1" noResize="1" noEditPoints="1" noAdjustHandles="1" noChangeArrowheads="1" noChangeShapeType="1" noTextEdit="1"/>
-              </p:cNvSpPr>
-              <p:nvPr>
-                <p:ph idx="1"/>
-              </p:nvPr>
-            </p:nvSpPr>
-            <p:spPr>
-              <a:xfrm>
-                <a:off x="1793240" y="1690688"/>
-                <a:ext cx="8305800" cy="4667250"/>
-              </a:xfrm>
-              <a:blipFill>
-                <a:blip r:embed="rId2"/>
-                <a:stretch>
-                  <a:fillRect l="-587" t="-2872"/>
-                </a:stretch>
-              </a:blipFill>
-            </p:spPr>
-            <p:txBody>
-              <a:bodyPr>
-                <a:normAutoFit/>
-              </a:bodyPr>
-              <a:lstStyle/>
-              <a:p>
-                <a:r>
-                  <a:rPr lang="uk-UA">
-                    <a:noFill/>
-                  </a:rPr>
-                  <a:t> </a:t>
-                </a:r>
-              </a:p>
-            </p:txBody>
-          </p:sp>
-        </mc:Fallback>
-      </mc:AlternateContent>
-    </p:spTree>
-    <p:extLst>
-      <p:ext uri="{BB962C8B-B14F-4D97-AF65-F5344CB8AC3E}">
-        <p14:creationId xmlns:p14="http://schemas.microsoft.com/office/powerpoint/2010/main" val="169095086"/>
-      </p:ext>
-    </p:extLst>
-  </p:cSld>
-  <p:clrMapOvr>
-    <a:masterClrMapping/>
-  </p:clrMapOvr>
-</p:sld>
-</file>
-
-<file path=ppt/slides/slide11.xml><?xml version="1.0" encoding="utf-8"?>
-<p:sld xmlns:a="http://schemas.openxmlformats.org/drawingml/2006/main" xmlns:r="http://schemas.openxmlformats.org/officeDocument/2006/relationships" xmlns:p="http://schemas.openxmlformats.org/presentationml/2006/main">
-  <p:cSld>
-    <p:spTree>
-      <p:nvGrpSpPr>
-        <p:cNvPr id="1" name=""/>
-        <p:cNvGrpSpPr/>
-        <p:nvPr/>
-      </p:nvGrpSpPr>
-      <p:grpSpPr>
-        <a:xfrm>
-          <a:off x="0" y="0"/>
-          <a:ext cx="0" cy="0"/>
-          <a:chOff x="0" y="0"/>
-          <a:chExt cx="0" cy="0"/>
-        </a:xfrm>
-      </p:grpSpPr>
-      <p:sp>
-        <p:nvSpPr>
-          <p:cNvPr id="2" name="Title 1">
-            <a:extLst>
-              <a:ext uri="{FF2B5EF4-FFF2-40B4-BE49-F238E27FC236}">
                 <a16:creationId xmlns:a16="http://schemas.microsoft.com/office/drawing/2014/main" id="{DBE12A03-4CF5-71CA-4C7A-ABB86C0D20AC}"/>
               </a:ext>
             </a:extLst>
@@ -5164,13 +4134,13 @@
                 </a:solidFill>
                 <a:latin typeface="Calibri"/>
               </a:rPr>
-              <a:t>Генерація підпису</a:t>
+              <a:t>WOTS: генерація підпису</a:t>
             </a:r>
           </a:p>
         </p:txBody>
       </p:sp>
-      <mc:AlternateContent xmlns:mc="http://schemas.openxmlformats.org/markup-compatibility/2006">
-        <mc:Choice xmlns:a14="http://schemas.microsoft.com/office/drawing/2010/main" Requires="a14">
+      <mc:AlternateContent xmlns:mc="http://schemas.openxmlformats.org/markup-compatibility/2006" xmlns:a14="http://schemas.microsoft.com/office/drawing/2010/main">
+        <mc:Choice Requires="a14">
           <p:sp>
             <p:nvSpPr>
               <p:cNvPr id="5" name="TextBox 4">
@@ -5185,7 +4155,7 @@
             </p:nvSpPr>
             <p:spPr>
               <a:xfrm>
-                <a:off x="690880" y="899405"/>
+                <a:off x="457200" y="963200"/>
                 <a:ext cx="11277600" cy="6019597"/>
               </a:xfrm>
               <a:prstGeom prst="rect">
@@ -5261,15 +4231,7 @@
                     <a:ea typeface="Calibri"/>
                     <a:cs typeface="Calibri"/>
                   </a:rPr>
-                  <a:t>, щоб отримати дайджест фіксованої довжини:</a:t>
-                </a:r>
-                <a:r>
-                  <a:rPr lang="en-US" sz="1600" dirty="0">
-                    <a:latin typeface="Calibri"/>
-                    <a:ea typeface="Calibri"/>
-                    <a:cs typeface="Calibri"/>
-                  </a:rPr>
-                  <a:t> </a:t>
+                  <a:t>, щоб отримати дайджест фіксованої довжини: </a:t>
                 </a:r>
                 <a14:m>
                   <m:oMath xmlns:m="http://schemas.openxmlformats.org/officeDocument/2006/math">
@@ -5450,13 +4412,6 @@
                   </a:rPr>
                   <a:t>.</a:t>
                 </a:r>
-              </a:p>
-              <a:p>
-                <a:pPr marL="360000" marR="0">
-                  <a:spcAft>
-                    <a:spcPts val="1100"/>
-                  </a:spcAft>
-                </a:pPr>
                 <a:endParaRPr lang="uk-UA" sz="1600" b="1" dirty="0">
                   <a:effectLst/>
                   <a:latin typeface="Calibri"/>
@@ -5471,13 +4426,22 @@
                   </a:spcAft>
                 </a:pPr>
                 <a:r>
+                  <a:rPr lang="en-US" sz="1600" b="1" dirty="0" err="1">
+                    <a:effectLst/>
+                    <a:latin typeface="Calibri"/>
+                    <a:ea typeface="Calibri"/>
+                    <a:cs typeface="Calibri"/>
+                  </a:rPr>
+                  <a:t>Крок</a:t>
+                </a:r>
+                <a:r>
                   <a:rPr lang="en-US" sz="1600" b="1" dirty="0">
                     <a:effectLst/>
                     <a:latin typeface="Calibri"/>
                     <a:ea typeface="Calibri"/>
                     <a:cs typeface="Calibri"/>
                   </a:rPr>
-                  <a:t>Крок 2: </a:t>
+                  <a:t> 2: </a:t>
                 </a:r>
                 <a:r>
                   <a:rPr lang="en-US" sz="1600" dirty="0">
@@ -5887,28 +4851,6 @@
                     <a:spcPts val="1100"/>
                   </a:spcAft>
                 </a:pPr>
-                <a:endParaRPr lang="en-US" sz="1600" b="1" dirty="0">
-                  <a:effectLst/>
-                  <a:latin typeface="Calibri"/>
-                  <a:ea typeface="Calibri"/>
-                  <a:cs typeface="Calibri"/>
-                </a:endParaRPr>
-              </a:p>
-              <a:p>
-                <a:pPr marL="360000" marR="0">
-                  <a:spcAft>
-                    <a:spcPts val="1100"/>
-                  </a:spcAft>
-                </a:pPr>
-                <a:r>
-                  <a:rPr lang="en-US" sz="1600" b="1" dirty="0" err="1">
-                    <a:effectLst/>
-                    <a:latin typeface="Calibri"/>
-                    <a:ea typeface="Calibri"/>
-                    <a:cs typeface="Calibri"/>
-                  </a:rPr>
-                  <a:t>Крок</a:t>
-                </a:r>
                 <a:r>
                   <a:rPr lang="en-US" sz="1600" b="1" dirty="0">
                     <a:effectLst/>
@@ -5916,7 +4858,7 @@
                     <a:ea typeface="Calibri"/>
                     <a:cs typeface="Calibri"/>
                   </a:rPr>
-                  <a:t> 3</a:t>
+                  <a:t>Крок 3</a:t>
                 </a:r>
                 <a:r>
                   <a:rPr lang="en-US" sz="1600" dirty="0">
@@ -6162,7 +5104,7 @@
                     <m:sSub>
                       <m:sSubPr>
                         <m:ctrlPr>
-                          <a:rPr lang="en-US" sz="1600" i="1" smtClean="0">
+                          <a:rPr lang="en-US" sz="1600" i="1">
                             <a:effectLst/>
                             <a:latin typeface="Cambria Math" panose="02040503050406030204" pitchFamily="18" charset="0"/>
                             <a:ea typeface="Calibri"/>
@@ -6327,6 +5269,31 @@
                     <a:tab pos="685800" algn="l"/>
                   </a:tabLst>
                 </a:pPr>
+                <a:endParaRPr lang="en-US" sz="1600" dirty="0">
+                  <a:effectLst/>
+                  <a:latin typeface="Calibri"/>
+                  <a:ea typeface="Calibri"/>
+                  <a:cs typeface="Calibri"/>
+                </a:endParaRPr>
+              </a:p>
+              <a:p>
+                <a:pPr marL="360000" marR="0" lvl="0">
+                  <a:spcAft>
+                    <a:spcPts val="600"/>
+                  </a:spcAft>
+                  <a:tabLst>
+                    <a:tab pos="685800" algn="l"/>
+                  </a:tabLst>
+                </a:pPr>
+                <a:r>
+                  <a:rPr lang="en-US" sz="1600" dirty="0" err="1">
+                    <a:effectLst/>
+                    <a:latin typeface="Calibri"/>
+                    <a:ea typeface="Calibri"/>
+                    <a:cs typeface="Calibri"/>
+                  </a:rPr>
+                  <a:t>Приклад</a:t>
+                </a:r>
                 <a:r>
                   <a:rPr lang="en-US" sz="1600" dirty="0">
                     <a:effectLst/>
@@ -6334,7 +5301,7 @@
                     <a:ea typeface="Calibri"/>
                     <a:cs typeface="Calibri"/>
                   </a:rPr>
-                  <a:t>Приклад:</a:t>
+                  <a:t>:</a:t>
                 </a:r>
               </a:p>
               <a:p>
@@ -7253,7 +6220,7 @@
                     <a:ea typeface="Calibri"/>
                     <a:cs typeface="Calibri"/>
                   </a:rPr>
-                  <a:t>Підпис — </a:t>
+                  <a:t>Підпис - </a:t>
                 </a:r>
                 <a:r>
                   <a:rPr lang="en-US" sz="1600" dirty="0" err="1">
@@ -7498,7 +6465,7 @@
             </p:txBody>
           </p:sp>
         </mc:Choice>
-        <mc:Fallback>
+        <mc:Fallback xmlns="">
           <p:sp>
             <p:nvSpPr>
               <p:cNvPr id="5" name="TextBox 4">
@@ -7515,7 +6482,7 @@
             </p:nvSpPr>
             <p:spPr>
               <a:xfrm>
-                <a:off x="690880" y="899405"/>
+                <a:off x="457200" y="963200"/>
                 <a:ext cx="11277600" cy="6019597"/>
               </a:xfrm>
               <a:prstGeom prst="rect">
@@ -7524,7 +6491,7 @@
               <a:blipFill>
                 <a:blip r:embed="rId2"/>
                 <a:stretch>
-                  <a:fillRect l="-337" t="-422"/>
+                  <a:fillRect l="-337" t="-211"/>
                 </a:stretch>
               </a:blipFill>
             </p:spPr>
@@ -7556,7 +6523,7 @@
 </p:sld>
 </file>
 
-<file path=ppt/slides/slide12.xml><?xml version="1.0" encoding="utf-8"?>
+<file path=ppt/slides/slide11.xml><?xml version="1.0" encoding="utf-8"?>
 <p:sld xmlns:a="http://schemas.openxmlformats.org/drawingml/2006/main" xmlns:r="http://schemas.openxmlformats.org/officeDocument/2006/relationships" xmlns:p="http://schemas.openxmlformats.org/presentationml/2006/main">
   <p:cSld>
     <p:spTree>
@@ -7602,7 +6569,7 @@
                 </a:solidFill>
                 <a:latin typeface="Calibri"/>
               </a:rPr>
-              <a:t>Перевірка підпису</a:t>
+              <a:t>WOTS: перевірка підпису</a:t>
             </a:r>
           </a:p>
         </p:txBody>
@@ -9495,7 +8462,7 @@
             </p:spPr>
             <p:txBody>
               <a:bodyPr>
-                <a:normAutoFit/>
+                <a:normAutoFit fontScale="75000" lnSpcReduction="20000"/>
               </a:bodyPr>
               <a:lstStyle/>
               <a:p>
@@ -9523,7 +8490,7 @@
 </p:sld>
 </file>
 
-<file path=ppt/slides/slide13.xml><?xml version="1.0" encoding="utf-8"?>
+<file path=ppt/slides/slide12.xml><?xml version="1.0" encoding="utf-8"?>
 <p:sld xmlns:a="http://schemas.openxmlformats.org/drawingml/2006/main" xmlns:r="http://schemas.openxmlformats.org/officeDocument/2006/relationships" xmlns:p="http://schemas.openxmlformats.org/presentationml/2006/main">
   <p:cSld>
     <p:spTree>
@@ -9593,8 +8560,8 @@
           </a:p>
         </p:txBody>
       </p:sp>
-      <mc:AlternateContent xmlns:mc="http://schemas.openxmlformats.org/markup-compatibility/2006">
-        <mc:Choice xmlns:a14="http://schemas.microsoft.com/office/drawing/2010/main" Requires="a14">
+      <mc:AlternateContent xmlns:mc="http://schemas.openxmlformats.org/markup-compatibility/2006" xmlns:a14="http://schemas.microsoft.com/office/drawing/2010/main">
+        <mc:Choice Requires="a14">
           <p:sp>
             <p:nvSpPr>
               <p:cNvPr id="5" name="TextBox 4">
@@ -9609,7 +8576,7 @@
             </p:nvSpPr>
             <p:spPr>
               <a:xfrm>
-                <a:off x="223520" y="957922"/>
+                <a:off x="223520" y="831670"/>
                 <a:ext cx="11968480" cy="5810950"/>
               </a:xfrm>
               <a:prstGeom prst="rect">
@@ -9839,7 +8806,7 @@
                     <a:ea typeface="Calibri"/>
                     <a:cs typeface="Calibri"/>
                   </a:rPr>
-                  <a:t> : </a:t>
+                  <a:t> :</a:t>
                 </a:r>
                 <a14:m>
                   <m:oMath xmlns:m="http://schemas.openxmlformats.org/officeDocument/2006/math">
@@ -10669,7 +9636,7 @@
                     <a:ea typeface="Calibri"/>
                     <a:cs typeface="Calibri"/>
                   </a:rPr>
-                  <a:t>, зловмисник може обчислити: </a:t>
+                  <a:t>, зловмисник може обчислити:</a:t>
                 </a:r>
                 <a14:m>
                   <m:oMath xmlns:m="http://schemas.openxmlformats.org/officeDocument/2006/math">
@@ -11116,6 +10083,19 @@
                     <a:cs typeface="Calibri"/>
                   </a:rPr>
                 </a:br>
+                <a:endParaRPr lang="en-US" sz="1600" dirty="0">
+                  <a:effectLst/>
+                  <a:latin typeface="Calibri"/>
+                  <a:ea typeface="Calibri"/>
+                  <a:cs typeface="Calibri"/>
+                </a:endParaRPr>
+              </a:p>
+              <a:p>
+                <a:pPr marL="0" marR="0">
+                  <a:spcAft>
+                    <a:spcPts val="1100"/>
+                  </a:spcAft>
+                </a:pPr>
                 <a:r>
                   <a:rPr lang="en-US" sz="1600" dirty="0">
                     <a:effectLst/>
@@ -11320,13 +10300,22 @@
                   </a:tabLst>
                 </a:pPr>
                 <a:r>
+                  <a:rPr lang="en-US" sz="1600" dirty="0" err="1">
+                    <a:effectLst/>
+                    <a:latin typeface="Calibri"/>
+                    <a:ea typeface="Calibri"/>
+                    <a:cs typeface="Calibri"/>
+                  </a:rPr>
+                  <a:t>Наприклад</a:t>
+                </a:r>
+                <a:r>
                   <a:rPr lang="en-US" sz="1600" dirty="0">
                     <a:effectLst/>
                     <a:latin typeface="Calibri"/>
                     <a:ea typeface="Calibri"/>
                     <a:cs typeface="Calibri"/>
                   </a:rPr>
-                  <a:t>Наприклад:</a:t>
+                  <a:t>:</a:t>
                 </a:r>
               </a:p>
               <a:p>
@@ -11485,7 +10474,7 @@
                     <a:ea typeface="Calibri"/>
                     <a:cs typeface="Calibri"/>
                   </a:rPr>
-                  <a:t>, зловмисник дізнається: </a:t>
+                  <a:t>, зловмисник дізнається:</a:t>
                 </a:r>
                 <a14:m>
                   <m:oMath xmlns:m="http://schemas.openxmlformats.org/officeDocument/2006/math">
@@ -11935,7 +10924,7 @@
             </p:txBody>
           </p:sp>
         </mc:Choice>
-        <mc:Fallback>
+        <mc:Fallback xmlns="">
           <p:sp>
             <p:nvSpPr>
               <p:cNvPr id="5" name="TextBox 4">
@@ -11952,7 +10941,7 @@
             </p:nvSpPr>
             <p:spPr>
               <a:xfrm>
-                <a:off x="223520" y="957922"/>
+                <a:off x="223520" y="831670"/>
                 <a:ext cx="11968480" cy="5810950"/>
               </a:xfrm>
               <a:prstGeom prst="rect">
@@ -11961,7 +10950,7 @@
               <a:blipFill>
                 <a:blip r:embed="rId2"/>
                 <a:stretch>
-                  <a:fillRect l="-318" t="-437"/>
+                  <a:fillRect l="-318" t="-436"/>
                 </a:stretch>
               </a:blipFill>
             </p:spPr>
@@ -11993,7 +10982,7 @@
 </p:sld>
 </file>
 
-<file path=ppt/slides/slide14.xml><?xml version="1.0" encoding="utf-8"?>
+<file path=ppt/slides/slide13.xml><?xml version="1.0" encoding="utf-8"?>
 <p:sld xmlns:a="http://schemas.openxmlformats.org/drawingml/2006/main" xmlns:r="http://schemas.openxmlformats.org/officeDocument/2006/relationships" xmlns:p="http://schemas.openxmlformats.org/presentationml/2006/main">
   <p:cSld>
     <p:spTree>
@@ -12010,6 +10999,45 @@
           <a:chExt cx="0" cy="0"/>
         </a:xfrm>
       </p:grpSpPr>
+      <p:sp>
+        <p:nvSpPr>
+          <p:cNvPr id="999" name="Title 1">
+            <a:extLst>
+              <a:ext uri="{FF2B5EF4-FFF2-40B4-BE49-F238E27FC236}">
+                <a16:creationId xmlns:a16="http://schemas.microsoft.com/office/drawing/2014/main" id="{DB35051B-F397-768C-04C8-682CD290A712}"/>
+              </a:ext>
+            </a:extLst>
+          </p:cNvPr>
+          <p:cNvSpPr>
+            <a:spLocks noGrp="1"/>
+          </p:cNvSpPr>
+          <p:nvPr>
+            <p:ph type="title"/>
+          </p:nvPr>
+        </p:nvSpPr>
+        <p:spPr>
+          <a:xfrm>
+            <a:off x="838200" y="365125"/>
+            <a:ext cx="9443720" cy="1325563"/>
+          </a:xfrm>
+        </p:spPr>
+        <p:txBody>
+          <a:bodyPr/>
+          <a:lstStyle/>
+          <a:p>
+            <a:pPr algn="ctr"/>
+            <a:r>
+              <a:rPr lang="en-US" b="1" dirty="0">
+                <a:solidFill>
+                  <a:srgbClr val="203864"/>
+                </a:solidFill>
+                <a:latin typeface="Calibri"/>
+              </a:rPr>
+              <a:t>Постквантова безпека WOTS</a:t>
+            </a:r>
+          </a:p>
+        </p:txBody>
+      </p:sp>
       <p:sp>
         <p:nvSpPr>
           <p:cNvPr id="3" name="Content Placeholder 2">
@@ -12034,6 +11062,9 @@
           <a:lstStyle/>
           <a:p>
             <a:pPr algn="just">
+              <a:lnSpc>
+                <a:spcPct val="150000"/>
+              </a:lnSpc>
               <a:spcAft>
                 <a:spcPts val="300"/>
               </a:spcAft>
@@ -12041,14 +11072,14 @@
               <a:buChar char="•"/>
             </a:pPr>
             <a:r>
-              <a:rPr lang="en-US" sz="2000" b="1" i="0" dirty="0">
+              <a:rPr lang="en-US" sz="1800" b="1" i="0" dirty="0">
                 <a:effectLst/>
                 <a:latin typeface="Calibri"/>
               </a:rPr>
               <a:t>Постквантова безпека</a:t>
             </a:r>
             <a:r>
-              <a:rPr lang="en-US" sz="2000" b="0" i="0" dirty="0">
+              <a:rPr lang="en-US" sz="1800" b="0" i="0" dirty="0">
                 <a:effectLst/>
                 <a:latin typeface="Calibri"/>
               </a:rPr>
@@ -12057,6 +11088,9 @@
           </a:p>
           <a:p>
             <a:pPr marL="742950" lvl="1" indent="-285750" algn="just">
+              <a:lnSpc>
+                <a:spcPct val="150000"/>
+              </a:lnSpc>
               <a:spcBef>
                 <a:spcPts val="300"/>
               </a:spcBef>
@@ -12064,7 +11098,7 @@
               <a:buChar char="•"/>
             </a:pPr>
             <a:r>
-              <a:rPr lang="en-US" sz="2000" b="0" i="0" dirty="0">
+              <a:rPr lang="en-US" sz="1800" b="0" i="0" dirty="0">
                 <a:effectLst/>
                 <a:latin typeface="Calibri"/>
               </a:rPr>
@@ -12073,6 +11107,9 @@
           </a:p>
           <a:p>
             <a:pPr algn="just">
+              <a:lnSpc>
+                <a:spcPct val="150000"/>
+              </a:lnSpc>
               <a:spcBef>
                 <a:spcPts val="300"/>
               </a:spcBef>
@@ -12083,14 +11120,14 @@
               <a:buChar char="•"/>
             </a:pPr>
             <a:r>
-              <a:rPr lang="en-US" sz="2000" b="1" i="0" dirty="0">
+              <a:rPr lang="en-US" sz="1800" b="1" i="0" dirty="0">
                 <a:effectLst/>
                 <a:latin typeface="Calibri"/>
               </a:rPr>
               <a:t>Менші підписи</a:t>
             </a:r>
             <a:r>
-              <a:rPr lang="en-US" sz="2000" b="0" i="0" dirty="0">
+              <a:rPr lang="en-US" sz="1800" b="0" i="0" dirty="0">
                 <a:effectLst/>
                 <a:latin typeface="Calibri"/>
               </a:rPr>
@@ -12099,6 +11136,9 @@
           </a:p>
           <a:p>
             <a:pPr marL="742950" lvl="1" indent="-285750" algn="just">
+              <a:lnSpc>
+                <a:spcPct val="150000"/>
+              </a:lnSpc>
               <a:spcBef>
                 <a:spcPts val="300"/>
               </a:spcBef>
@@ -12106,7 +11146,7 @@
               <a:buChar char="•"/>
             </a:pPr>
             <a:r>
-              <a:rPr lang="en-US" sz="2000" b="0" i="0" dirty="0">
+              <a:rPr lang="en-US" sz="1800" b="0" i="0" dirty="0">
                 <a:effectLst/>
                 <a:latin typeface="Calibri"/>
               </a:rPr>
@@ -12115,6 +11155,9 @@
           </a:p>
           <a:p>
             <a:pPr algn="just">
+              <a:lnSpc>
+                <a:spcPct val="150000"/>
+              </a:lnSpc>
               <a:spcBef>
                 <a:spcPts val="300"/>
               </a:spcBef>
@@ -12125,14 +11168,14 @@
               <a:buChar char="•"/>
             </a:pPr>
             <a:r>
-              <a:rPr lang="en-US" sz="2000" b="1" i="0" dirty="0">
+              <a:rPr lang="en-US" sz="1800" b="1" i="0" dirty="0">
                 <a:effectLst/>
                 <a:latin typeface="Calibri"/>
               </a:rPr>
               <a:t>Нечасте використання</a:t>
             </a:r>
             <a:r>
-              <a:rPr lang="en-US" sz="2000" b="0" i="0" dirty="0">
+              <a:rPr lang="en-US" sz="1800" b="0" i="0" dirty="0">
                 <a:effectLst/>
                 <a:latin typeface="Calibri"/>
               </a:rPr>
@@ -12141,6 +11184,9 @@
           </a:p>
           <a:p>
             <a:pPr marL="742950" lvl="1" indent="-285750" algn="just">
+              <a:lnSpc>
+                <a:spcPct val="150000"/>
+              </a:lnSpc>
               <a:spcBef>
                 <a:spcPts val="300"/>
               </a:spcBef>
@@ -12148,7 +11194,7 @@
               <a:buChar char="•"/>
             </a:pPr>
             <a:r>
-              <a:rPr lang="en-US" sz="2000" b="0" i="0" dirty="0">
+              <a:rPr lang="en-US" sz="1800" b="0" i="0" dirty="0">
                 <a:effectLst/>
                 <a:latin typeface="Calibri"/>
               </a:rPr>
@@ -12156,7 +11202,12 @@
             </a:r>
           </a:p>
           <a:p>
-            <a:endParaRPr lang="en-US" sz="2000" dirty="0"/>
+            <a:pPr>
+              <a:lnSpc>
+                <a:spcPct val="150000"/>
+              </a:lnSpc>
+            </a:pPr>
+            <a:endParaRPr lang="en-US" sz="1800" dirty="0"/>
           </a:p>
         </p:txBody>
       </p:sp>
@@ -12173,7 +11224,7 @@
 </p:sld>
 </file>
 
-<file path=ppt/slides/slide15.xml><?xml version="1.0" encoding="utf-8"?>
+<file path=ppt/slides/slide14.xml><?xml version="1.0" encoding="utf-8"?>
 <p:sld xmlns:a="http://schemas.openxmlformats.org/drawingml/2006/main" xmlns:r="http://schemas.openxmlformats.org/officeDocument/2006/relationships" xmlns:p="http://schemas.openxmlformats.org/presentationml/2006/main">
   <p:cSld>
     <p:spTree>
@@ -12226,13 +11277,13 @@
                 </a:solidFill>
                 <a:latin typeface="Calibri"/>
               </a:rPr>
-              <a:t>ГЕНЕРАЦІЯ КЛЮЧІВ</a:t>
+              <a:t>MSS: генерація ключів</a:t>
             </a:r>
           </a:p>
         </p:txBody>
       </p:sp>
-      <mc:AlternateContent xmlns:mc="http://schemas.openxmlformats.org/markup-compatibility/2006">
-        <mc:Choice xmlns:a14="http://schemas.microsoft.com/office/drawing/2010/main" Requires="a14">
+      <mc:AlternateContent xmlns:mc="http://schemas.openxmlformats.org/markup-compatibility/2006" xmlns:a14="http://schemas.microsoft.com/office/drawing/2010/main">
+        <mc:Choice Requires="a14">
           <p:sp>
             <p:nvSpPr>
               <p:cNvPr id="9" name="TextBox 8">
@@ -12319,65 +11370,77 @@
                     <a:ea typeface="Calibri"/>
                     <a:cs typeface="Calibri"/>
                   </a:rPr>
-                  <a:t>, щоб отримати дайджест фіксованої довжини: </a:t>
-                </a:r>
+                  <a:t>, щоб отримати дайджест фіксованої довжини:</a:t>
+                </a:r>
+              </a:p>
+              <a:p>
+                <a:pPr marL="0" marR="0">
+                  <a:spcAft>
+                    <a:spcPts val="1100"/>
+                  </a:spcAft>
+                </a:pPr>
                 <a14:m>
-                  <m:oMath xmlns:m="http://schemas.openxmlformats.org/officeDocument/2006/math">
-                    <m:r>
-                      <a:rPr lang="en-US" sz="1800" i="1">
-                        <a:effectLst/>
-                        <a:latin typeface="Cambria Math" panose="02040503050406030204" pitchFamily="18" charset="0"/>
-                        <a:ea typeface="Calibri"/>
-                        <a:cs typeface="Calibri"/>
-                      </a:rPr>
-                      <m:t>h</m:t>
-                    </m:r>
-                    <m:r>
-                      <a:rPr lang="en-US" sz="1800">
-                        <a:effectLst/>
-                        <a:latin typeface="Cambria Math" panose="02040503050406030204" pitchFamily="18" charset="0"/>
-                        <a:ea typeface="Calibri"/>
-                        <a:cs typeface="Calibri"/>
-                      </a:rPr>
-                      <m:t>=</m:t>
-                    </m:r>
-                    <m:r>
-                      <a:rPr lang="en-US" sz="1800" i="1">
-                        <a:effectLst/>
-                        <a:latin typeface="Cambria Math" panose="02040503050406030204" pitchFamily="18" charset="0"/>
-                        <a:ea typeface="Calibri"/>
-                        <a:cs typeface="Calibri"/>
-                      </a:rPr>
-                      <m:t>𝐻</m:t>
-                    </m:r>
-                    <m:r>
-                      <a:rPr lang="en-US" sz="1800">
-                        <a:effectLst/>
-                        <a:latin typeface="Cambria Math" panose="02040503050406030204" pitchFamily="18" charset="0"/>
-                        <a:ea typeface="Calibri"/>
-                        <a:cs typeface="Calibri"/>
-                      </a:rPr>
-                      <m:t>(</m:t>
-                    </m:r>
-                    <m:r>
-                      <a:rPr lang="en-US" sz="1800" i="1">
-                        <a:effectLst/>
-                        <a:latin typeface="Cambria Math" panose="02040503050406030204" pitchFamily="18" charset="0"/>
-                        <a:ea typeface="Calibri"/>
-                        <a:cs typeface="Calibri"/>
-                      </a:rPr>
-                      <m:t>𝑚</m:t>
-                    </m:r>
-                    <m:r>
-                      <a:rPr lang="en-US" sz="1800">
-                        <a:effectLst/>
-                        <a:latin typeface="Cambria Math" panose="02040503050406030204" pitchFamily="18" charset="0"/>
-                        <a:ea typeface="Calibri"/>
-                        <a:cs typeface="Calibri"/>
-                      </a:rPr>
-                      <m:t>)</m:t>
-                    </m:r>
-                  </m:oMath>
+                  <m:oMathPara xmlns:m="http://schemas.openxmlformats.org/officeDocument/2006/math">
+                    <m:oMathParaPr>
+                      <m:jc m:val="centerGroup"/>
+                    </m:oMathParaPr>
+                    <m:oMath xmlns:m="http://schemas.openxmlformats.org/officeDocument/2006/math">
+                      <m:r>
+                        <a:rPr lang="en-US" sz="1800" i="1">
+                          <a:effectLst/>
+                          <a:latin typeface="Cambria Math" panose="02040503050406030204" pitchFamily="18" charset="0"/>
+                          <a:ea typeface="Calibri"/>
+                          <a:cs typeface="Calibri"/>
+                        </a:rPr>
+                        <m:t>h</m:t>
+                      </m:r>
+                      <m:r>
+                        <a:rPr lang="en-US" sz="1800">
+                          <a:effectLst/>
+                          <a:latin typeface="Cambria Math" panose="02040503050406030204" pitchFamily="18" charset="0"/>
+                          <a:ea typeface="Calibri"/>
+                          <a:cs typeface="Calibri"/>
+                        </a:rPr>
+                        <m:t>=</m:t>
+                      </m:r>
+                      <m:r>
+                        <a:rPr lang="en-US" sz="1800" i="1">
+                          <a:effectLst/>
+                          <a:latin typeface="Cambria Math" panose="02040503050406030204" pitchFamily="18" charset="0"/>
+                          <a:ea typeface="Calibri"/>
+                          <a:cs typeface="Calibri"/>
+                        </a:rPr>
+                        <m:t>𝐻</m:t>
+                      </m:r>
+                      <m:r>
+                        <a:rPr lang="en-US" sz="1800">
+                          <a:effectLst/>
+                          <a:latin typeface="Cambria Math" panose="02040503050406030204" pitchFamily="18" charset="0"/>
+                          <a:ea typeface="Calibri"/>
+                          <a:cs typeface="Calibri"/>
+                        </a:rPr>
+                        <m:t>(</m:t>
+                      </m:r>
+                      <m:r>
+                        <a:rPr lang="en-US" sz="1800" i="1">
+                          <a:effectLst/>
+                          <a:latin typeface="Cambria Math" panose="02040503050406030204" pitchFamily="18" charset="0"/>
+                          <a:ea typeface="Calibri"/>
+                          <a:cs typeface="Calibri"/>
+                        </a:rPr>
+                        <m:t>𝑚</m:t>
+                      </m:r>
+                      <m:r>
+                        <a:rPr lang="en-US" sz="1800">
+                          <a:effectLst/>
+                          <a:latin typeface="Cambria Math" panose="02040503050406030204" pitchFamily="18" charset="0"/>
+                          <a:ea typeface="Calibri"/>
+                          <a:cs typeface="Calibri"/>
+                        </a:rPr>
+                        <m:t>)</m:t>
+                      </m:r>
+                    </m:oMath>
+                  </m:oMathPara>
                 </a14:m>
                 <a:endParaRPr lang="en-US" sz="1800" dirty="0">
                   <a:effectLst/>
@@ -12758,140 +11821,152 @@
                     <a:ea typeface="Calibri"/>
                     <a:cs typeface="Calibri"/>
                   </a:rPr>
-                  <a:t>, кожен фрагмент має розмір 4 біти: </a:t>
-                </a:r>
+                  <a:t>, кожен фрагмент має розмір 4 біти:</a:t>
+                </a:r>
+              </a:p>
+              <a:p>
+                <a:pPr marL="0" marR="0">
+                  <a:spcAft>
+                    <a:spcPts val="1100"/>
+                  </a:spcAft>
+                </a:pPr>
                 <a14:m>
-                  <m:oMath xmlns:m="http://schemas.openxmlformats.org/officeDocument/2006/math">
-                    <m:sSub>
-                      <m:sSubPr>
-                        <m:ctrlPr>
-                          <a:rPr lang="en-US" sz="1800" i="1">
-                            <a:effectLst/>
-                            <a:latin typeface="Cambria Math" panose="02040503050406030204" pitchFamily="18" charset="0"/>
-                            <a:ea typeface="Calibri"/>
-                            <a:cs typeface="Calibri"/>
-                          </a:rPr>
-                        </m:ctrlPr>
-                      </m:sSubPr>
-                      <m:e>
-                        <m:r>
-                          <a:rPr lang="en-US" sz="1800" i="1">
-                            <a:effectLst/>
-                            <a:latin typeface="Cambria Math" panose="02040503050406030204" pitchFamily="18" charset="0"/>
-                            <a:ea typeface="Calibri"/>
-                            <a:cs typeface="Calibri"/>
-                          </a:rPr>
-                          <m:t>𝑐</m:t>
-                        </m:r>
-                      </m:e>
-                      <m:sub>
-                        <m:r>
-                          <a:rPr lang="en-US" sz="1800">
-                            <a:effectLst/>
-                            <a:latin typeface="Cambria Math" panose="02040503050406030204" pitchFamily="18" charset="0"/>
-                            <a:ea typeface="Calibri"/>
-                            <a:cs typeface="Calibri"/>
-                          </a:rPr>
-                          <m:t>1</m:t>
-                        </m:r>
-                      </m:sub>
-                    </m:sSub>
-                    <m:r>
-                      <a:rPr lang="en-US" sz="1800">
-                        <a:effectLst/>
-                        <a:latin typeface="Cambria Math" panose="02040503050406030204" pitchFamily="18" charset="0"/>
-                        <a:ea typeface="Calibri"/>
-                        <a:cs typeface="Calibri"/>
-                      </a:rPr>
-                      <m:t>=1011=11, </m:t>
-                    </m:r>
-                    <m:sSub>
-                      <m:sSubPr>
-                        <m:ctrlPr>
-                          <a:rPr lang="en-US" sz="1800" i="1">
-                            <a:effectLst/>
-                            <a:latin typeface="Cambria Math" panose="02040503050406030204" pitchFamily="18" charset="0"/>
-                            <a:ea typeface="Calibri"/>
-                            <a:cs typeface="Calibri"/>
-                          </a:rPr>
-                        </m:ctrlPr>
-                      </m:sSubPr>
-                      <m:e>
-                        <m:r>
-                          <a:rPr lang="en-US" sz="1800" i="1">
-                            <a:effectLst/>
-                            <a:latin typeface="Cambria Math" panose="02040503050406030204" pitchFamily="18" charset="0"/>
-                            <a:ea typeface="Calibri"/>
-                            <a:cs typeface="Calibri"/>
-                          </a:rPr>
-                          <m:t>𝑐</m:t>
-                        </m:r>
-                      </m:e>
-                      <m:sub>
-                        <m:r>
-                          <a:rPr lang="en-US" sz="1800">
-                            <a:effectLst/>
-                            <a:latin typeface="Cambria Math" panose="02040503050406030204" pitchFamily="18" charset="0"/>
-                            <a:ea typeface="Calibri"/>
-                            <a:cs typeface="Calibri"/>
-                          </a:rPr>
-                          <m:t>2</m:t>
-                        </m:r>
-                      </m:sub>
-                    </m:sSub>
-                    <m:r>
-                      <a:rPr lang="en-US" sz="1800">
-                        <a:effectLst/>
-                        <a:latin typeface="Cambria Math" panose="02040503050406030204" pitchFamily="18" charset="0"/>
-                        <a:ea typeface="Calibri"/>
-                        <a:cs typeface="Calibri"/>
-                      </a:rPr>
-                      <m:t>=0101=5, </m:t>
-                    </m:r>
-                    <m:sSub>
-                      <m:sSubPr>
-                        <m:ctrlPr>
-                          <a:rPr lang="en-US" sz="1800" i="1">
-                            <a:effectLst/>
-                            <a:latin typeface="Cambria Math" panose="02040503050406030204" pitchFamily="18" charset="0"/>
-                            <a:ea typeface="Calibri"/>
-                            <a:cs typeface="Calibri"/>
-                          </a:rPr>
-                        </m:ctrlPr>
-                      </m:sSubPr>
-                      <m:e>
-                        <m:r>
-                          <a:rPr lang="en-US" sz="1800" i="1">
-                            <a:effectLst/>
-                            <a:latin typeface="Cambria Math" panose="02040503050406030204" pitchFamily="18" charset="0"/>
-                            <a:ea typeface="Calibri"/>
-                            <a:cs typeface="Calibri"/>
-                          </a:rPr>
-                          <m:t>𝑐</m:t>
-                        </m:r>
-                      </m:e>
-                      <m:sub>
-                        <m:r>
-                          <a:rPr lang="en-US" sz="1800">
-                            <a:effectLst/>
-                            <a:latin typeface="Cambria Math" panose="02040503050406030204" pitchFamily="18" charset="0"/>
-                            <a:ea typeface="Calibri"/>
-                            <a:cs typeface="Calibri"/>
-                          </a:rPr>
-                          <m:t>3</m:t>
-                        </m:r>
-                      </m:sub>
-                    </m:sSub>
-                    <m:r>
-                      <a:rPr lang="en-US" sz="1800">
-                        <a:effectLst/>
-                        <a:latin typeface="Cambria Math" panose="02040503050406030204" pitchFamily="18" charset="0"/>
-                        <a:ea typeface="Calibri"/>
-                        <a:cs typeface="Calibri"/>
-                      </a:rPr>
-                      <m:t>=1100=12</m:t>
-                    </m:r>
-                  </m:oMath>
+                  <m:oMathPara xmlns:m="http://schemas.openxmlformats.org/officeDocument/2006/math">
+                    <m:oMathParaPr>
+                      <m:jc m:val="centerGroup"/>
+                    </m:oMathParaPr>
+                    <m:oMath xmlns:m="http://schemas.openxmlformats.org/officeDocument/2006/math">
+                      <m:sSub>
+                        <m:sSubPr>
+                          <m:ctrlPr>
+                            <a:rPr lang="en-US" sz="1800" i="1">
+                              <a:effectLst/>
+                              <a:latin typeface="Cambria Math" panose="02040503050406030204" pitchFamily="18" charset="0"/>
+                              <a:ea typeface="Calibri"/>
+                              <a:cs typeface="Calibri"/>
+                            </a:rPr>
+                          </m:ctrlPr>
+                        </m:sSubPr>
+                        <m:e>
+                          <m:r>
+                            <a:rPr lang="en-US" sz="1800" i="1">
+                              <a:effectLst/>
+                              <a:latin typeface="Cambria Math" panose="02040503050406030204" pitchFamily="18" charset="0"/>
+                              <a:ea typeface="Calibri"/>
+                              <a:cs typeface="Calibri"/>
+                            </a:rPr>
+                            <m:t>𝑐</m:t>
+                          </m:r>
+                        </m:e>
+                        <m:sub>
+                          <m:r>
+                            <a:rPr lang="en-US" sz="1800">
+                              <a:effectLst/>
+                              <a:latin typeface="Cambria Math" panose="02040503050406030204" pitchFamily="18" charset="0"/>
+                              <a:ea typeface="Calibri"/>
+                              <a:cs typeface="Calibri"/>
+                            </a:rPr>
+                            <m:t>1</m:t>
+                          </m:r>
+                        </m:sub>
+                      </m:sSub>
+                      <m:r>
+                        <a:rPr lang="en-US" sz="1800">
+                          <a:effectLst/>
+                          <a:latin typeface="Cambria Math" panose="02040503050406030204" pitchFamily="18" charset="0"/>
+                          <a:ea typeface="Calibri"/>
+                          <a:cs typeface="Calibri"/>
+                        </a:rPr>
+                        <m:t>=1011=11, </m:t>
+                      </m:r>
+                      <m:sSub>
+                        <m:sSubPr>
+                          <m:ctrlPr>
+                            <a:rPr lang="en-US" sz="1800" i="1">
+                              <a:effectLst/>
+                              <a:latin typeface="Cambria Math" panose="02040503050406030204" pitchFamily="18" charset="0"/>
+                              <a:ea typeface="Calibri"/>
+                              <a:cs typeface="Calibri"/>
+                            </a:rPr>
+                          </m:ctrlPr>
+                        </m:sSubPr>
+                        <m:e>
+                          <m:r>
+                            <a:rPr lang="en-US" sz="1800" i="1">
+                              <a:effectLst/>
+                              <a:latin typeface="Cambria Math" panose="02040503050406030204" pitchFamily="18" charset="0"/>
+                              <a:ea typeface="Calibri"/>
+                              <a:cs typeface="Calibri"/>
+                            </a:rPr>
+                            <m:t>𝑐</m:t>
+                          </m:r>
+                        </m:e>
+                        <m:sub>
+                          <m:r>
+                            <a:rPr lang="en-US" sz="1800">
+                              <a:effectLst/>
+                              <a:latin typeface="Cambria Math" panose="02040503050406030204" pitchFamily="18" charset="0"/>
+                              <a:ea typeface="Calibri"/>
+                              <a:cs typeface="Calibri"/>
+                            </a:rPr>
+                            <m:t>2</m:t>
+                          </m:r>
+                        </m:sub>
+                      </m:sSub>
+                      <m:r>
+                        <a:rPr lang="en-US" sz="1800">
+                          <a:effectLst/>
+                          <a:latin typeface="Cambria Math" panose="02040503050406030204" pitchFamily="18" charset="0"/>
+                          <a:ea typeface="Calibri"/>
+                          <a:cs typeface="Calibri"/>
+                        </a:rPr>
+                        <m:t>=0101=5, </m:t>
+                      </m:r>
+                      <m:sSub>
+                        <m:sSubPr>
+                          <m:ctrlPr>
+                            <a:rPr lang="en-US" sz="1800" i="1">
+                              <a:effectLst/>
+                              <a:latin typeface="Cambria Math" panose="02040503050406030204" pitchFamily="18" charset="0"/>
+                              <a:ea typeface="Calibri"/>
+                              <a:cs typeface="Calibri"/>
+                            </a:rPr>
+                          </m:ctrlPr>
+                        </m:sSubPr>
+                        <m:e>
+                          <m:r>
+                            <a:rPr lang="en-US" sz="1800" i="1">
+                              <a:effectLst/>
+                              <a:latin typeface="Cambria Math" panose="02040503050406030204" pitchFamily="18" charset="0"/>
+                              <a:ea typeface="Calibri"/>
+                              <a:cs typeface="Calibri"/>
+                            </a:rPr>
+                            <m:t>𝑐</m:t>
+                          </m:r>
+                        </m:e>
+                        <m:sub>
+                          <m:r>
+                            <a:rPr lang="en-US" sz="1800">
+                              <a:effectLst/>
+                              <a:latin typeface="Cambria Math" panose="02040503050406030204" pitchFamily="18" charset="0"/>
+                              <a:ea typeface="Calibri"/>
+                              <a:cs typeface="Calibri"/>
+                            </a:rPr>
+                            <m:t>3</m:t>
+                          </m:r>
+                        </m:sub>
+                      </m:sSub>
+                      <m:r>
+                        <a:rPr lang="en-US" sz="1800">
+                          <a:effectLst/>
+                          <a:latin typeface="Cambria Math" panose="02040503050406030204" pitchFamily="18" charset="0"/>
+                          <a:ea typeface="Calibri"/>
+                          <a:cs typeface="Calibri"/>
+                        </a:rPr>
+                        <m:t>=1100=12</m:t>
+                      </m:r>
+                    </m:oMath>
+                  </m:oMathPara>
                 </a14:m>
                 <a:endParaRPr lang="en-US" sz="1800" dirty="0">
                   <a:effectLst/>
@@ -13004,113 +12079,125 @@
                     <a:ea typeface="Calibri"/>
                     <a:cs typeface="Calibri"/>
                   </a:rPr>
-                  <a:t>виберіть відповідний елемент приватного ключа: </a:t>
-                </a:r>
+                  <a:t>виберіть відповідний елемент приватного ключа:</a:t>
+                </a:r>
+              </a:p>
+              <a:p>
+                <a:pPr marL="0" marR="0">
+                  <a:spcAft>
+                    <a:spcPts val="1100"/>
+                  </a:spcAft>
+                </a:pPr>
                 <a14:m>
-                  <m:oMath xmlns:m="http://schemas.openxmlformats.org/officeDocument/2006/math">
-                    <m:sSub>
-                      <m:sSubPr>
-                        <m:ctrlPr>
-                          <a:rPr lang="en-US" sz="1800" i="1">
-                            <a:effectLst/>
-                            <a:latin typeface="Cambria Math" panose="02040503050406030204" pitchFamily="18" charset="0"/>
-                            <a:ea typeface="Calibri"/>
-                            <a:cs typeface="Calibri"/>
-                          </a:rPr>
-                        </m:ctrlPr>
-                      </m:sSubPr>
-                      <m:e>
-                        <m:r>
-                          <a:rPr lang="en-US" sz="1800" i="1">
-                            <a:effectLst/>
-                            <a:latin typeface="Cambria Math" panose="02040503050406030204" pitchFamily="18" charset="0"/>
-                            <a:ea typeface="Calibri"/>
-                            <a:cs typeface="Calibri"/>
-                          </a:rPr>
-                          <m:t>𝜎</m:t>
-                        </m:r>
-                      </m:e>
-                      <m:sub>
-                        <m:r>
-                          <a:rPr lang="en-US" sz="1800" i="1">
-                            <a:effectLst/>
-                            <a:latin typeface="Cambria Math" panose="02040503050406030204" pitchFamily="18" charset="0"/>
-                            <a:ea typeface="Calibri"/>
-                            <a:cs typeface="Calibri"/>
-                          </a:rPr>
-                          <m:t>𝑖</m:t>
-                        </m:r>
-                      </m:sub>
-                    </m:sSub>
-                    <m:r>
-                      <a:rPr lang="en-US" sz="1800">
-                        <a:effectLst/>
-                        <a:latin typeface="Cambria Math" panose="02040503050406030204" pitchFamily="18" charset="0"/>
-                        <a:ea typeface="Calibri"/>
-                        <a:cs typeface="Calibri"/>
-                      </a:rPr>
-                      <m:t>=</m:t>
-                    </m:r>
-                    <m:sSub>
-                      <m:sSubPr>
-                        <m:ctrlPr>
-                          <a:rPr lang="en-US" sz="1800" i="1">
-                            <a:effectLst/>
-                            <a:latin typeface="Cambria Math" panose="02040503050406030204" pitchFamily="18" charset="0"/>
-                            <a:ea typeface="Calibri"/>
-                            <a:cs typeface="Calibri"/>
-                          </a:rPr>
-                        </m:ctrlPr>
-                      </m:sSubPr>
-                      <m:e>
-                        <m:r>
-                          <a:rPr lang="en-US" sz="1800" i="1">
-                            <a:effectLst/>
-                            <a:latin typeface="Cambria Math" panose="02040503050406030204" pitchFamily="18" charset="0"/>
-                            <a:ea typeface="Calibri"/>
-                            <a:cs typeface="Calibri"/>
-                          </a:rPr>
-                          <m:t>𝑥</m:t>
-                        </m:r>
-                      </m:e>
-                      <m:sub>
-                        <m:sSub>
-                          <m:sSubPr>
-                            <m:ctrlPr>
-                              <a:rPr lang="en-US" sz="1800" i="1">
-                                <a:effectLst/>
-                                <a:latin typeface="Cambria Math" panose="02040503050406030204" pitchFamily="18" charset="0"/>
-                                <a:ea typeface="Calibri"/>
-                                <a:cs typeface="Calibri"/>
-                              </a:rPr>
-                            </m:ctrlPr>
-                          </m:sSubPr>
-                          <m:e>
-                            <m:r>
-                              <a:rPr lang="en-US" sz="1800" i="1">
-                                <a:effectLst/>
-                                <a:latin typeface="Cambria Math" panose="02040503050406030204" pitchFamily="18" charset="0"/>
-                                <a:ea typeface="Calibri"/>
-                                <a:cs typeface="Calibri"/>
-                              </a:rPr>
-                              <m:t>𝑐</m:t>
-                            </m:r>
-                          </m:e>
-                          <m:sub>
-                            <m:r>
-                              <a:rPr lang="en-US" sz="1800" i="1">
-                                <a:effectLst/>
-                                <a:latin typeface="Cambria Math" panose="02040503050406030204" pitchFamily="18" charset="0"/>
-                                <a:ea typeface="Calibri"/>
-                                <a:cs typeface="Calibri"/>
-                              </a:rPr>
-                              <m:t>𝑖</m:t>
-                            </m:r>
-                          </m:sub>
-                        </m:sSub>
-                      </m:sub>
-                    </m:sSub>
-                  </m:oMath>
+                  <m:oMathPara xmlns:m="http://schemas.openxmlformats.org/officeDocument/2006/math">
+                    <m:oMathParaPr>
+                      <m:jc m:val="centerGroup"/>
+                    </m:oMathParaPr>
+                    <m:oMath xmlns:m="http://schemas.openxmlformats.org/officeDocument/2006/math">
+                      <m:sSub>
+                        <m:sSubPr>
+                          <m:ctrlPr>
+                            <a:rPr lang="en-US" sz="1800" i="1">
+                              <a:effectLst/>
+                              <a:latin typeface="Cambria Math" panose="02040503050406030204" pitchFamily="18" charset="0"/>
+                              <a:ea typeface="Calibri"/>
+                              <a:cs typeface="Calibri"/>
+                            </a:rPr>
+                          </m:ctrlPr>
+                        </m:sSubPr>
+                        <m:e>
+                          <m:r>
+                            <a:rPr lang="en-US" sz="1800" i="1">
+                              <a:effectLst/>
+                              <a:latin typeface="Cambria Math" panose="02040503050406030204" pitchFamily="18" charset="0"/>
+                              <a:ea typeface="Calibri"/>
+                              <a:cs typeface="Calibri"/>
+                            </a:rPr>
+                            <m:t>𝜎</m:t>
+                          </m:r>
+                        </m:e>
+                        <m:sub>
+                          <m:r>
+                            <a:rPr lang="en-US" sz="1800" i="1">
+                              <a:effectLst/>
+                              <a:latin typeface="Cambria Math" panose="02040503050406030204" pitchFamily="18" charset="0"/>
+                              <a:ea typeface="Calibri"/>
+                              <a:cs typeface="Calibri"/>
+                            </a:rPr>
+                            <m:t>𝑖</m:t>
+                          </m:r>
+                        </m:sub>
+                      </m:sSub>
+                      <m:r>
+                        <a:rPr lang="en-US" sz="1800">
+                          <a:effectLst/>
+                          <a:latin typeface="Cambria Math" panose="02040503050406030204" pitchFamily="18" charset="0"/>
+                          <a:ea typeface="Calibri"/>
+                          <a:cs typeface="Calibri"/>
+                        </a:rPr>
+                        <m:t>=</m:t>
+                      </m:r>
+                      <m:sSub>
+                        <m:sSubPr>
+                          <m:ctrlPr>
+                            <a:rPr lang="en-US" sz="1800" i="1">
+                              <a:effectLst/>
+                              <a:latin typeface="Cambria Math" panose="02040503050406030204" pitchFamily="18" charset="0"/>
+                              <a:ea typeface="Calibri"/>
+                              <a:cs typeface="Calibri"/>
+                            </a:rPr>
+                          </m:ctrlPr>
+                        </m:sSubPr>
+                        <m:e>
+                          <m:r>
+                            <a:rPr lang="en-US" sz="1800" i="1">
+                              <a:effectLst/>
+                              <a:latin typeface="Cambria Math" panose="02040503050406030204" pitchFamily="18" charset="0"/>
+                              <a:ea typeface="Calibri"/>
+                              <a:cs typeface="Calibri"/>
+                            </a:rPr>
+                            <m:t>𝑥</m:t>
+                          </m:r>
+                        </m:e>
+                        <m:sub>
+                          <m:sSub>
+                            <m:sSubPr>
+                              <m:ctrlPr>
+                                <a:rPr lang="en-US" sz="1800" i="1">
+                                  <a:effectLst/>
+                                  <a:latin typeface="Cambria Math" panose="02040503050406030204" pitchFamily="18" charset="0"/>
+                                  <a:ea typeface="Calibri"/>
+                                  <a:cs typeface="Calibri"/>
+                                </a:rPr>
+                              </m:ctrlPr>
+                            </m:sSubPr>
+                            <m:e>
+                              <m:r>
+                                <a:rPr lang="en-US" sz="1800" i="1">
+                                  <a:effectLst/>
+                                  <a:latin typeface="Cambria Math" panose="02040503050406030204" pitchFamily="18" charset="0"/>
+                                  <a:ea typeface="Calibri"/>
+                                  <a:cs typeface="Calibri"/>
+                                </a:rPr>
+                                <m:t>𝑐</m:t>
+                              </m:r>
+                            </m:e>
+                            <m:sub>
+                              <m:r>
+                                <a:rPr lang="en-US" sz="1800" i="1">
+                                  <a:effectLst/>
+                                  <a:latin typeface="Cambria Math" panose="02040503050406030204" pitchFamily="18" charset="0"/>
+                                  <a:ea typeface="Calibri"/>
+                                  <a:cs typeface="Calibri"/>
+                                </a:rPr>
+                                <m:t>𝑖</m:t>
+                              </m:r>
+                            </m:sub>
+                          </m:sSub>
+                        </m:sub>
+                      </m:sSub>
+                    </m:oMath>
+                  </m:oMathPara>
                 </a14:m>
                 <a:endParaRPr lang="en-US" sz="1800" dirty="0">
                   <a:effectLst/>
@@ -13427,7 +12514,7 @@
             </p:txBody>
           </p:sp>
         </mc:Choice>
-        <mc:Fallback>
+        <mc:Fallback xmlns="">
           <p:sp>
             <p:nvSpPr>
               <p:cNvPr id="9" name="TextBox 8">
@@ -13453,16 +12540,18 @@
               <a:blipFill>
                 <a:blip r:embed="rId2"/>
                 <a:stretch>
-                  <a:fillRect l="-492" t="-524"/>
+                  <a:fillRect l="-473" t="-630" b="-1008"/>
                 </a:stretch>
               </a:blipFill>
             </p:spPr>
             <p:txBody>
-              <a:bodyPr/>
+              <a:bodyPr>
+                <a:normAutoFit fontScale="75000" lnSpcReduction="20000"/>
+              </a:bodyPr>
               <a:lstStyle/>
               <a:p>
                 <a:r>
-                  <a:rPr lang="en-UA">
+                  <a:rPr lang="uk-UA">
                     <a:noFill/>
                   </a:rPr>
                   <a:t> </a:t>
@@ -13485,7 +12574,7 @@
 </p:sld>
 </file>
 
-<file path=ppt/slides/slide16.xml><?xml version="1.0" encoding="utf-8"?>
+<file path=ppt/slides/slide15.xml><?xml version="1.0" encoding="utf-8"?>
 <p:sld xmlns:a="http://schemas.openxmlformats.org/drawingml/2006/main" xmlns:r="http://schemas.openxmlformats.org/officeDocument/2006/relationships" xmlns:p="http://schemas.openxmlformats.org/presentationml/2006/main">
   <p:cSld>
     <p:spTree>
@@ -13531,13 +12620,13 @@
                 </a:solidFill>
                 <a:latin typeface="Calibri"/>
               </a:rPr>
-              <a:t>СТВОРЕННЯ ТА ПЕРЕВІРКА ПІДПИСУ</a:t>
+              <a:t>MSS: створення та перевірка підпису</a:t>
             </a:r>
           </a:p>
         </p:txBody>
       </p:sp>
-      <mc:AlternateContent xmlns:mc="http://schemas.openxmlformats.org/markup-compatibility/2006">
-        <mc:Choice xmlns:a14="http://schemas.microsoft.com/office/drawing/2010/main" Requires="a14">
+      <mc:AlternateContent xmlns:mc="http://schemas.openxmlformats.org/markup-compatibility/2006" xmlns:a14="http://schemas.microsoft.com/office/drawing/2010/main">
+        <mc:Choice Requires="a14">
           <p:sp>
             <p:nvSpPr>
               <p:cNvPr id="5" name="TextBox 4">
@@ -13600,190 +12689,202 @@
                     <a:ea typeface="Calibri"/>
                     <a:cs typeface="Calibri"/>
                   </a:rPr>
-                  <a:t>Підпис — це сукупність вибраних елементів приватного ключа: </a:t>
-                </a:r>
+                  <a:t>Підпис - це сукупність вибраних елементів приватного ключа:</a:t>
+                </a:r>
+              </a:p>
+              <a:p>
+                <a:pPr marL="0" marR="0">
+                  <a:spcAft>
+                    <a:spcPts val="1100"/>
+                  </a:spcAft>
+                </a:pPr>
                 <a14:m>
-                  <m:oMath xmlns:m="http://schemas.openxmlformats.org/officeDocument/2006/math">
-                    <m:r>
-                      <m:rPr>
-                        <m:nor/>
-                      </m:rPr>
-                      <a:rPr lang="en-US" sz="1800" i="1">
-                        <a:effectLst/>
-                        <a:latin typeface="Calibri"/>
-                        <a:ea typeface="Calibri"/>
-                        <a:cs typeface="Calibri"/>
-                      </a:rPr>
-                      <m:t> </m:t>
-                    </m:r>
-                    <m:r>
-                      <m:rPr>
-                        <m:nor/>
-                      </m:rPr>
-                      <a:rPr lang="en-US" sz="1800">
-                        <a:effectLst/>
-                        <a:latin typeface="Calibri"/>
-                        <a:ea typeface="Calibri"/>
-                        <a:cs typeface="Calibri"/>
-                      </a:rPr>
-                      <m:t>Signature</m:t>
-                    </m:r>
-                    <m:r>
-                      <m:rPr>
-                        <m:nor/>
-                      </m:rPr>
-                      <a:rPr lang="en-US" sz="1800" i="1">
-                        <a:effectLst/>
-                        <a:latin typeface="Calibri"/>
-                        <a:ea typeface="Calibri"/>
-                        <a:cs typeface="Calibri"/>
-                      </a:rPr>
-                      <m:t> </m:t>
-                    </m:r>
-                    <m:r>
-                      <a:rPr lang="en-US" sz="1800">
-                        <a:effectLst/>
-                        <a:latin typeface="Cambria Math" panose="02040503050406030204" pitchFamily="18" charset="0"/>
-                        <a:ea typeface="Calibri"/>
-                        <a:cs typeface="Calibri"/>
-                      </a:rPr>
-                      <m:t>=</m:t>
-                    </m:r>
-                    <m:d>
-                      <m:dPr>
-                        <m:ctrlPr>
-                          <a:rPr lang="en-US" sz="1800" i="1">
-                            <a:effectLst/>
-                            <a:latin typeface="Cambria Math" panose="02040503050406030204" pitchFamily="18" charset="0"/>
-                            <a:ea typeface="Calibri"/>
-                            <a:cs typeface="Calibri"/>
-                          </a:rPr>
-                        </m:ctrlPr>
-                      </m:dPr>
-                      <m:e>
-                        <m:sSub>
-                          <m:sSubPr>
-                            <m:ctrlPr>
-                              <a:rPr lang="en-US" sz="1800" i="1">
-                                <a:effectLst/>
-                                <a:latin typeface="Cambria Math" panose="02040503050406030204" pitchFamily="18" charset="0"/>
-                                <a:ea typeface="Calibri"/>
-                                <a:cs typeface="Calibri"/>
-                              </a:rPr>
-                            </m:ctrlPr>
-                          </m:sSubPr>
-                          <m:e>
-                            <m:r>
-                              <a:rPr lang="en-US" sz="1800" i="1">
-                                <a:effectLst/>
-                                <a:latin typeface="Cambria Math" panose="02040503050406030204" pitchFamily="18" charset="0"/>
-                                <a:ea typeface="Calibri"/>
-                                <a:cs typeface="Calibri"/>
-                              </a:rPr>
-                              <m:t>𝜎</m:t>
-                            </m:r>
-                          </m:e>
-                          <m:sub>
-                            <m:r>
-                              <a:rPr lang="en-US" sz="1800">
-                                <a:effectLst/>
-                                <a:latin typeface="Cambria Math" panose="02040503050406030204" pitchFamily="18" charset="0"/>
-                                <a:ea typeface="Calibri"/>
-                                <a:cs typeface="Calibri"/>
-                              </a:rPr>
-                              <m:t>1</m:t>
-                            </m:r>
-                          </m:sub>
-                        </m:sSub>
-                        <m:r>
-                          <a:rPr lang="en-US" sz="1800">
-                            <a:effectLst/>
-                            <a:latin typeface="Cambria Math" panose="02040503050406030204" pitchFamily="18" charset="0"/>
-                            <a:ea typeface="Calibri"/>
-                            <a:cs typeface="Calibri"/>
-                          </a:rPr>
-                          <m:t>,</m:t>
-                        </m:r>
-                        <m:sSub>
-                          <m:sSubPr>
-                            <m:ctrlPr>
-                              <a:rPr lang="en-US" sz="1800" i="1">
-                                <a:effectLst/>
-                                <a:latin typeface="Cambria Math" panose="02040503050406030204" pitchFamily="18" charset="0"/>
-                                <a:ea typeface="Calibri"/>
-                                <a:cs typeface="Calibri"/>
-                              </a:rPr>
-                            </m:ctrlPr>
-                          </m:sSubPr>
-                          <m:e>
-                            <m:r>
-                              <a:rPr lang="en-US" sz="1800" i="1">
-                                <a:effectLst/>
-                                <a:latin typeface="Cambria Math" panose="02040503050406030204" pitchFamily="18" charset="0"/>
-                                <a:ea typeface="Calibri"/>
-                                <a:cs typeface="Calibri"/>
-                              </a:rPr>
-                              <m:t>𝜎</m:t>
-                            </m:r>
-                          </m:e>
-                          <m:sub>
-                            <m:r>
-                              <a:rPr lang="en-US" sz="1800">
-                                <a:effectLst/>
-                                <a:latin typeface="Cambria Math" panose="02040503050406030204" pitchFamily="18" charset="0"/>
-                                <a:ea typeface="Calibri"/>
-                                <a:cs typeface="Calibri"/>
-                              </a:rPr>
-                              <m:t>2</m:t>
-                            </m:r>
-                          </m:sub>
-                        </m:sSub>
-                        <m:r>
-                          <a:rPr lang="en-US" sz="1800">
-                            <a:effectLst/>
-                            <a:latin typeface="Cambria Math" panose="02040503050406030204" pitchFamily="18" charset="0"/>
-                            <a:ea typeface="Calibri"/>
-                            <a:cs typeface="Calibri"/>
-                          </a:rPr>
-                          <m:t>,…,</m:t>
-                        </m:r>
-                        <m:sSub>
-                          <m:sSubPr>
-                            <m:ctrlPr>
-                              <a:rPr lang="en-US" sz="1800" i="1">
-                                <a:effectLst/>
-                                <a:latin typeface="Cambria Math" panose="02040503050406030204" pitchFamily="18" charset="0"/>
-                                <a:ea typeface="Calibri"/>
-                                <a:cs typeface="Calibri"/>
-                              </a:rPr>
-                            </m:ctrlPr>
-                          </m:sSubPr>
-                          <m:e>
-                            <m:r>
-                              <a:rPr lang="en-US" sz="1800" i="1">
-                                <a:effectLst/>
-                                <a:latin typeface="Cambria Math" panose="02040503050406030204" pitchFamily="18" charset="0"/>
-                                <a:ea typeface="Calibri"/>
-                                <a:cs typeface="Calibri"/>
-                              </a:rPr>
-                              <m:t>𝜎</m:t>
-                            </m:r>
-                          </m:e>
-                          <m:sub>
-                            <m:r>
-                              <a:rPr lang="en-US" sz="1800" i="1">
-                                <a:effectLst/>
-                                <a:latin typeface="Cambria Math" panose="02040503050406030204" pitchFamily="18" charset="0"/>
-                                <a:ea typeface="Calibri"/>
-                                <a:cs typeface="Calibri"/>
-                              </a:rPr>
-                              <m:t>𝑘</m:t>
-                            </m:r>
-                          </m:sub>
-                        </m:sSub>
-                      </m:e>
-                    </m:d>
-                  </m:oMath>
+                  <m:oMathPara xmlns:m="http://schemas.openxmlformats.org/officeDocument/2006/math">
+                    <m:oMathParaPr>
+                      <m:jc m:val="centerGroup"/>
+                    </m:oMathParaPr>
+                    <m:oMath xmlns:m="http://schemas.openxmlformats.org/officeDocument/2006/math">
+                      <m:r>
+                        <m:rPr>
+                          <m:nor/>
+                        </m:rPr>
+                        <a:rPr lang="en-US" sz="1800" i="1">
+                          <a:effectLst/>
+                          <a:latin typeface="Calibri"/>
+                          <a:ea typeface="Calibri"/>
+                          <a:cs typeface="Calibri"/>
+                        </a:rPr>
+                        <m:t> </m:t>
+                      </m:r>
+                      <m:r>
+                        <m:rPr>
+                          <m:nor/>
+                        </m:rPr>
+                        <a:rPr lang="en-US" sz="1800">
+                          <a:effectLst/>
+                          <a:latin typeface="Calibri"/>
+                          <a:ea typeface="Calibri"/>
+                          <a:cs typeface="Calibri"/>
+                        </a:rPr>
+                        <m:t>Signature</m:t>
+                      </m:r>
+                      <m:r>
+                        <m:rPr>
+                          <m:nor/>
+                        </m:rPr>
+                        <a:rPr lang="en-US" sz="1800" i="1">
+                          <a:effectLst/>
+                          <a:latin typeface="Calibri"/>
+                          <a:ea typeface="Calibri"/>
+                          <a:cs typeface="Calibri"/>
+                        </a:rPr>
+                        <m:t> </m:t>
+                      </m:r>
+                      <m:r>
+                        <a:rPr lang="en-US" sz="1800">
+                          <a:effectLst/>
+                          <a:latin typeface="Cambria Math" panose="02040503050406030204" pitchFamily="18" charset="0"/>
+                          <a:ea typeface="Calibri"/>
+                          <a:cs typeface="Calibri"/>
+                        </a:rPr>
+                        <m:t>=</m:t>
+                      </m:r>
+                      <m:d>
+                        <m:dPr>
+                          <m:ctrlPr>
+                            <a:rPr lang="en-US" sz="1800" i="1">
+                              <a:effectLst/>
+                              <a:latin typeface="Cambria Math" panose="02040503050406030204" pitchFamily="18" charset="0"/>
+                              <a:ea typeface="Calibri"/>
+                              <a:cs typeface="Calibri"/>
+                            </a:rPr>
+                          </m:ctrlPr>
+                        </m:dPr>
+                        <m:e>
+                          <m:sSub>
+                            <m:sSubPr>
+                              <m:ctrlPr>
+                                <a:rPr lang="en-US" sz="1800" i="1">
+                                  <a:effectLst/>
+                                  <a:latin typeface="Cambria Math" panose="02040503050406030204" pitchFamily="18" charset="0"/>
+                                  <a:ea typeface="Calibri"/>
+                                  <a:cs typeface="Calibri"/>
+                                </a:rPr>
+                              </m:ctrlPr>
+                            </m:sSubPr>
+                            <m:e>
+                              <m:r>
+                                <a:rPr lang="en-US" sz="1800" i="1">
+                                  <a:effectLst/>
+                                  <a:latin typeface="Cambria Math" panose="02040503050406030204" pitchFamily="18" charset="0"/>
+                                  <a:ea typeface="Calibri"/>
+                                  <a:cs typeface="Calibri"/>
+                                </a:rPr>
+                                <m:t>𝜎</m:t>
+                              </m:r>
+                            </m:e>
+                            <m:sub>
+                              <m:r>
+                                <a:rPr lang="en-US" sz="1800">
+                                  <a:effectLst/>
+                                  <a:latin typeface="Cambria Math" panose="02040503050406030204" pitchFamily="18" charset="0"/>
+                                  <a:ea typeface="Calibri"/>
+                                  <a:cs typeface="Calibri"/>
+                                </a:rPr>
+                                <m:t>1</m:t>
+                              </m:r>
+                            </m:sub>
+                          </m:sSub>
+                          <m:r>
+                            <a:rPr lang="en-US" sz="1800">
+                              <a:effectLst/>
+                              <a:latin typeface="Cambria Math" panose="02040503050406030204" pitchFamily="18" charset="0"/>
+                              <a:ea typeface="Calibri"/>
+                              <a:cs typeface="Calibri"/>
+                            </a:rPr>
+                            <m:t>,</m:t>
+                          </m:r>
+                          <m:sSub>
+                            <m:sSubPr>
+                              <m:ctrlPr>
+                                <a:rPr lang="en-US" sz="1800" i="1">
+                                  <a:effectLst/>
+                                  <a:latin typeface="Cambria Math" panose="02040503050406030204" pitchFamily="18" charset="0"/>
+                                  <a:ea typeface="Calibri"/>
+                                  <a:cs typeface="Calibri"/>
+                                </a:rPr>
+                              </m:ctrlPr>
+                            </m:sSubPr>
+                            <m:e>
+                              <m:r>
+                                <a:rPr lang="en-US" sz="1800" i="1">
+                                  <a:effectLst/>
+                                  <a:latin typeface="Cambria Math" panose="02040503050406030204" pitchFamily="18" charset="0"/>
+                                  <a:ea typeface="Calibri"/>
+                                  <a:cs typeface="Calibri"/>
+                                </a:rPr>
+                                <m:t>𝜎</m:t>
+                              </m:r>
+                            </m:e>
+                            <m:sub>
+                              <m:r>
+                                <a:rPr lang="en-US" sz="1800">
+                                  <a:effectLst/>
+                                  <a:latin typeface="Cambria Math" panose="02040503050406030204" pitchFamily="18" charset="0"/>
+                                  <a:ea typeface="Calibri"/>
+                                  <a:cs typeface="Calibri"/>
+                                </a:rPr>
+                                <m:t>2</m:t>
+                              </m:r>
+                            </m:sub>
+                          </m:sSub>
+                          <m:r>
+                            <a:rPr lang="en-US" sz="1800">
+                              <a:effectLst/>
+                              <a:latin typeface="Cambria Math" panose="02040503050406030204" pitchFamily="18" charset="0"/>
+                              <a:ea typeface="Calibri"/>
+                              <a:cs typeface="Calibri"/>
+                            </a:rPr>
+                            <m:t>,…,</m:t>
+                          </m:r>
+                          <m:sSub>
+                            <m:sSubPr>
+                              <m:ctrlPr>
+                                <a:rPr lang="en-US" sz="1800" i="1">
+                                  <a:effectLst/>
+                                  <a:latin typeface="Cambria Math" panose="02040503050406030204" pitchFamily="18" charset="0"/>
+                                  <a:ea typeface="Calibri"/>
+                                  <a:cs typeface="Calibri"/>
+                                </a:rPr>
+                              </m:ctrlPr>
+                            </m:sSubPr>
+                            <m:e>
+                              <m:r>
+                                <a:rPr lang="en-US" sz="1800" i="1">
+                                  <a:effectLst/>
+                                  <a:latin typeface="Cambria Math" panose="02040503050406030204" pitchFamily="18" charset="0"/>
+                                  <a:ea typeface="Calibri"/>
+                                  <a:cs typeface="Calibri"/>
+                                </a:rPr>
+                                <m:t>𝜎</m:t>
+                              </m:r>
+                            </m:e>
+                            <m:sub>
+                              <m:r>
+                                <a:rPr lang="en-US" sz="1800" i="1">
+                                  <a:effectLst/>
+                                  <a:latin typeface="Cambria Math" panose="02040503050406030204" pitchFamily="18" charset="0"/>
+                                  <a:ea typeface="Calibri"/>
+                                  <a:cs typeface="Calibri"/>
+                                </a:rPr>
+                                <m:t>𝑘</m:t>
+                              </m:r>
+                            </m:sub>
+                          </m:sSub>
+                        </m:e>
+                      </m:d>
+                    </m:oMath>
+                  </m:oMathPara>
                 </a14:m>
                 <a:endParaRPr lang="en-US" sz="1800" dirty="0">
                   <a:effectLst/>
@@ -13798,28 +12899,6 @@
                     <a:spcPts val="1100"/>
                   </a:spcAft>
                 </a:pPr>
-                <a:endParaRPr lang="en-US" sz="1800" dirty="0">
-                  <a:effectLst/>
-                  <a:latin typeface="Calibri"/>
-                  <a:ea typeface="Calibri"/>
-                  <a:cs typeface="Calibri"/>
-                </a:endParaRPr>
-              </a:p>
-              <a:p>
-                <a:pPr marL="0" marR="0">
-                  <a:spcAft>
-                    <a:spcPts val="1100"/>
-                  </a:spcAft>
-                </a:pPr>
-                <a:r>
-                  <a:rPr lang="en-US" sz="1800" dirty="0" err="1">
-                    <a:effectLst/>
-                    <a:latin typeface="Calibri"/>
-                    <a:ea typeface="Calibri"/>
-                    <a:cs typeface="Calibri"/>
-                  </a:rPr>
-                  <a:t>Перевірка</a:t>
-                </a:r>
                 <a:r>
                   <a:rPr lang="en-US" sz="1800" dirty="0">
                     <a:effectLst/>
@@ -13827,23 +12906,8 @@
                     <a:ea typeface="Calibri"/>
                     <a:cs typeface="Calibri"/>
                   </a:rPr>
-                  <a:t> </a:t>
-                </a:r>
-                <a:r>
-                  <a:rPr lang="en-US" sz="1800" dirty="0" err="1">
-                    <a:effectLst/>
-                    <a:latin typeface="Calibri"/>
-                    <a:ea typeface="Calibri"/>
-                    <a:cs typeface="Calibri"/>
-                  </a:rPr>
-                  <a:t>підпису</a:t>
-                </a:r>
-                <a:endParaRPr lang="en-US" sz="1800" dirty="0">
-                  <a:effectLst/>
-                  <a:latin typeface="Calibri"/>
-                  <a:ea typeface="Calibri"/>
-                  <a:cs typeface="Calibri"/>
-                </a:endParaRPr>
+                  <a:t>Перевірка підпису</a:t>
+                </a:r>
               </a:p>
               <a:p>
                 <a:pPr marL="342900" marR="0" lvl="0" indent="-342900">
@@ -13884,122 +12948,134 @@
                     <a:ea typeface="Calibri"/>
                     <a:cs typeface="Calibri"/>
                   </a:rPr>
-                  <a:t>Виконайте хешування кожного елемента підпису: </a:t>
-                </a:r>
+                  <a:t>Виконайте хешування кожного елемента підпису:</a:t>
+                </a:r>
+              </a:p>
+              <a:p>
+                <a:pPr marL="0" marR="0">
+                  <a:spcAft>
+                    <a:spcPts val="1100"/>
+                  </a:spcAft>
+                </a:pPr>
                 <a14:m>
-                  <m:oMath xmlns:m="http://schemas.openxmlformats.org/officeDocument/2006/math">
-                    <m:sSubSup>
-                      <m:sSubSupPr>
-                        <m:ctrlPr>
-                          <a:rPr lang="en-US" sz="1800" i="1">
-                            <a:effectLst/>
-                            <a:latin typeface="Cambria Math" panose="02040503050406030204" pitchFamily="18" charset="0"/>
-                            <a:ea typeface="Calibri"/>
-                            <a:cs typeface="Calibri"/>
-                          </a:rPr>
-                        </m:ctrlPr>
-                      </m:sSubSupPr>
-                      <m:e>
-                        <m:r>
-                          <a:rPr lang="en-US" sz="1800" i="1">
-                            <a:effectLst/>
-                            <a:latin typeface="Cambria Math" panose="02040503050406030204" pitchFamily="18" charset="0"/>
-                            <a:ea typeface="Calibri"/>
-                            <a:cs typeface="Calibri"/>
-                          </a:rPr>
-                          <m:t>𝑦</m:t>
-                        </m:r>
-                      </m:e>
-                      <m:sub>
-                        <m:r>
-                          <a:rPr lang="en-US" sz="1800" i="1">
-                            <a:effectLst/>
-                            <a:latin typeface="Cambria Math" panose="02040503050406030204" pitchFamily="18" charset="0"/>
-                            <a:ea typeface="Calibri"/>
-                            <a:cs typeface="Calibri"/>
-                          </a:rPr>
-                          <m:t>𝑖</m:t>
-                        </m:r>
-                      </m:sub>
-                      <m:sup>
-                        <m:r>
-                          <a:rPr lang="en-US" sz="1800" i="1">
-                            <a:effectLst/>
-                            <a:latin typeface="Cambria Math" panose="02040503050406030204" pitchFamily="18" charset="0"/>
-                            <a:ea typeface="Calibri"/>
-                            <a:cs typeface="Calibri"/>
-                          </a:rPr>
-                          <m:t>′</m:t>
-                        </m:r>
-                      </m:sup>
-                    </m:sSubSup>
-                    <m:r>
-                      <a:rPr lang="en-US" sz="1800">
-                        <a:effectLst/>
-                        <a:latin typeface="Cambria Math" panose="02040503050406030204" pitchFamily="18" charset="0"/>
-                        <a:ea typeface="Calibri"/>
-                        <a:cs typeface="Calibri"/>
-                      </a:rPr>
-                      <m:t>=</m:t>
-                    </m:r>
-                    <m:r>
-                      <a:rPr lang="en-US" sz="1800" i="1">
-                        <a:effectLst/>
-                        <a:latin typeface="Cambria Math" panose="02040503050406030204" pitchFamily="18" charset="0"/>
-                        <a:ea typeface="Calibri"/>
-                        <a:cs typeface="Calibri"/>
-                      </a:rPr>
-                      <m:t>𝐻</m:t>
-                    </m:r>
-                    <m:d>
-                      <m:dPr>
-                        <m:ctrlPr>
-                          <a:rPr lang="en-US" sz="1800" i="1">
-                            <a:effectLst/>
-                            <a:latin typeface="Cambria Math" panose="02040503050406030204" pitchFamily="18" charset="0"/>
-                            <a:ea typeface="Calibri"/>
-                            <a:cs typeface="Calibri"/>
-                          </a:rPr>
-                        </m:ctrlPr>
-                      </m:dPr>
-                      <m:e>
-                        <m:sSub>
-                          <m:sSubPr>
-                            <m:ctrlPr>
-                              <a:rPr lang="en-US" sz="1800" i="1">
-                                <a:effectLst/>
-                                <a:latin typeface="Cambria Math" panose="02040503050406030204" pitchFamily="18" charset="0"/>
-                                <a:ea typeface="Calibri"/>
-                                <a:cs typeface="Calibri"/>
-                              </a:rPr>
-                            </m:ctrlPr>
-                          </m:sSubPr>
-                          <m:e>
-                            <m:r>
-                              <a:rPr lang="en-US" sz="1800" i="1">
-                                <a:effectLst/>
-                                <a:latin typeface="Cambria Math" panose="02040503050406030204" pitchFamily="18" charset="0"/>
-                                <a:ea typeface="Calibri"/>
-                                <a:cs typeface="Calibri"/>
-                              </a:rPr>
-                              <m:t>𝜎</m:t>
-                            </m:r>
-                          </m:e>
-                          <m:sub>
-                            <m:r>
-                              <a:rPr lang="en-US" sz="1800" i="1">
-                                <a:effectLst/>
-                                <a:latin typeface="Cambria Math" panose="02040503050406030204" pitchFamily="18" charset="0"/>
-                                <a:ea typeface="Calibri"/>
-                                <a:cs typeface="Calibri"/>
-                              </a:rPr>
-                              <m:t>𝑖</m:t>
-                            </m:r>
-                          </m:sub>
-                        </m:sSub>
-                      </m:e>
-                    </m:d>
-                  </m:oMath>
+                  <m:oMathPara xmlns:m="http://schemas.openxmlformats.org/officeDocument/2006/math">
+                    <m:oMathParaPr>
+                      <m:jc m:val="centerGroup"/>
+                    </m:oMathParaPr>
+                    <m:oMath xmlns:m="http://schemas.openxmlformats.org/officeDocument/2006/math">
+                      <m:sSubSup>
+                        <m:sSubSupPr>
+                          <m:ctrlPr>
+                            <a:rPr lang="en-US" sz="1800" i="1">
+                              <a:effectLst/>
+                              <a:latin typeface="Cambria Math" panose="02040503050406030204" pitchFamily="18" charset="0"/>
+                              <a:ea typeface="Calibri"/>
+                              <a:cs typeface="Calibri"/>
+                            </a:rPr>
+                          </m:ctrlPr>
+                        </m:sSubSupPr>
+                        <m:e>
+                          <m:r>
+                            <a:rPr lang="en-US" sz="1800" i="1">
+                              <a:effectLst/>
+                              <a:latin typeface="Cambria Math" panose="02040503050406030204" pitchFamily="18" charset="0"/>
+                              <a:ea typeface="Calibri"/>
+                              <a:cs typeface="Calibri"/>
+                            </a:rPr>
+                            <m:t>𝑦</m:t>
+                          </m:r>
+                        </m:e>
+                        <m:sub>
+                          <m:r>
+                            <a:rPr lang="en-US" sz="1800" i="1">
+                              <a:effectLst/>
+                              <a:latin typeface="Cambria Math" panose="02040503050406030204" pitchFamily="18" charset="0"/>
+                              <a:ea typeface="Calibri"/>
+                              <a:cs typeface="Calibri"/>
+                            </a:rPr>
+                            <m:t>𝑖</m:t>
+                          </m:r>
+                        </m:sub>
+                        <m:sup>
+                          <m:r>
+                            <a:rPr lang="en-US" sz="1800" i="1">
+                              <a:effectLst/>
+                              <a:latin typeface="Cambria Math" panose="02040503050406030204" pitchFamily="18" charset="0"/>
+                              <a:ea typeface="Calibri"/>
+                              <a:cs typeface="Calibri"/>
+                            </a:rPr>
+                            <m:t>′</m:t>
+                          </m:r>
+                        </m:sup>
+                      </m:sSubSup>
+                      <m:r>
+                        <a:rPr lang="en-US" sz="1800">
+                          <a:effectLst/>
+                          <a:latin typeface="Cambria Math" panose="02040503050406030204" pitchFamily="18" charset="0"/>
+                          <a:ea typeface="Calibri"/>
+                          <a:cs typeface="Calibri"/>
+                        </a:rPr>
+                        <m:t>=</m:t>
+                      </m:r>
+                      <m:r>
+                        <a:rPr lang="en-US" sz="1800" i="1">
+                          <a:effectLst/>
+                          <a:latin typeface="Cambria Math" panose="02040503050406030204" pitchFamily="18" charset="0"/>
+                          <a:ea typeface="Calibri"/>
+                          <a:cs typeface="Calibri"/>
+                        </a:rPr>
+                        <m:t>𝐻</m:t>
+                      </m:r>
+                      <m:d>
+                        <m:dPr>
+                          <m:ctrlPr>
+                            <a:rPr lang="en-US" sz="1800" i="1">
+                              <a:effectLst/>
+                              <a:latin typeface="Cambria Math" panose="02040503050406030204" pitchFamily="18" charset="0"/>
+                              <a:ea typeface="Calibri"/>
+                              <a:cs typeface="Calibri"/>
+                            </a:rPr>
+                          </m:ctrlPr>
+                        </m:dPr>
+                        <m:e>
+                          <m:sSub>
+                            <m:sSubPr>
+                              <m:ctrlPr>
+                                <a:rPr lang="en-US" sz="1800" i="1">
+                                  <a:effectLst/>
+                                  <a:latin typeface="Cambria Math" panose="02040503050406030204" pitchFamily="18" charset="0"/>
+                                  <a:ea typeface="Calibri"/>
+                                  <a:cs typeface="Calibri"/>
+                                </a:rPr>
+                              </m:ctrlPr>
+                            </m:sSubPr>
+                            <m:e>
+                              <m:r>
+                                <a:rPr lang="en-US" sz="1800" i="1">
+                                  <a:effectLst/>
+                                  <a:latin typeface="Cambria Math" panose="02040503050406030204" pitchFamily="18" charset="0"/>
+                                  <a:ea typeface="Calibri"/>
+                                  <a:cs typeface="Calibri"/>
+                                </a:rPr>
+                                <m:t>𝜎</m:t>
+                              </m:r>
+                            </m:e>
+                            <m:sub>
+                              <m:r>
+                                <a:rPr lang="en-US" sz="1800" i="1">
+                                  <a:effectLst/>
+                                  <a:latin typeface="Cambria Math" panose="02040503050406030204" pitchFamily="18" charset="0"/>
+                                  <a:ea typeface="Calibri"/>
+                                  <a:cs typeface="Calibri"/>
+                                </a:rPr>
+                                <m:t>𝑖</m:t>
+                              </m:r>
+                            </m:sub>
+                          </m:sSub>
+                        </m:e>
+                      </m:d>
+                    </m:oMath>
+                  </m:oMathPara>
                 </a14:m>
                 <a:endParaRPr lang="en-US" sz="1800" dirty="0">
                   <a:effectLst/>
@@ -14482,7 +13558,7 @@
             </p:txBody>
           </p:sp>
         </mc:Choice>
-        <mc:Fallback>
+        <mc:Fallback xmlns="">
           <p:sp>
             <p:nvSpPr>
               <p:cNvPr id="5" name="TextBox 4">
@@ -14508,16 +13584,18 @@
               <a:blipFill>
                 <a:blip r:embed="rId2"/>
                 <a:stretch>
-                  <a:fillRect l="-493" t="-306"/>
+                  <a:fillRect l="-473" t="-737" b="-1327"/>
                 </a:stretch>
               </a:blipFill>
             </p:spPr>
             <p:txBody>
-              <a:bodyPr/>
+              <a:bodyPr>
+                <a:normAutoFit fontScale="75000" lnSpcReduction="20000"/>
+              </a:bodyPr>
               <a:lstStyle/>
               <a:p>
                 <a:r>
-                  <a:rPr lang="en-UA">
+                  <a:rPr lang="uk-UA">
                     <a:noFill/>
                   </a:rPr>
                   <a:t> </a:t>
@@ -14540,7 +13618,7 @@
 </p:sld>
 </file>
 
-<file path=ppt/slides/slide17.xml><?xml version="1.0" encoding="utf-8"?>
+<file path=ppt/slides/slide16.xml><?xml version="1.0" encoding="utf-8"?>
 <p:sld xmlns:a="http://schemas.openxmlformats.org/drawingml/2006/main" xmlns:r="http://schemas.openxmlformats.org/officeDocument/2006/relationships" xmlns:p="http://schemas.openxmlformats.org/presentationml/2006/main">
   <p:cSld>
     <p:spTree>
@@ -14713,29 +13791,7 @@
             </a:r>
             <a:r>
               <a:rPr lang="en-US" sz="1800" dirty="0" err="1"/>
-              <a:t>багаторазових</a:t>
-            </a:r>
-            <a:endParaRPr lang="uk-UA" sz="1800" dirty="0"/>
-          </a:p>
-          <a:p>
-            <a:pPr lvl="0" eaLnBrk="0" fontAlgn="base" hangingPunct="0">
-              <a:lnSpc>
-                <a:spcPct val="100000"/>
-              </a:lnSpc>
-              <a:spcBef>
-                <a:spcPct val="0"/>
-              </a:spcBef>
-              <a:spcAft>
-                <a:spcPct val="0"/>
-              </a:spcAft>
-            </a:pPr>
-            <a:r>
-              <a:rPr lang="uk-UA" sz="1800" dirty="0"/>
-              <a:t>                                                                                                   </a:t>
-            </a:r>
-            <a:r>
-              <a:rPr lang="en-US" sz="1800" dirty="0" err="1"/>
-              <a:t>підписів</a:t>
+              <a:t>багаторазовихпідписів</a:t>
             </a:r>
             <a:r>
               <a:rPr lang="en-US" sz="1800" dirty="0"/>
@@ -14903,10 +13959,10 @@
                 <a:effectLst/>
                 <a:latin typeface="Calibri"/>
               </a:rPr>
-              <a:t>Підпис включає шлях автентифікації.</a:t>
-            </a:r>
-            <a:br>
-              <a:rPr kumimoji="0" lang="en-US" altLang="en-US" sz="1800" b="0" i="0" u="none" strike="noStrike" cap="none" normalizeH="0" baseline="0" dirty="0">
+              <a:t>Підпис включає шлях </a:t>
+            </a:r>
+            <a:r>
+              <a:rPr kumimoji="0" lang="en-US" altLang="en-US" sz="1800" b="0" i="0" u="none" strike="noStrike" cap="none" normalizeH="0" baseline="0" dirty="0" err="1">
                 <a:ln>
                   <a:noFill/>
                 </a:ln>
@@ -14916,7 +13972,8 @@
                 <a:effectLst/>
                 <a:latin typeface="Calibri"/>
               </a:rPr>
-            </a:br>
+              <a:t>автентифікації</a:t>
+            </a:r>
             <a:r>
               <a:rPr kumimoji="0" lang="en-US" altLang="en-US" sz="1800" b="0" i="0" u="none" strike="noStrike" cap="none" normalizeH="0" baseline="0" dirty="0">
                 <a:ln>
@@ -14992,7 +14049,7 @@
 </p:sld>
 </file>
 
-<file path=ppt/slides/slide18.xml><?xml version="1.0" encoding="utf-8"?>
+<file path=ppt/slides/slide17.xml><?xml version="1.0" encoding="utf-8"?>
 <p:sld xmlns:a="http://schemas.openxmlformats.org/drawingml/2006/main" xmlns:r="http://schemas.openxmlformats.org/officeDocument/2006/relationships" xmlns:p="http://schemas.openxmlformats.org/presentationml/2006/main">
   <p:cSld>
     <p:spTree>
@@ -15181,8 +14238,8 @@
         </p:nvSpPr>
         <p:spPr bwMode="auto">
           <a:xfrm>
-            <a:off x="606425" y="3876482"/>
-            <a:ext cx="5365571" cy="1287532"/>
+            <a:off x="606425" y="3429000"/>
+            <a:ext cx="5365571" cy="1735014"/>
           </a:xfrm>
           <a:prstGeom prst="rect">
             <a:avLst/>
@@ -15377,7 +14434,7 @@
 </p:sld>
 </file>
 
-<file path=ppt/slides/slide19.xml><?xml version="1.0" encoding="utf-8"?>
+<file path=ppt/slides/slide18.xml><?xml version="1.0" encoding="utf-8"?>
 <p:sld xmlns:a="http://schemas.openxmlformats.org/drawingml/2006/main" xmlns:r="http://schemas.openxmlformats.org/officeDocument/2006/relationships" xmlns:p="http://schemas.openxmlformats.org/presentationml/2006/main">
   <p:cSld>
     <p:spTree>
@@ -15558,8 +14615,8 @@
         </p:nvSpPr>
         <p:spPr bwMode="auto">
           <a:xfrm>
-            <a:off x="180753" y="3178248"/>
-            <a:ext cx="6700003" cy="2488905"/>
+            <a:off x="274955" y="3976577"/>
+            <a:ext cx="7590155" cy="2204136"/>
           </a:xfrm>
           <a:prstGeom prst="rect">
             <a:avLst/>
@@ -15603,11 +14660,11 @@
             <a:prstTxWarp prst="textNoShape">
               <a:avLst/>
             </a:prstTxWarp>
-            <a:noAutofit/>
+            <a:normAutofit/>
           </a:bodyPr>
           <a:lstStyle/>
           <a:p>
-            <a:pPr marL="0" marR="0" lvl="0" indent="457200" algn="l" defTabSz="914400" rtl="0" eaLnBrk="0" fontAlgn="base" latinLnBrk="0" hangingPunct="0">
+            <a:pPr marL="0" marR="0" lvl="0" indent="457200" defTabSz="914400" rtl="0" eaLnBrk="0" fontAlgn="base" latinLnBrk="0" hangingPunct="0">
               <a:lnSpc>
                 <a:spcPct val="150000"/>
               </a:lnSpc>
@@ -15763,7 +14820,7 @@
             </a:endParaRPr>
           </a:p>
           <a:p>
-            <a:pPr marL="0" marR="0" lvl="0" indent="457200" algn="l" defTabSz="914400" rtl="0" eaLnBrk="0" fontAlgn="base" latinLnBrk="0" hangingPunct="0">
+            <a:pPr marL="0" marR="0" lvl="0" indent="457200" defTabSz="914400" rtl="0" eaLnBrk="0" fontAlgn="base" latinLnBrk="0" hangingPunct="0">
               <a:lnSpc>
                 <a:spcPct val="150000"/>
               </a:lnSpc>
@@ -15844,7 +14901,7 @@
             </a:r>
           </a:p>
           <a:p>
-            <a:pPr marL="0" marR="0" lvl="0" indent="457200" algn="l" defTabSz="914400" rtl="0" eaLnBrk="0" fontAlgn="base" latinLnBrk="0" hangingPunct="0">
+            <a:pPr marL="0" marR="0" lvl="0" indent="457200" defTabSz="914400" rtl="0" eaLnBrk="0" fontAlgn="base" latinLnBrk="0" hangingPunct="0">
               <a:lnSpc>
                 <a:spcPct val="150000"/>
               </a:lnSpc>
@@ -15873,7 +14930,7 @@
             </a:r>
           </a:p>
           <a:p>
-            <a:pPr marL="0" marR="0" lvl="0" indent="457200" algn="l" defTabSz="914400" rtl="0" eaLnBrk="0" fontAlgn="base" latinLnBrk="0" hangingPunct="0">
+            <a:pPr marL="0" marR="0" lvl="0" indent="457200" defTabSz="914400" rtl="0" eaLnBrk="0" fontAlgn="base" latinLnBrk="0" hangingPunct="0">
               <a:lnSpc>
                 <a:spcPct val="150000"/>
               </a:lnSpc>
@@ -15902,7 +14959,7 @@
             </a:r>
           </a:p>
           <a:p>
-            <a:pPr marL="0" marR="0" lvl="0" indent="457200" algn="l" defTabSz="914400" rtl="0" eaLnBrk="0" fontAlgn="base" latinLnBrk="0" hangingPunct="0">
+            <a:pPr marL="0" marR="0" lvl="0" indent="457200" defTabSz="914400" rtl="0" eaLnBrk="0" fontAlgn="base" latinLnBrk="0" hangingPunct="0">
               <a:lnSpc>
                 <a:spcPct val="150000"/>
               </a:lnSpc>
@@ -16005,393 +15062,7 @@
 </p:sld>
 </file>
 
-<file path=ppt/slides/slide2.xml><?xml version="1.0" encoding="utf-8"?>
-<p:sld xmlns:a="http://schemas.openxmlformats.org/drawingml/2006/main" xmlns:r="http://schemas.openxmlformats.org/officeDocument/2006/relationships" xmlns:p="http://schemas.openxmlformats.org/presentationml/2006/main">
-  <p:cSld>
-    <p:spTree>
-      <p:nvGrpSpPr>
-        <p:cNvPr id="1" name=""/>
-        <p:cNvGrpSpPr/>
-        <p:nvPr/>
-      </p:nvGrpSpPr>
-      <p:grpSpPr>
-        <a:xfrm>
-          <a:off x="0" y="0"/>
-          <a:ext cx="0" cy="0"/>
-          <a:chOff x="0" y="0"/>
-          <a:chExt cx="0" cy="0"/>
-        </a:xfrm>
-      </p:grpSpPr>
-      <p:sp>
-        <p:nvSpPr>
-          <p:cNvPr id="2" name="Заголовок 1">
-            <a:extLst>
-              <a:ext uri="{FF2B5EF4-FFF2-40B4-BE49-F238E27FC236}">
-                <a16:creationId xmlns:a16="http://schemas.microsoft.com/office/drawing/2014/main" id="{1B6E16CF-568A-DB52-A3EB-6D4FADCDD95D}"/>
-              </a:ext>
-            </a:extLst>
-          </p:cNvPr>
-          <p:cNvSpPr>
-            <a:spLocks noGrp="1"/>
-          </p:cNvSpPr>
-          <p:nvPr>
-            <p:ph type="title"/>
-          </p:nvPr>
-        </p:nvSpPr>
-        <p:spPr/>
-        <p:txBody>
-          <a:bodyPr/>
-          <a:lstStyle/>
-          <a:p>
-            <a:r>
-              <a:rPr lang="en-US" dirty="0"/>
-              <a:t>Мотивація</a:t>
-            </a:r>
-          </a:p>
-        </p:txBody>
-      </p:sp>
-      <p:sp>
-        <p:nvSpPr>
-          <p:cNvPr id="4" name="Rectangle 4">
-            <a:extLst>
-              <a:ext uri="{FF2B5EF4-FFF2-40B4-BE49-F238E27FC236}">
-                <a16:creationId xmlns:a16="http://schemas.microsoft.com/office/drawing/2014/main" id="{DB86B2E6-EF52-BEFC-2919-DA04E2C4AD6E}"/>
-              </a:ext>
-            </a:extLst>
-          </p:cNvPr>
-          <p:cNvSpPr>
-            <a:spLocks noGrp="1" noChangeArrowheads="1"/>
-          </p:cNvSpPr>
-          <p:nvPr>
-            <p:ph type="body" sz="quarter" idx="10"/>
-          </p:nvPr>
-        </p:nvSpPr>
-        <p:spPr bwMode="auto">
-          <a:xfrm>
-            <a:off x="606425" y="2100353"/>
-            <a:ext cx="4533357" cy="880882"/>
-          </a:xfrm>
-          <a:prstGeom prst="rect">
-            <a:avLst/>
-          </a:prstGeom>
-          <a:noFill/>
-          <a:ln>
-            <a:noFill/>
-          </a:ln>
-          <a:effectLst/>
-          <a:extLst>
-            <a:ext uri="{909E8E84-426E-40DD-AFC4-6F175D3DCCD1}">
-              <a14:hiddenFill xmlns:a14="http://schemas.microsoft.com/office/drawing/2010/main">
-                <a:solidFill>
-                  <a:schemeClr val="accent1"/>
-                </a:solidFill>
-              </a14:hiddenFill>
-            </a:ext>
-            <a:ext uri="{91240B29-F687-4F45-9708-019B960494DF}">
-              <a14:hiddenLine xmlns:a14="http://schemas.microsoft.com/office/drawing/2010/main" w="9525">
-                <a:solidFill>
-                  <a:schemeClr val="tx1"/>
-                </a:solidFill>
-                <a:miter lim="800000"/>
-                <a:headEnd/>
-                <a:tailEnd/>
-              </a14:hiddenLine>
-            </a:ext>
-            <a:ext uri="{AF507438-7753-43E0-B8FC-AC1667EBCBE1}">
-              <a14:hiddenEffects xmlns:a14="http://schemas.microsoft.com/office/drawing/2010/main">
-                <a:effectLst>
-                  <a:outerShdw dist="35921" dir="2700000" algn="ctr" rotWithShape="0">
-                    <a:schemeClr val="bg2"/>
-                  </a:outerShdw>
-                </a:effectLst>
-              </a14:hiddenEffects>
-            </a:ext>
-          </a:extLst>
-        </p:spPr>
-        <p:txBody>
-          <a:bodyPr vert="horz" wrap="none" lIns="91440" tIns="45720" rIns="91440" bIns="45720" numCol="1" anchor="ctr" anchorCtr="0" compatLnSpc="1">
-            <a:prstTxWarp prst="textNoShape">
-              <a:avLst/>
-            </a:prstTxWarp>
-          </a:bodyPr>
-          <a:lstStyle/>
-          <a:p>
-            <a:pPr lvl="0" eaLnBrk="0" fontAlgn="base" hangingPunct="0">
-              <a:lnSpc>
-                <a:spcPct val="150000"/>
-              </a:lnSpc>
-              <a:spcBef>
-                <a:spcPct val="0"/>
-              </a:spcBef>
-              <a:spcAft>
-                <a:spcPct val="0"/>
-              </a:spcAft>
-            </a:pPr>
-            <a:r>
-              <a:rPr lang="en-US" sz="1800" i="1" dirty="0"/>
-              <a:t>Чому саме хеш-підписи?</a:t>
-            </a:r>
-            <a:br>
-              <a:rPr lang="en-US" sz="1800" dirty="0"/>
-            </a:br>
-            <a:r>
-              <a:rPr lang="en-US" sz="1800" dirty="0"/>
-              <a:t>Безпечні навіть проти квантових комп'ютерів.</a:t>
-            </a:r>
-            <a:endParaRPr kumimoji="0" lang="en-US" altLang="en-US" sz="1800" b="0" i="0" u="none" strike="noStrike" cap="none" normalizeH="0" baseline="0" dirty="0">
-              <a:ln>
-                <a:noFill/>
-              </a:ln>
-              <a:solidFill>
-                <a:schemeClr val="tx1"/>
-              </a:solidFill>
-              <a:effectLst/>
-              <a:latin typeface="Calibri"/>
-            </a:endParaRPr>
-          </a:p>
-        </p:txBody>
-      </p:sp>
-      <p:sp>
-        <p:nvSpPr>
-          <p:cNvPr id="7" name="Rectangle 2">
-            <a:extLst>
-              <a:ext uri="{FF2B5EF4-FFF2-40B4-BE49-F238E27FC236}">
-                <a16:creationId xmlns:a16="http://schemas.microsoft.com/office/drawing/2014/main" id="{441E25CA-E5AF-083F-B1CB-3CEB4B67935D}"/>
-              </a:ext>
-            </a:extLst>
-          </p:cNvPr>
-          <p:cNvSpPr>
-            <a:spLocks noGrp="1" noChangeArrowheads="1"/>
-          </p:cNvSpPr>
-          <p:nvPr>
-            <p:ph type="body" sz="quarter" idx="11"/>
-          </p:nvPr>
-        </p:nvSpPr>
-        <p:spPr bwMode="auto">
-          <a:xfrm>
-            <a:off x="606425" y="3876766"/>
-            <a:ext cx="5134418" cy="1287532"/>
-          </a:xfrm>
-          <a:prstGeom prst="rect">
-            <a:avLst/>
-          </a:prstGeom>
-          <a:noFill/>
-          <a:ln>
-            <a:noFill/>
-          </a:ln>
-          <a:effectLst/>
-          <a:extLst>
-            <a:ext uri="{909E8E84-426E-40DD-AFC4-6F175D3DCCD1}">
-              <a14:hiddenFill xmlns:a14="http://schemas.microsoft.com/office/drawing/2010/main">
-                <a:solidFill>
-                  <a:schemeClr val="accent1"/>
-                </a:solidFill>
-              </a14:hiddenFill>
-            </a:ext>
-            <a:ext uri="{91240B29-F687-4F45-9708-019B960494DF}">
-              <a14:hiddenLine xmlns:a14="http://schemas.microsoft.com/office/drawing/2010/main" w="9525">
-                <a:solidFill>
-                  <a:schemeClr val="tx1"/>
-                </a:solidFill>
-                <a:miter lim="800000"/>
-                <a:headEnd/>
-                <a:tailEnd/>
-              </a14:hiddenLine>
-            </a:ext>
-            <a:ext uri="{AF507438-7753-43E0-B8FC-AC1667EBCBE1}">
-              <a14:hiddenEffects xmlns:a14="http://schemas.microsoft.com/office/drawing/2010/main">
-                <a:effectLst>
-                  <a:outerShdw dist="35921" dir="2700000" algn="ctr" rotWithShape="0">
-                    <a:schemeClr val="bg2"/>
-                  </a:outerShdw>
-                </a:effectLst>
-              </a14:hiddenEffects>
-            </a:ext>
-          </a:extLst>
-        </p:spPr>
-        <p:txBody>
-          <a:bodyPr vert="horz" wrap="none" lIns="91440" tIns="45720" rIns="91440" bIns="45720" numCol="1" anchor="ctr" anchorCtr="0" compatLnSpc="1">
-            <a:prstTxWarp prst="textNoShape">
-              <a:avLst/>
-            </a:prstTxWarp>
-          </a:bodyPr>
-          <a:lstStyle/>
-          <a:p>
-            <a:pPr marL="0" marR="0" lvl="0" indent="0" algn="l" defTabSz="914400" rtl="0" eaLnBrk="0" fontAlgn="base" latinLnBrk="0" hangingPunct="0">
-              <a:lnSpc>
-                <a:spcPct val="150000"/>
-              </a:lnSpc>
-              <a:spcBef>
-                <a:spcPct val="0"/>
-              </a:spcBef>
-              <a:spcAft>
-                <a:spcPct val="0"/>
-              </a:spcAft>
-              <a:buClrTx/>
-              <a:buSzTx/>
-              <a:tabLst/>
-            </a:pPr>
-            <a:r>
-              <a:rPr kumimoji="0" lang="en-US" altLang="en-US" sz="1800" b="0" i="0" u="none" strike="noStrike" cap="none" normalizeH="0" baseline="0" dirty="0">
-                <a:ln>
-                  <a:noFill/>
-                </a:ln>
-                <a:solidFill>
-                  <a:schemeClr val="tx1"/>
-                </a:solidFill>
-                <a:effectLst/>
-                <a:latin typeface="Calibri"/>
-              </a:rPr>
-              <a:t>Базуються виключно на </a:t>
-            </a:r>
-            <a:r>
-              <a:rPr kumimoji="0" lang="en-US" altLang="en-US" sz="1800" b="1" i="0" u="none" strike="noStrike" cap="none" normalizeH="0" baseline="0" dirty="0">
-                <a:ln>
-                  <a:noFill/>
-                </a:ln>
-                <a:solidFill>
-                  <a:schemeClr val="tx1"/>
-                </a:solidFill>
-                <a:effectLst/>
-                <a:latin typeface="Calibri"/>
-              </a:rPr>
-              <a:t>безпеці хеш-функції</a:t>
-            </a:r>
-            <a:r>
-              <a:rPr kumimoji="0" lang="en-US" altLang="en-US" sz="1800" b="0" i="0" u="none" strike="noStrike" cap="none" normalizeH="0" baseline="0" dirty="0">
-                <a:ln>
-                  <a:noFill/>
-                </a:ln>
-                <a:solidFill>
-                  <a:schemeClr val="tx1"/>
-                </a:solidFill>
-                <a:effectLst/>
-                <a:latin typeface="Calibri"/>
-              </a:rPr>
-              <a:t>.</a:t>
-            </a:r>
-          </a:p>
-          <a:p>
-            <a:pPr marL="0" marR="0" lvl="0" indent="0" algn="l" defTabSz="914400" rtl="0" eaLnBrk="0" fontAlgn="base" latinLnBrk="0" hangingPunct="0">
-              <a:lnSpc>
-                <a:spcPct val="150000"/>
-              </a:lnSpc>
-              <a:spcBef>
-                <a:spcPct val="0"/>
-              </a:spcBef>
-              <a:spcAft>
-                <a:spcPct val="0"/>
-              </a:spcAft>
-              <a:buClrTx/>
-              <a:buSzTx/>
-              <a:tabLst/>
-            </a:pPr>
-            <a:r>
-              <a:rPr kumimoji="0" lang="en-US" altLang="en-US" sz="1800" b="0" i="0" u="none" strike="noStrike" cap="none" normalizeH="0" baseline="0" dirty="0">
-                <a:ln>
-                  <a:noFill/>
-                </a:ln>
-                <a:solidFill>
-                  <a:schemeClr val="tx1"/>
-                </a:solidFill>
-                <a:effectLst/>
-                <a:latin typeface="Calibri"/>
-              </a:rPr>
-              <a:t>Стійкі до алгоритму Шора.</a:t>
-            </a:r>
-          </a:p>
-          <a:p>
-            <a:pPr marL="0" marR="0" lvl="0" indent="0" algn="l" defTabSz="914400" rtl="0" eaLnBrk="0" fontAlgn="base" latinLnBrk="0" hangingPunct="0">
-              <a:lnSpc>
-                <a:spcPct val="150000"/>
-              </a:lnSpc>
-              <a:spcBef>
-                <a:spcPct val="0"/>
-              </a:spcBef>
-              <a:spcAft>
-                <a:spcPct val="0"/>
-              </a:spcAft>
-              <a:buClrTx/>
-              <a:buSzTx/>
-              <a:tabLst/>
-            </a:pPr>
-            <a:r>
-              <a:rPr kumimoji="0" lang="en-US" altLang="en-US" sz="1800" b="0" i="0" u="none" strike="noStrike" cap="none" normalizeH="0" baseline="0" dirty="0">
-                <a:ln>
-                  <a:noFill/>
-                </a:ln>
-                <a:solidFill>
-                  <a:schemeClr val="tx1"/>
-                </a:solidFill>
-                <a:effectLst/>
-                <a:latin typeface="Calibri"/>
-              </a:rPr>
-              <a:t>Проста конструкція, добре вивчена з 1970-х років.</a:t>
-            </a:r>
-          </a:p>
-        </p:txBody>
-      </p:sp>
-      <p:pic>
-        <p:nvPicPr>
-          <p:cNvPr id="1028" name="Picture 4" descr="7 Top Motivation Models To Use As a Leader">
-            <a:extLst>
-              <a:ext uri="{FF2B5EF4-FFF2-40B4-BE49-F238E27FC236}">
-                <a16:creationId xmlns:a16="http://schemas.microsoft.com/office/drawing/2014/main" id="{B9BFC49E-0FA6-C776-DB31-1276BBD25458}"/>
-              </a:ext>
-            </a:extLst>
-          </p:cNvPr>
-          <p:cNvPicPr>
-            <a:picLocks noChangeAspect="1" noChangeArrowheads="1"/>
-          </p:cNvPicPr>
-          <p:nvPr/>
-        </p:nvPicPr>
-        <p:blipFill>
-          <a:blip r:embed="rId2">
-            <a:extLst>
-              <a:ext uri="{28A0092B-C50C-407E-A947-70E740481C1C}">
-                <a14:useLocalDpi xmlns:a14="http://schemas.microsoft.com/office/drawing/2010/main" val="0"/>
-              </a:ext>
-            </a:extLst>
-          </a:blip>
-          <a:srcRect/>
-          <a:stretch>
-            <a:fillRect/>
-          </a:stretch>
-        </p:blipFill>
-        <p:spPr bwMode="auto">
-          <a:xfrm>
-            <a:off x="5990418" y="1447613"/>
-            <a:ext cx="5595157" cy="3456175"/>
-          </a:xfrm>
-          <a:prstGeom prst="rect">
-            <a:avLst/>
-          </a:prstGeom>
-          <a:noFill/>
-          <a:extLst>
-            <a:ext uri="{909E8E84-426E-40DD-AFC4-6F175D3DCCD1}">
-              <a14:hiddenFill xmlns:a14="http://schemas.microsoft.com/office/drawing/2010/main">
-                <a:solidFill>
-                  <a:srgbClr val="FFFFFF"/>
-                </a:solidFill>
-              </a14:hiddenFill>
-            </a:ext>
-          </a:extLst>
-        </p:spPr>
-      </p:pic>
-    </p:spTree>
-    <p:extLst>
-      <p:ext uri="{BB962C8B-B14F-4D97-AF65-F5344CB8AC3E}">
-        <p14:creationId xmlns:p14="http://schemas.microsoft.com/office/powerpoint/2010/main" val="2554148015"/>
-      </p:ext>
-    </p:extLst>
-  </p:cSld>
-  <p:clrMapOvr>
-    <a:masterClrMapping/>
-  </p:clrMapOvr>
-</p:sld>
-</file>
-
-<file path=ppt/slides/slide20.xml><?xml version="1.0" encoding="utf-8"?>
+<file path=ppt/slides/slide19.xml><?xml version="1.0" encoding="utf-8"?>
 <p:sld xmlns:a="http://schemas.openxmlformats.org/drawingml/2006/main" xmlns:r="http://schemas.openxmlformats.org/officeDocument/2006/relationships" xmlns:p="http://schemas.openxmlformats.org/presentationml/2006/main">
   <p:cSld>
     <p:spTree>
@@ -16555,8 +15226,8 @@
         </p:nvSpPr>
         <p:spPr bwMode="auto">
           <a:xfrm>
-            <a:off x="603373" y="3429000"/>
-            <a:ext cx="7838878" cy="1703030"/>
+            <a:off x="687705" y="3633229"/>
+            <a:ext cx="7304307" cy="1703030"/>
           </a:xfrm>
           <a:prstGeom prst="rect">
             <a:avLst/>
@@ -16884,7 +15555,393 @@
 </p:sld>
 </file>
 
-<file path=ppt/slides/slide21.xml><?xml version="1.0" encoding="utf-8"?>
+<file path=ppt/slides/slide2.xml><?xml version="1.0" encoding="utf-8"?>
+<p:sld xmlns:a="http://schemas.openxmlformats.org/drawingml/2006/main" xmlns:r="http://schemas.openxmlformats.org/officeDocument/2006/relationships" xmlns:p="http://schemas.openxmlformats.org/presentationml/2006/main">
+  <p:cSld>
+    <p:spTree>
+      <p:nvGrpSpPr>
+        <p:cNvPr id="1" name=""/>
+        <p:cNvGrpSpPr/>
+        <p:nvPr/>
+      </p:nvGrpSpPr>
+      <p:grpSpPr>
+        <a:xfrm>
+          <a:off x="0" y="0"/>
+          <a:ext cx="0" cy="0"/>
+          <a:chOff x="0" y="0"/>
+          <a:chExt cx="0" cy="0"/>
+        </a:xfrm>
+      </p:grpSpPr>
+      <p:sp>
+        <p:nvSpPr>
+          <p:cNvPr id="2" name="Заголовок 1">
+            <a:extLst>
+              <a:ext uri="{FF2B5EF4-FFF2-40B4-BE49-F238E27FC236}">
+                <a16:creationId xmlns:a16="http://schemas.microsoft.com/office/drawing/2014/main" id="{1B6E16CF-568A-DB52-A3EB-6D4FADCDD95D}"/>
+              </a:ext>
+            </a:extLst>
+          </p:cNvPr>
+          <p:cNvSpPr>
+            <a:spLocks noGrp="1"/>
+          </p:cNvSpPr>
+          <p:nvPr>
+            <p:ph type="title"/>
+          </p:nvPr>
+        </p:nvSpPr>
+        <p:spPr/>
+        <p:txBody>
+          <a:bodyPr/>
+          <a:lstStyle/>
+          <a:p>
+            <a:r>
+              <a:rPr lang="en-US" dirty="0"/>
+              <a:t>Мотивація</a:t>
+            </a:r>
+          </a:p>
+        </p:txBody>
+      </p:sp>
+      <p:sp>
+        <p:nvSpPr>
+          <p:cNvPr id="4" name="Rectangle 4">
+            <a:extLst>
+              <a:ext uri="{FF2B5EF4-FFF2-40B4-BE49-F238E27FC236}">
+                <a16:creationId xmlns:a16="http://schemas.microsoft.com/office/drawing/2014/main" id="{DB86B2E6-EF52-BEFC-2919-DA04E2C4AD6E}"/>
+              </a:ext>
+            </a:extLst>
+          </p:cNvPr>
+          <p:cNvSpPr>
+            <a:spLocks noGrp="1" noChangeArrowheads="1"/>
+          </p:cNvSpPr>
+          <p:nvPr>
+            <p:ph type="body" sz="quarter" idx="10"/>
+          </p:nvPr>
+        </p:nvSpPr>
+        <p:spPr bwMode="auto">
+          <a:xfrm>
+            <a:off x="606425" y="2100353"/>
+            <a:ext cx="5092626" cy="880882"/>
+          </a:xfrm>
+          <a:prstGeom prst="rect">
+            <a:avLst/>
+          </a:prstGeom>
+          <a:noFill/>
+          <a:ln>
+            <a:noFill/>
+          </a:ln>
+          <a:effectLst/>
+          <a:extLst>
+            <a:ext uri="{909E8E84-426E-40DD-AFC4-6F175D3DCCD1}">
+              <a14:hiddenFill xmlns:a14="http://schemas.microsoft.com/office/drawing/2010/main">
+                <a:solidFill>
+                  <a:schemeClr val="accent1"/>
+                </a:solidFill>
+              </a14:hiddenFill>
+            </a:ext>
+            <a:ext uri="{91240B29-F687-4F45-9708-019B960494DF}">
+              <a14:hiddenLine xmlns:a14="http://schemas.microsoft.com/office/drawing/2010/main" w="9525">
+                <a:solidFill>
+                  <a:schemeClr val="tx1"/>
+                </a:solidFill>
+                <a:miter lim="800000"/>
+                <a:headEnd/>
+                <a:tailEnd/>
+              </a14:hiddenLine>
+            </a:ext>
+            <a:ext uri="{AF507438-7753-43E0-B8FC-AC1667EBCBE1}">
+              <a14:hiddenEffects xmlns:a14="http://schemas.microsoft.com/office/drawing/2010/main">
+                <a:effectLst>
+                  <a:outerShdw dist="35921" dir="2700000" algn="ctr" rotWithShape="0">
+                    <a:schemeClr val="bg2"/>
+                  </a:outerShdw>
+                </a:effectLst>
+              </a14:hiddenEffects>
+            </a:ext>
+          </a:extLst>
+        </p:spPr>
+        <p:txBody>
+          <a:bodyPr vert="horz" wrap="none" lIns="91440" tIns="45720" rIns="91440" bIns="45720" numCol="1" anchor="ctr" anchorCtr="0" compatLnSpc="1">
+            <a:prstTxWarp prst="textNoShape">
+              <a:avLst/>
+            </a:prstTxWarp>
+          </a:bodyPr>
+          <a:lstStyle/>
+          <a:p>
+            <a:pPr lvl="0" eaLnBrk="0" fontAlgn="base" hangingPunct="0">
+              <a:lnSpc>
+                <a:spcPct val="150000"/>
+              </a:lnSpc>
+              <a:spcBef>
+                <a:spcPct val="0"/>
+              </a:spcBef>
+              <a:spcAft>
+                <a:spcPct val="0"/>
+              </a:spcAft>
+            </a:pPr>
+            <a:r>
+              <a:rPr lang="en-US" sz="1800" i="1" dirty="0"/>
+              <a:t>Чому саме хеш-підписи?</a:t>
+            </a:r>
+            <a:br>
+              <a:rPr lang="en-US" sz="1800" dirty="0"/>
+            </a:br>
+            <a:r>
+              <a:rPr lang="en-US" sz="1800" dirty="0"/>
+              <a:t>Безпечні навіть проти квантових комп'ютерів.</a:t>
+            </a:r>
+            <a:endParaRPr kumimoji="0" lang="en-US" altLang="en-US" sz="1800" b="0" i="0" u="none" strike="noStrike" cap="none" normalizeH="0" baseline="0" dirty="0">
+              <a:ln>
+                <a:noFill/>
+              </a:ln>
+              <a:solidFill>
+                <a:schemeClr val="tx1"/>
+              </a:solidFill>
+              <a:effectLst/>
+              <a:latin typeface="Calibri"/>
+            </a:endParaRPr>
+          </a:p>
+        </p:txBody>
+      </p:sp>
+      <p:sp>
+        <p:nvSpPr>
+          <p:cNvPr id="7" name="Rectangle 2">
+            <a:extLst>
+              <a:ext uri="{FF2B5EF4-FFF2-40B4-BE49-F238E27FC236}">
+                <a16:creationId xmlns:a16="http://schemas.microsoft.com/office/drawing/2014/main" id="{441E25CA-E5AF-083F-B1CB-3CEB4B67935D}"/>
+              </a:ext>
+            </a:extLst>
+          </p:cNvPr>
+          <p:cNvSpPr>
+            <a:spLocks noGrp="1" noChangeArrowheads="1"/>
+          </p:cNvSpPr>
+          <p:nvPr>
+            <p:ph type="body" sz="quarter" idx="11"/>
+          </p:nvPr>
+        </p:nvSpPr>
+        <p:spPr bwMode="auto">
+          <a:xfrm>
+            <a:off x="447675" y="4260022"/>
+            <a:ext cx="4339650" cy="1287532"/>
+          </a:xfrm>
+          <a:prstGeom prst="rect">
+            <a:avLst/>
+          </a:prstGeom>
+          <a:noFill/>
+          <a:ln>
+            <a:noFill/>
+          </a:ln>
+          <a:effectLst/>
+          <a:extLst>
+            <a:ext uri="{909E8E84-426E-40DD-AFC4-6F175D3DCCD1}">
+              <a14:hiddenFill xmlns:a14="http://schemas.microsoft.com/office/drawing/2010/main">
+                <a:solidFill>
+                  <a:schemeClr val="accent1"/>
+                </a:solidFill>
+              </a14:hiddenFill>
+            </a:ext>
+            <a:ext uri="{91240B29-F687-4F45-9708-019B960494DF}">
+              <a14:hiddenLine xmlns:a14="http://schemas.microsoft.com/office/drawing/2010/main" w="9525">
+                <a:solidFill>
+                  <a:schemeClr val="tx1"/>
+                </a:solidFill>
+                <a:miter lim="800000"/>
+                <a:headEnd/>
+                <a:tailEnd/>
+              </a14:hiddenLine>
+            </a:ext>
+            <a:ext uri="{AF507438-7753-43E0-B8FC-AC1667EBCBE1}">
+              <a14:hiddenEffects xmlns:a14="http://schemas.microsoft.com/office/drawing/2010/main">
+                <a:effectLst>
+                  <a:outerShdw dist="35921" dir="2700000" algn="ctr" rotWithShape="0">
+                    <a:schemeClr val="bg2"/>
+                  </a:outerShdw>
+                </a:effectLst>
+              </a14:hiddenEffects>
+            </a:ext>
+          </a:extLst>
+        </p:spPr>
+        <p:txBody>
+          <a:bodyPr vert="horz" wrap="none" lIns="91440" tIns="45720" rIns="91440" bIns="45720" numCol="1" anchor="ctr" anchorCtr="0" compatLnSpc="1">
+            <a:prstTxWarp prst="textNoShape">
+              <a:avLst/>
+            </a:prstTxWarp>
+          </a:bodyPr>
+          <a:lstStyle/>
+          <a:p>
+            <a:pPr marL="0" marR="0" lvl="0" indent="0" algn="l" defTabSz="914400" rtl="0" eaLnBrk="0" fontAlgn="base" latinLnBrk="0" hangingPunct="0">
+              <a:lnSpc>
+                <a:spcPct val="150000"/>
+              </a:lnSpc>
+              <a:spcBef>
+                <a:spcPct val="0"/>
+              </a:spcBef>
+              <a:spcAft>
+                <a:spcPct val="0"/>
+              </a:spcAft>
+              <a:buClrTx/>
+              <a:buSzTx/>
+              <a:tabLst/>
+            </a:pPr>
+            <a:r>
+              <a:rPr kumimoji="0" lang="en-US" altLang="en-US" sz="1800" b="0" i="0" u="none" strike="noStrike" cap="none" normalizeH="0" baseline="0" dirty="0">
+                <a:ln>
+                  <a:noFill/>
+                </a:ln>
+                <a:solidFill>
+                  <a:schemeClr val="tx1"/>
+                </a:solidFill>
+                <a:effectLst/>
+                <a:latin typeface="Calibri"/>
+              </a:rPr>
+              <a:t>Базуються виключно на </a:t>
+            </a:r>
+            <a:r>
+              <a:rPr kumimoji="0" lang="en-US" altLang="en-US" sz="1800" b="1" i="0" u="none" strike="noStrike" cap="none" normalizeH="0" baseline="0" dirty="0">
+                <a:ln>
+                  <a:noFill/>
+                </a:ln>
+                <a:solidFill>
+                  <a:schemeClr val="tx1"/>
+                </a:solidFill>
+                <a:effectLst/>
+                <a:latin typeface="Calibri"/>
+              </a:rPr>
+              <a:t>безпеці хеш-функції</a:t>
+            </a:r>
+            <a:r>
+              <a:rPr kumimoji="0" lang="en-US" altLang="en-US" sz="1800" b="0" i="0" u="none" strike="noStrike" cap="none" normalizeH="0" baseline="0" dirty="0">
+                <a:ln>
+                  <a:noFill/>
+                </a:ln>
+                <a:solidFill>
+                  <a:schemeClr val="tx1"/>
+                </a:solidFill>
+                <a:effectLst/>
+                <a:latin typeface="Calibri"/>
+              </a:rPr>
+              <a:t>.</a:t>
+            </a:r>
+          </a:p>
+          <a:p>
+            <a:pPr marL="0" marR="0" lvl="0" indent="0" algn="l" defTabSz="914400" rtl="0" eaLnBrk="0" fontAlgn="base" latinLnBrk="0" hangingPunct="0">
+              <a:lnSpc>
+                <a:spcPct val="150000"/>
+              </a:lnSpc>
+              <a:spcBef>
+                <a:spcPct val="0"/>
+              </a:spcBef>
+              <a:spcAft>
+                <a:spcPct val="0"/>
+              </a:spcAft>
+              <a:buClrTx/>
+              <a:buSzTx/>
+              <a:tabLst/>
+            </a:pPr>
+            <a:r>
+              <a:rPr kumimoji="0" lang="en-US" altLang="en-US" sz="1800" b="0" i="0" u="none" strike="noStrike" cap="none" normalizeH="0" baseline="0" dirty="0">
+                <a:ln>
+                  <a:noFill/>
+                </a:ln>
+                <a:solidFill>
+                  <a:schemeClr val="tx1"/>
+                </a:solidFill>
+                <a:effectLst/>
+                <a:latin typeface="Calibri"/>
+              </a:rPr>
+              <a:t>Стійкі до алгоритму Шора.</a:t>
+            </a:r>
+          </a:p>
+          <a:p>
+            <a:pPr marL="0" marR="0" lvl="0" indent="0" algn="l" defTabSz="914400" rtl="0" eaLnBrk="0" fontAlgn="base" latinLnBrk="0" hangingPunct="0">
+              <a:lnSpc>
+                <a:spcPct val="150000"/>
+              </a:lnSpc>
+              <a:spcBef>
+                <a:spcPct val="0"/>
+              </a:spcBef>
+              <a:spcAft>
+                <a:spcPct val="0"/>
+              </a:spcAft>
+              <a:buClrTx/>
+              <a:buSzTx/>
+              <a:tabLst/>
+            </a:pPr>
+            <a:r>
+              <a:rPr kumimoji="0" lang="en-US" altLang="en-US" sz="1800" b="0" i="0" u="none" strike="noStrike" cap="none" normalizeH="0" baseline="0" dirty="0">
+                <a:ln>
+                  <a:noFill/>
+                </a:ln>
+                <a:solidFill>
+                  <a:schemeClr val="tx1"/>
+                </a:solidFill>
+                <a:effectLst/>
+                <a:latin typeface="Calibri"/>
+              </a:rPr>
+              <a:t>Проста конструкція, добре вивчена з 1970-х років.</a:t>
+            </a:r>
+          </a:p>
+        </p:txBody>
+      </p:sp>
+      <p:pic>
+        <p:nvPicPr>
+          <p:cNvPr id="1028" name="Picture 4" descr="7 Top Motivation Models To Use As a Leader">
+            <a:extLst>
+              <a:ext uri="{FF2B5EF4-FFF2-40B4-BE49-F238E27FC236}">
+                <a16:creationId xmlns:a16="http://schemas.microsoft.com/office/drawing/2014/main" id="{B9BFC49E-0FA6-C776-DB31-1276BBD25458}"/>
+              </a:ext>
+            </a:extLst>
+          </p:cNvPr>
+          <p:cNvPicPr>
+            <a:picLocks noChangeAspect="1" noChangeArrowheads="1"/>
+          </p:cNvPicPr>
+          <p:nvPr/>
+        </p:nvPicPr>
+        <p:blipFill>
+          <a:blip r:embed="rId2">
+            <a:extLst>
+              <a:ext uri="{28A0092B-C50C-407E-A947-70E740481C1C}">
+                <a14:useLocalDpi xmlns:a14="http://schemas.microsoft.com/office/drawing/2010/main" val="0"/>
+              </a:ext>
+            </a:extLst>
+          </a:blip>
+          <a:srcRect/>
+          <a:stretch>
+            <a:fillRect/>
+          </a:stretch>
+        </p:blipFill>
+        <p:spPr bwMode="auto">
+          <a:xfrm>
+            <a:off x="5990418" y="1447613"/>
+            <a:ext cx="5595157" cy="3456175"/>
+          </a:xfrm>
+          <a:prstGeom prst="rect">
+            <a:avLst/>
+          </a:prstGeom>
+          <a:noFill/>
+          <a:extLst>
+            <a:ext uri="{909E8E84-426E-40DD-AFC4-6F175D3DCCD1}">
+              <a14:hiddenFill xmlns:a14="http://schemas.microsoft.com/office/drawing/2010/main">
+                <a:solidFill>
+                  <a:srgbClr val="FFFFFF"/>
+                </a:solidFill>
+              </a14:hiddenFill>
+            </a:ext>
+          </a:extLst>
+        </p:spPr>
+      </p:pic>
+    </p:spTree>
+    <p:extLst>
+      <p:ext uri="{BB962C8B-B14F-4D97-AF65-F5344CB8AC3E}">
+        <p14:creationId xmlns:p14="http://schemas.microsoft.com/office/powerpoint/2010/main" val="2554148015"/>
+      </p:ext>
+    </p:extLst>
+  </p:cSld>
+  <p:clrMapOvr>
+    <a:masterClrMapping/>
+  </p:clrMapOvr>
+</p:sld>
+</file>
+
+<file path=ppt/slides/slide20.xml><?xml version="1.0" encoding="utf-8"?>
 <p:sld xmlns:a="http://schemas.openxmlformats.org/drawingml/2006/main" xmlns:r="http://schemas.openxmlformats.org/officeDocument/2006/relationships" xmlns:p="http://schemas.openxmlformats.org/presentationml/2006/main">
   <p:cSld>
     <p:spTree>
@@ -16999,7 +16056,7 @@
           <a:p>
             <a:pPr algn="ctr"/>
             <a:r>
-              <a:rPr sz="1800" b="1">
+              <a:rPr sz="2000" b="1">
                 <a:solidFill>
                   <a:srgbClr val="FFFFFF"/>
                 </a:solidFill>
@@ -17010,7 +16067,7 @@
           <a:p>
             <a:pPr algn="ctr"/>
             <a:r>
-              <a:rPr sz="1400">
+              <a:rPr sz="1600">
                 <a:solidFill>
                   <a:srgbClr val="E8EEF9"/>
                 </a:solidFill>
@@ -17108,7 +16165,7 @@
           <a:p>
             <a:pPr algn="ctr"/>
             <a:r>
-              <a:rPr sz="1800" b="1">
+              <a:rPr sz="2000" b="1">
                 <a:solidFill>
                   <a:srgbClr val="FFFFFF"/>
                 </a:solidFill>
@@ -17119,7 +16176,7 @@
           <a:p>
             <a:pPr algn="ctr"/>
             <a:r>
-              <a:rPr sz="1400">
+              <a:rPr sz="1600">
                 <a:solidFill>
                   <a:srgbClr val="E8EEF9"/>
                 </a:solidFill>
@@ -17217,7 +16274,7 @@
           <a:p>
             <a:pPr algn="ctr"/>
             <a:r>
-              <a:rPr sz="1800" b="1">
+              <a:rPr sz="2000" b="1">
                 <a:solidFill>
                   <a:srgbClr val="FFFFFF"/>
                 </a:solidFill>
@@ -17228,7 +16285,7 @@
           <a:p>
             <a:pPr algn="ctr"/>
             <a:r>
-              <a:rPr sz="1400">
+              <a:rPr sz="1600">
                 <a:solidFill>
                   <a:srgbClr val="E8EEF9"/>
                 </a:solidFill>
@@ -17326,7 +16383,7 @@
           <a:p>
             <a:pPr algn="ctr"/>
             <a:r>
-              <a:rPr sz="1800" b="1">
+              <a:rPr sz="2000" b="1">
                 <a:solidFill>
                   <a:srgbClr val="FFFFFF"/>
                 </a:solidFill>
@@ -17337,7 +16394,7 @@
           <a:p>
             <a:pPr algn="ctr"/>
             <a:r>
-              <a:rPr sz="1400">
+              <a:rPr sz="1600">
                 <a:solidFill>
                   <a:srgbClr val="E8EEF9"/>
                 </a:solidFill>
@@ -17435,7 +16492,7 @@
           <a:p>
             <a:pPr algn="ctr"/>
             <a:r>
-              <a:rPr sz="1800" b="1">
+              <a:rPr sz="2000" b="1">
                 <a:solidFill>
                   <a:srgbClr val="FFFFFF"/>
                 </a:solidFill>
@@ -17446,7 +16503,7 @@
           <a:p>
             <a:pPr algn="ctr"/>
             <a:r>
-              <a:rPr sz="1400">
+              <a:rPr sz="1600">
                 <a:solidFill>
                   <a:srgbClr val="E8EEF9"/>
                 </a:solidFill>
@@ -17544,7 +16601,7 @@
           <a:p>
             <a:pPr algn="ctr"/>
             <a:r>
-              <a:rPr sz="1800" b="1">
+              <a:rPr sz="2000" b="1">
                 <a:solidFill>
                   <a:srgbClr val="FFFFFF"/>
                 </a:solidFill>
@@ -17555,7 +16612,7 @@
           <a:p>
             <a:pPr algn="ctr"/>
             <a:r>
-              <a:rPr sz="1400">
+              <a:rPr sz="1600">
                 <a:solidFill>
                   <a:srgbClr val="E8EEF9"/>
                 </a:solidFill>
@@ -17588,12 +16645,12 @@
           <a:p>
             <a:pPr algn="ctr"/>
             <a:r>
-              <a:rPr sz="1600" i="1">
+              <a:rPr sz="1800" i="1">
                 <a:solidFill>
                   <a:srgbClr val="445577"/>
                 </a:solidFill>
               </a:rPr>
-              <a:t>45 років еволюції — від OTS Лампорта до офіційного NIST-стандарту 2024 року</a:t>
+              <a:t>45 років еволюції від OTS Лампорта до офіційного NIST-стандарту 2024 року</a:t>
             </a:r>
           </a:p>
         </p:txBody>
@@ -17640,42 +16697,42 @@
           <a:lstStyle/>
           <a:p>
             <a:r>
-              <a:rPr sz="1600">
+              <a:rPr sz="2000">
                 <a:solidFill>
                   <a:srgbClr val="222233"/>
                 </a:solidFill>
               </a:rPr>
-              <a:t>•  1979 — Лампорт і Меркл одночасно публікують перші схеми</a:t>
+              <a:t>•  1979: Лампорт і Меркл одночасно публікують перші схеми</a:t>
             </a:r>
           </a:p>
           <a:p>
             <a:r>
-              <a:rPr sz="1600">
+              <a:rPr sz="2000">
                 <a:solidFill>
                   <a:srgbClr val="222233"/>
                 </a:solidFill>
               </a:rPr>
-              <a:t>•  2011 — XMSS приносить formal security proofs та bitmasks</a:t>
+              <a:t>•  2011: XMSS приносить formal security proofs та bitmasks</a:t>
             </a:r>
           </a:p>
           <a:p>
             <a:r>
-              <a:rPr sz="1600">
+              <a:rPr sz="2000">
                 <a:solidFill>
                   <a:srgbClr val="222233"/>
                 </a:solidFill>
               </a:rPr>
-              <a:t>•  2015 — SPHINCS усуває проблему стейту (stateless)</a:t>
+              <a:t>•  2015: SPHINCS усуває проблему стейту (stateless)</a:t>
             </a:r>
           </a:p>
           <a:p>
             <a:r>
-              <a:rPr sz="1600">
+              <a:rPr sz="2000">
                 <a:solidFill>
                   <a:srgbClr val="222233"/>
                 </a:solidFill>
               </a:rPr>
-              <a:t>•  2024 — FIPS 205 (SLH-DSA) — третій NIST PQC-стандарт поряд з ML-DSA та FN-DSA</a:t>
+              <a:t>•  2024: FIPS 205 (SLH-DSA) - третій NIST PQC-стандарт</a:t>
             </a:r>
           </a:p>
         </p:txBody>
@@ -17688,7 +16745,7 @@
 </p:sld>
 </file>
 
-<file path=ppt/slides/slide22.xml><?xml version="1.0" encoding="utf-8"?>
+<file path=ppt/slides/slide21.xml><?xml version="1.0" encoding="utf-8"?>
 <p:sld xmlns:a="http://schemas.openxmlformats.org/drawingml/2006/main" xmlns:r="http://schemas.openxmlformats.org/officeDocument/2006/relationships" xmlns:p="http://schemas.openxmlformats.org/presentationml/2006/main">
   <p:cSld>
     <p:spTree>
@@ -17803,7 +16860,7 @@
           <a:p>
             <a:pPr algn="ctr"/>
             <a:r>
-              <a:rPr sz="2200" b="1">
+              <a:rPr sz="2400" b="1">
                 <a:solidFill>
                   <a:srgbClr val="FFFFFF"/>
                 </a:solidFill>
@@ -17860,7 +16917,7 @@
               </a:spcAft>
             </a:pPr>
             <a:r>
-              <a:rPr sz="1800">
+              <a:rPr sz="2000">
                 <a:solidFill>
                   <a:srgbClr val="222233"/>
                 </a:solidFill>
@@ -17875,7 +16932,7 @@
               </a:spcAft>
             </a:pPr>
             <a:r>
-              <a:rPr sz="1800">
+              <a:rPr sz="2000">
                 <a:solidFill>
                   <a:srgbClr val="222233"/>
                 </a:solidFill>
@@ -17890,7 +16947,7 @@
               </a:spcAft>
             </a:pPr>
             <a:r>
-              <a:rPr sz="1800">
+              <a:rPr sz="2000">
                 <a:solidFill>
                   <a:srgbClr val="222233"/>
                 </a:solidFill>
@@ -17905,7 +16962,7 @@
               </a:spcAft>
             </a:pPr>
             <a:r>
-              <a:rPr sz="1800">
+              <a:rPr sz="2000">
                 <a:solidFill>
                   <a:srgbClr val="222233"/>
                 </a:solidFill>
@@ -17920,7 +16977,7 @@
               </a:spcAft>
             </a:pPr>
             <a:r>
-              <a:rPr sz="1800">
+              <a:rPr sz="2000">
                 <a:solidFill>
                   <a:srgbClr val="222233"/>
                 </a:solidFill>
@@ -17935,7 +16992,7 @@
               </a:spcAft>
             </a:pPr>
             <a:r>
-              <a:rPr sz="1800">
+              <a:rPr sz="2000">
                 <a:solidFill>
                   <a:srgbClr val="222233"/>
                 </a:solidFill>
@@ -17988,7 +17045,7 @@
           <a:p>
             <a:pPr algn="ctr"/>
             <a:r>
-              <a:rPr sz="2200" b="1">
+              <a:rPr sz="2400" b="1">
                 <a:solidFill>
                   <a:srgbClr val="FFFFFF"/>
                 </a:solidFill>
@@ -18045,7 +17102,7 @@
               </a:spcAft>
             </a:pPr>
             <a:r>
-              <a:rPr sz="1800">
+              <a:rPr sz="2000">
                 <a:solidFill>
                   <a:srgbClr val="222233"/>
                 </a:solidFill>
@@ -18060,7 +17117,7 @@
               </a:spcAft>
             </a:pPr>
             <a:r>
-              <a:rPr sz="1800">
+              <a:rPr sz="2000">
                 <a:solidFill>
                   <a:srgbClr val="222233"/>
                 </a:solidFill>
@@ -18075,7 +17132,7 @@
               </a:spcAft>
             </a:pPr>
             <a:r>
-              <a:rPr sz="1800">
+              <a:rPr sz="2000">
                 <a:solidFill>
                   <a:srgbClr val="222233"/>
                 </a:solidFill>
@@ -18090,7 +17147,7 @@
               </a:spcAft>
             </a:pPr>
             <a:r>
-              <a:rPr sz="1800">
+              <a:rPr sz="2000">
                 <a:solidFill>
                   <a:srgbClr val="222233"/>
                 </a:solidFill>
@@ -18105,7 +17162,7 @@
               </a:spcAft>
             </a:pPr>
             <a:r>
-              <a:rPr sz="1800">
+              <a:rPr sz="2000">
                 <a:solidFill>
                   <a:srgbClr val="222233"/>
                 </a:solidFill>
@@ -18120,7 +17177,7 @@
               </a:spcAft>
             </a:pPr>
             <a:r>
-              <a:rPr sz="1800">
+              <a:rPr sz="2000">
                 <a:solidFill>
                   <a:srgbClr val="222233"/>
                 </a:solidFill>
@@ -18138,7 +17195,7 @@
         </p:nvSpPr>
         <p:spPr>
           <a:xfrm>
-            <a:off x="700000" y="6330000"/>
+            <a:off x="700000" y="6250000"/>
             <a:ext cx="10792000" cy="500000"/>
           </a:xfrm>
           <a:prstGeom prst="rect">
@@ -18152,12 +17209,159 @@
           <a:p>
             <a:pPr algn="ctr"/>
             <a:r>
-              <a:rPr sz="1600" b="1">
+              <a:rPr sz="1800" b="1" dirty="0">
                 <a:solidFill>
                   <a:srgbClr val="445577"/>
                 </a:solidFill>
               </a:rPr>
-              <a:t>WOTS+ ≈ 8× менший підпис, але ≈ 4× більше викликів H у Verify</a:t>
+              <a:t>WOTS+ </a:t>
+            </a:r>
+            <a:r>
+              <a:rPr sz="1800" b="1" dirty="0" err="1">
+                <a:solidFill>
+                  <a:srgbClr val="445577"/>
+                </a:solidFill>
+              </a:rPr>
+              <a:t>дає</a:t>
+            </a:r>
+            <a:r>
+              <a:rPr sz="1800" b="1" dirty="0">
+                <a:solidFill>
+                  <a:srgbClr val="445577"/>
+                </a:solidFill>
+              </a:rPr>
+              <a:t> ~8× </a:t>
+            </a:r>
+            <a:r>
+              <a:rPr sz="1800" b="1" dirty="0" err="1">
+                <a:solidFill>
+                  <a:srgbClr val="445577"/>
+                </a:solidFill>
+              </a:rPr>
+              <a:t>менший</a:t>
+            </a:r>
+            <a:r>
+              <a:rPr sz="1800" b="1" dirty="0">
+                <a:solidFill>
+                  <a:srgbClr val="445577"/>
+                </a:solidFill>
+              </a:rPr>
+              <a:t> </a:t>
+            </a:r>
+            <a:r>
+              <a:rPr sz="1800" b="1" dirty="0" err="1">
+                <a:solidFill>
+                  <a:srgbClr val="445577"/>
+                </a:solidFill>
+              </a:rPr>
+              <a:t>підпис</a:t>
+            </a:r>
+            <a:r>
+              <a:rPr sz="1800" b="1" dirty="0">
+                <a:solidFill>
+                  <a:srgbClr val="445577"/>
+                </a:solidFill>
+              </a:rPr>
+              <a:t>, </a:t>
+            </a:r>
+            <a:r>
+              <a:rPr sz="1800" b="1" dirty="0" err="1">
+                <a:solidFill>
+                  <a:srgbClr val="445577"/>
+                </a:solidFill>
+              </a:rPr>
+              <a:t>але</a:t>
+            </a:r>
+            <a:r>
+              <a:rPr sz="1800" b="1" dirty="0">
+                <a:solidFill>
+                  <a:srgbClr val="445577"/>
+                </a:solidFill>
+              </a:rPr>
+              <a:t> ~4× </a:t>
+            </a:r>
+            <a:r>
+              <a:rPr sz="1800" b="1" dirty="0" err="1">
+                <a:solidFill>
+                  <a:srgbClr val="445577"/>
+                </a:solidFill>
+              </a:rPr>
+              <a:t>більше</a:t>
+            </a:r>
+            <a:r>
+              <a:rPr sz="1800" b="1" dirty="0">
+                <a:solidFill>
+                  <a:srgbClr val="445577"/>
+                </a:solidFill>
+              </a:rPr>
+              <a:t> </a:t>
+            </a:r>
+            <a:r>
+              <a:rPr sz="1800" b="1" dirty="0" err="1">
+                <a:solidFill>
+                  <a:srgbClr val="445577"/>
+                </a:solidFill>
+              </a:rPr>
+              <a:t>викликів</a:t>
+            </a:r>
+            <a:r>
+              <a:rPr sz="1800" b="1" dirty="0">
+                <a:solidFill>
+                  <a:srgbClr val="445577"/>
+                </a:solidFill>
+              </a:rPr>
+              <a:t> H </a:t>
+            </a:r>
+            <a:r>
+              <a:rPr sz="1800" b="1" dirty="0" err="1">
+                <a:solidFill>
+                  <a:srgbClr val="445577"/>
+                </a:solidFill>
+              </a:rPr>
+              <a:t>у</a:t>
+            </a:r>
+            <a:r>
+              <a:rPr sz="1800" b="1" dirty="0">
+                <a:solidFill>
+                  <a:srgbClr val="445577"/>
+                </a:solidFill>
+              </a:rPr>
+              <a:t> Verify</a:t>
+            </a:r>
+          </a:p>
+        </p:txBody>
+      </p:sp>
+      <p:sp>
+        <p:nvSpPr>
+          <p:cNvPr id="4" name="TextBox 3">
+            <a:extLst>
+              <a:ext uri="{FF2B5EF4-FFF2-40B4-BE49-F238E27FC236}">
+                <a16:creationId xmlns:a16="http://schemas.microsoft.com/office/drawing/2014/main" id="{919B6EAF-7B69-02CA-CF42-3EB1283B247D}"/>
+              </a:ext>
+            </a:extLst>
+          </p:cNvPr>
+          <p:cNvSpPr txBox="1"/>
+          <p:nvPr/>
+        </p:nvSpPr>
+        <p:spPr>
+          <a:xfrm>
+            <a:off x="4786667" y="708000"/>
+            <a:ext cx="2618666" cy="400110"/>
+          </a:xfrm>
+          <a:prstGeom prst="rect">
+            <a:avLst/>
+          </a:prstGeom>
+          <a:noFill/>
+        </p:spPr>
+        <p:txBody>
+          <a:bodyPr wrap="none" rtlCol="0">
+            <a:spAutoFit/>
+          </a:bodyPr>
+          <a:lstStyle/>
+          <a:p>
+            <a:r>
+              <a:rPr lang="en-US" sz="2000" dirty="0"/>
+              <a:t>Lamport OTS vs WOTS+</a:t>
             </a:r>
           </a:p>
         </p:txBody>
@@ -18170,7 +17374,7 @@
 </p:sld>
 </file>
 
-<file path=ppt/slides/slide23.xml><?xml version="1.0" encoding="utf-8"?>
+<file path=ppt/slides/slide22.xml><?xml version="1.0" encoding="utf-8"?>
 <p:sld xmlns:a="http://schemas.openxmlformats.org/drawingml/2006/main" xmlns:r="http://schemas.openxmlformats.org/officeDocument/2006/relationships" xmlns:p="http://schemas.openxmlformats.org/presentationml/2006/main">
   <p:cSld>
     <p:spTree>
@@ -18199,7 +17403,7 @@
         </p:nvSpPr>
         <p:spPr>
           <a:xfrm>
-            <a:off x="-10000000" y="-10000000"/>
+            <a:off x="-10000000" y="-10345989"/>
             <a:ext cx="100" cy="100"/>
           </a:xfrm>
         </p:spPr>
@@ -18227,16 +17431,15 @@
           </p:cNvSpPr>
           <p:nvPr/>
         </p:nvSpPr>
-        <p:spPr/>
+        <p:spPr>
+          <a:xfrm>
+            <a:off x="0" y="-345989"/>
+            <a:ext cx="0" cy="0"/>
+          </a:xfrm>
+        </p:spPr>
         <p:txBody>
           <a:bodyPr/>
           <a:lstStyle/>
-          <a:p>
-            <a:r>
-              <a:rPr lang="en-US" sz="3200" dirty="0"/>
-              <a:t>Розміри hash-based підписів (n = 256, w = 16)</a:t>
-            </a:r>
-          </a:p>
           <a:p>
             <a:endParaRPr lang="uk-UA" dirty="0"/>
           </a:p>
@@ -18248,11 +17451,17 @@
           <p:cNvGraphicFramePr>
             <a:graphicFrameLocks noGrp="1"/>
           </p:cNvGraphicFramePr>
-          <p:nvPr/>
+          <p:nvPr>
+            <p:extLst>
+              <p:ext uri="{D42A27DB-BD31-4B8C-83A1-F6EECF244321}">
+                <p14:modId xmlns:p14="http://schemas.microsoft.com/office/powerpoint/2010/main" val="217187831"/>
+              </p:ext>
+            </p:extLst>
+          </p:nvPr>
         </p:nvGraphicFramePr>
         <p:xfrm>
-          <a:off x="500000" y="1200000"/>
-          <a:ext cx="11191999" cy="4508000"/>
+          <a:off x="500000" y="904011"/>
+          <a:ext cx="11191999" cy="4458000"/>
         </p:xfrm>
         <a:graphic>
           <a:graphicData uri="http://schemas.openxmlformats.org/drawingml/2006/table">
@@ -18297,14 +17506,14 @@
                   </a:extLst>
                 </a:gridCol>
               </a:tblGrid>
-              <a:tr h="450800">
+              <a:tr h="445800">
                 <a:tc>
                   <a:txBody>
                     <a:bodyPr/>
                     <a:lstStyle/>
                     <a:p>
                       <a:r>
-                        <a:rPr sz="1600" b="1">
+                        <a:rPr sz="1800" b="1">
                           <a:solidFill>
                             <a:srgbClr val="FFFFFF"/>
                           </a:solidFill>
@@ -18325,7 +17534,7 @@
                     <a:lstStyle/>
                     <a:p>
                       <a:r>
-                        <a:rPr sz="1600" b="1">
+                        <a:rPr sz="1800" b="1">
                           <a:solidFill>
                             <a:srgbClr val="FFFFFF"/>
                           </a:solidFill>
@@ -18346,7 +17555,7 @@
                     <a:lstStyle/>
                     <a:p>
                       <a:r>
-                        <a:rPr sz="1600" b="1">
+                        <a:rPr sz="1800" b="1">
                           <a:solidFill>
                             <a:srgbClr val="FFFFFF"/>
                           </a:solidFill>
@@ -18367,7 +17576,7 @@
                     <a:lstStyle/>
                     <a:p>
                       <a:r>
-                        <a:rPr sz="1600" b="1">
+                        <a:rPr sz="1800" b="1">
                           <a:solidFill>
                             <a:srgbClr val="FFFFFF"/>
                           </a:solidFill>
@@ -18388,7 +17597,7 @@
                     <a:lstStyle/>
                     <a:p>
                       <a:r>
-                        <a:rPr sz="1600" b="1">
+                        <a:rPr sz="1800" b="1">
                           <a:solidFill>
                             <a:srgbClr val="FFFFFF"/>
                           </a:solidFill>
@@ -18409,14 +17618,14 @@
                   </a:ext>
                 </a:extLst>
               </a:tr>
-              <a:tr h="450800">
+              <a:tr h="445800">
                 <a:tc>
                   <a:txBody>
                     <a:bodyPr/>
                     <a:lstStyle/>
                     <a:p>
                       <a:r>
-                        <a:rPr sz="1400">
+                        <a:rPr sz="1600">
                           <a:solidFill>
                             <a:srgbClr val="1F1F2E"/>
                           </a:solidFill>
@@ -18437,7 +17646,7 @@
                     <a:lstStyle/>
                     <a:p>
                       <a:r>
-                        <a:rPr sz="1400">
+                        <a:rPr sz="1600">
                           <a:solidFill>
                             <a:srgbClr val="1F1F2E"/>
                           </a:solidFill>
@@ -18458,7 +17667,7 @@
                     <a:lstStyle/>
                     <a:p>
                       <a:r>
-                        <a:rPr sz="1400">
+                        <a:rPr sz="1600">
                           <a:solidFill>
                             <a:srgbClr val="1F1F2E"/>
                           </a:solidFill>
@@ -18479,7 +17688,7 @@
                     <a:lstStyle/>
                     <a:p>
                       <a:r>
-                        <a:rPr sz="1400">
+                        <a:rPr sz="1600">
                           <a:solidFill>
                             <a:srgbClr val="1F1F2E"/>
                           </a:solidFill>
@@ -18500,7 +17709,7 @@
                     <a:lstStyle/>
                     <a:p>
                       <a:r>
-                        <a:rPr sz="1400">
+                        <a:rPr sz="1600">
                           <a:solidFill>
                             <a:srgbClr val="1F1F2E"/>
                           </a:solidFill>
@@ -18521,14 +17730,14 @@
                   </a:ext>
                 </a:extLst>
               </a:tr>
-              <a:tr h="450800">
+              <a:tr h="445800">
                 <a:tc>
                   <a:txBody>
                     <a:bodyPr/>
                     <a:lstStyle/>
                     <a:p>
                       <a:r>
-                        <a:rPr sz="1400">
+                        <a:rPr sz="1600">
                           <a:solidFill>
                             <a:srgbClr val="1F1F2E"/>
                           </a:solidFill>
@@ -18549,7 +17758,7 @@
                     <a:lstStyle/>
                     <a:p>
                       <a:r>
-                        <a:rPr sz="1400">
+                        <a:rPr sz="1600">
                           <a:solidFill>
                             <a:srgbClr val="1F1F2E"/>
                           </a:solidFill>
@@ -18570,7 +17779,7 @@
                     <a:lstStyle/>
                     <a:p>
                       <a:r>
-                        <a:rPr sz="1400">
+                        <a:rPr sz="1600">
                           <a:solidFill>
                             <a:srgbClr val="1F1F2E"/>
                           </a:solidFill>
@@ -18591,7 +17800,7 @@
                     <a:lstStyle/>
                     <a:p>
                       <a:r>
-                        <a:rPr sz="1400">
+                        <a:rPr sz="1600">
                           <a:solidFill>
                             <a:srgbClr val="1F1F2E"/>
                           </a:solidFill>
@@ -18612,7 +17821,7 @@
                     <a:lstStyle/>
                     <a:p>
                       <a:r>
-                        <a:rPr sz="1400">
+                        <a:rPr sz="1600">
                           <a:solidFill>
                             <a:srgbClr val="1F1F2E"/>
                           </a:solidFill>
@@ -18633,14 +17842,14 @@
                   </a:ext>
                 </a:extLst>
               </a:tr>
-              <a:tr h="450800">
+              <a:tr h="445800">
                 <a:tc>
                   <a:txBody>
                     <a:bodyPr/>
                     <a:lstStyle/>
                     <a:p>
                       <a:r>
-                        <a:rPr sz="1400">
+                        <a:rPr sz="1600">
                           <a:solidFill>
                             <a:srgbClr val="1F1F2E"/>
                           </a:solidFill>
@@ -18661,7 +17870,7 @@
                     <a:lstStyle/>
                     <a:p>
                       <a:r>
-                        <a:rPr sz="1400">
+                        <a:rPr sz="1600">
                           <a:solidFill>
                             <a:srgbClr val="1F1F2E"/>
                           </a:solidFill>
@@ -18682,7 +17891,7 @@
                     <a:lstStyle/>
                     <a:p>
                       <a:r>
-                        <a:rPr sz="1400">
+                        <a:rPr sz="1600">
                           <a:solidFill>
                             <a:srgbClr val="1F1F2E"/>
                           </a:solidFill>
@@ -18703,7 +17912,7 @@
                     <a:lstStyle/>
                     <a:p>
                       <a:r>
-                        <a:rPr sz="1400">
+                        <a:rPr sz="1600">
                           <a:solidFill>
                             <a:srgbClr val="1F1F2E"/>
                           </a:solidFill>
@@ -18724,7 +17933,7 @@
                     <a:lstStyle/>
                     <a:p>
                       <a:r>
-                        <a:rPr sz="1400">
+                        <a:rPr sz="1600">
                           <a:solidFill>
                             <a:srgbClr val="1F1F2E"/>
                           </a:solidFill>
@@ -18745,14 +17954,14 @@
                   </a:ext>
                 </a:extLst>
               </a:tr>
-              <a:tr h="450800">
+              <a:tr h="445800">
                 <a:tc>
                   <a:txBody>
                     <a:bodyPr/>
                     <a:lstStyle/>
                     <a:p>
                       <a:r>
-                        <a:rPr sz="1400">
+                        <a:rPr sz="1600">
                           <a:solidFill>
                             <a:srgbClr val="1F1F2E"/>
                           </a:solidFill>
@@ -18773,7 +17982,7 @@
                     <a:lstStyle/>
                     <a:p>
                       <a:r>
-                        <a:rPr sz="1400">
+                        <a:rPr sz="1600">
                           <a:solidFill>
                             <a:srgbClr val="1F1F2E"/>
                           </a:solidFill>
@@ -18794,7 +18003,7 @@
                     <a:lstStyle/>
                     <a:p>
                       <a:r>
-                        <a:rPr sz="1400">
+                        <a:rPr sz="1600">
                           <a:solidFill>
                             <a:srgbClr val="1F1F2E"/>
                           </a:solidFill>
@@ -18815,7 +18024,7 @@
                     <a:lstStyle/>
                     <a:p>
                       <a:r>
-                        <a:rPr sz="1400">
+                        <a:rPr sz="1600">
                           <a:solidFill>
                             <a:srgbClr val="1F1F2E"/>
                           </a:solidFill>
@@ -18836,7 +18045,7 @@
                     <a:lstStyle/>
                     <a:p>
                       <a:r>
-                        <a:rPr sz="1400">
+                        <a:rPr sz="1600">
                           <a:solidFill>
                             <a:srgbClr val="1F1F2E"/>
                           </a:solidFill>
@@ -18857,14 +18066,14 @@
                   </a:ext>
                 </a:extLst>
               </a:tr>
-              <a:tr h="450800">
+              <a:tr h="445800">
                 <a:tc>
                   <a:txBody>
                     <a:bodyPr/>
                     <a:lstStyle/>
                     <a:p>
                       <a:r>
-                        <a:rPr sz="1400">
+                        <a:rPr sz="1600">
                           <a:solidFill>
                             <a:srgbClr val="1F1F2E"/>
                           </a:solidFill>
@@ -18885,7 +18094,7 @@
                     <a:lstStyle/>
                     <a:p>
                       <a:r>
-                        <a:rPr sz="1400">
+                        <a:rPr sz="1600">
                           <a:solidFill>
                             <a:srgbClr val="1F1F2E"/>
                           </a:solidFill>
@@ -18906,7 +18115,7 @@
                     <a:lstStyle/>
                     <a:p>
                       <a:r>
-                        <a:rPr sz="1400">
+                        <a:rPr sz="1600">
                           <a:solidFill>
                             <a:srgbClr val="1F1F2E"/>
                           </a:solidFill>
@@ -18927,7 +18136,7 @@
                     <a:lstStyle/>
                     <a:p>
                       <a:r>
-                        <a:rPr sz="1400">
+                        <a:rPr sz="1600">
                           <a:solidFill>
                             <a:srgbClr val="1F1F2E"/>
                           </a:solidFill>
@@ -18948,7 +18157,7 @@
                     <a:lstStyle/>
                     <a:p>
                       <a:r>
-                        <a:rPr sz="1400">
+                        <a:rPr sz="1600">
                           <a:solidFill>
                             <a:srgbClr val="1F1F2E"/>
                           </a:solidFill>
@@ -18969,14 +18178,14 @@
                   </a:ext>
                 </a:extLst>
               </a:tr>
-              <a:tr h="450800">
+              <a:tr h="445800">
                 <a:tc>
                   <a:txBody>
                     <a:bodyPr/>
                     <a:lstStyle/>
                     <a:p>
                       <a:r>
-                        <a:rPr sz="1400">
+                        <a:rPr sz="1600">
                           <a:solidFill>
                             <a:srgbClr val="1F1F2E"/>
                           </a:solidFill>
@@ -18997,7 +18206,7 @@
                     <a:lstStyle/>
                     <a:p>
                       <a:r>
-                        <a:rPr sz="1400">
+                        <a:rPr sz="1600">
                           <a:solidFill>
                             <a:srgbClr val="1F1F2E"/>
                           </a:solidFill>
@@ -19018,7 +18227,7 @@
                     <a:lstStyle/>
                     <a:p>
                       <a:r>
-                        <a:rPr sz="1400">
+                        <a:rPr sz="1600">
                           <a:solidFill>
                             <a:srgbClr val="1F1F2E"/>
                           </a:solidFill>
@@ -19039,7 +18248,7 @@
                     <a:lstStyle/>
                     <a:p>
                       <a:r>
-                        <a:rPr sz="1400">
+                        <a:rPr sz="1600">
                           <a:solidFill>
                             <a:srgbClr val="1F1F2E"/>
                           </a:solidFill>
@@ -19060,7 +18269,7 @@
                     <a:lstStyle/>
                     <a:p>
                       <a:r>
-                        <a:rPr sz="1400">
+                        <a:rPr sz="1600">
                           <a:solidFill>
                             <a:srgbClr val="1F1F2E"/>
                           </a:solidFill>
@@ -19081,14 +18290,14 @@
                   </a:ext>
                 </a:extLst>
               </a:tr>
-              <a:tr h="450800">
+              <a:tr h="445800">
                 <a:tc>
                   <a:txBody>
                     <a:bodyPr/>
                     <a:lstStyle/>
                     <a:p>
                       <a:r>
-                        <a:rPr sz="1400">
+                        <a:rPr sz="1600">
                           <a:solidFill>
                             <a:srgbClr val="1F1F2E"/>
                           </a:solidFill>
@@ -19109,7 +18318,7 @@
                     <a:lstStyle/>
                     <a:p>
                       <a:r>
-                        <a:rPr sz="1400">
+                        <a:rPr sz="1600">
                           <a:solidFill>
                             <a:srgbClr val="1F1F2E"/>
                           </a:solidFill>
@@ -19130,7 +18339,7 @@
                     <a:lstStyle/>
                     <a:p>
                       <a:r>
-                        <a:rPr sz="1400">
+                        <a:rPr sz="1600">
                           <a:solidFill>
                             <a:srgbClr val="1F1F2E"/>
                           </a:solidFill>
@@ -19151,7 +18360,7 @@
                     <a:lstStyle/>
                     <a:p>
                       <a:r>
-                        <a:rPr sz="1400">
+                        <a:rPr sz="1600">
                           <a:solidFill>
                             <a:srgbClr val="1F1F2E"/>
                           </a:solidFill>
@@ -19172,7 +18381,7 @@
                     <a:lstStyle/>
                     <a:p>
                       <a:r>
-                        <a:rPr sz="1400">
+                        <a:rPr sz="1600">
                           <a:solidFill>
                             <a:srgbClr val="1F1F2E"/>
                           </a:solidFill>
@@ -19193,14 +18402,14 @@
                   </a:ext>
                 </a:extLst>
               </a:tr>
-              <a:tr h="450800">
+              <a:tr h="445800">
                 <a:tc>
                   <a:txBody>
                     <a:bodyPr/>
                     <a:lstStyle/>
                     <a:p>
                       <a:r>
-                        <a:rPr sz="1400">
+                        <a:rPr sz="1600">
                           <a:solidFill>
                             <a:srgbClr val="1F1F2E"/>
                           </a:solidFill>
@@ -19221,7 +18430,7 @@
                     <a:lstStyle/>
                     <a:p>
                       <a:r>
-                        <a:rPr sz="1400">
+                        <a:rPr sz="1600">
                           <a:solidFill>
                             <a:srgbClr val="1F1F2E"/>
                           </a:solidFill>
@@ -19242,7 +18451,7 @@
                     <a:lstStyle/>
                     <a:p>
                       <a:r>
-                        <a:rPr sz="1400">
+                        <a:rPr sz="1600">
                           <a:solidFill>
                             <a:srgbClr val="1F1F2E"/>
                           </a:solidFill>
@@ -19263,7 +18472,7 @@
                     <a:lstStyle/>
                     <a:p>
                       <a:r>
-                        <a:rPr sz="1400">
+                        <a:rPr sz="1600">
                           <a:solidFill>
                             <a:srgbClr val="1F1F2E"/>
                           </a:solidFill>
@@ -19284,7 +18493,7 @@
                     <a:lstStyle/>
                     <a:p>
                       <a:r>
-                        <a:rPr sz="1400">
+                        <a:rPr sz="1600">
                           <a:solidFill>
                             <a:srgbClr val="1F1F2E"/>
                           </a:solidFill>
@@ -19305,14 +18514,14 @@
                   </a:ext>
                 </a:extLst>
               </a:tr>
-              <a:tr h="450800">
+              <a:tr h="445800">
                 <a:tc>
                   <a:txBody>
                     <a:bodyPr/>
                     <a:lstStyle/>
                     <a:p>
                       <a:r>
-                        <a:rPr sz="1400">
+                        <a:rPr sz="1600">
                           <a:solidFill>
                             <a:srgbClr val="1F1F2E"/>
                           </a:solidFill>
@@ -19333,7 +18542,7 @@
                     <a:lstStyle/>
                     <a:p>
                       <a:r>
-                        <a:rPr sz="1400">
+                        <a:rPr sz="1600">
                           <a:solidFill>
                             <a:srgbClr val="1F1F2E"/>
                           </a:solidFill>
@@ -19354,7 +18563,7 @@
                     <a:lstStyle/>
                     <a:p>
                       <a:r>
-                        <a:rPr sz="1400">
+                        <a:rPr sz="1600">
                           <a:solidFill>
                             <a:srgbClr val="1F1F2E"/>
                           </a:solidFill>
@@ -19375,7 +18584,7 @@
                     <a:lstStyle/>
                     <a:p>
                       <a:r>
-                        <a:rPr sz="1400">
+                        <a:rPr sz="1600">
                           <a:solidFill>
                             <a:srgbClr val="1F1F2E"/>
                           </a:solidFill>
@@ -19396,7 +18605,7 @@
                     <a:lstStyle/>
                     <a:p>
                       <a:r>
-                        <a:rPr sz="1400">
+                        <a:rPr sz="1600">
                           <a:solidFill>
                             <a:srgbClr val="1F1F2E"/>
                           </a:solidFill>
@@ -19429,7 +18638,7 @@
         </p:nvSpPr>
         <p:spPr>
           <a:xfrm>
-            <a:off x="500000" y="5808000"/>
+            <a:off x="500000" y="5462011"/>
             <a:ext cx="11192000" cy="500000"/>
           </a:xfrm>
           <a:prstGeom prst="rect">
@@ -19442,12 +18651,59 @@
           <a:lstStyle/>
           <a:p>
             <a:r>
-              <a:rPr sz="1600" i="1">
+              <a:rPr sz="1800" i="1">
                 <a:solidFill>
                   <a:srgbClr val="555566"/>
                 </a:solidFill>
               </a:rPr>
-              <a:t>WOTS+ — будівельний блок. XMSS і SPHINCS+ — практично використовувані багаторазові схеми.</a:t>
+              <a:t>WOTS+ - будівельний блок. XMSS і SPHINCS+ практично використовувані схеми.</a:t>
+            </a:r>
+          </a:p>
+        </p:txBody>
+      </p:sp>
+      <p:sp>
+        <p:nvSpPr>
+          <p:cNvPr id="3" name="TextBox 2">
+            <a:extLst>
+              <a:ext uri="{FF2B5EF4-FFF2-40B4-BE49-F238E27FC236}">
+                <a16:creationId xmlns:a16="http://schemas.microsoft.com/office/drawing/2014/main" id="{D30426D7-C46D-C621-FE43-836CBD85E849}"/>
+              </a:ext>
+            </a:extLst>
+          </p:cNvPr>
+          <p:cNvSpPr txBox="1"/>
+          <p:nvPr/>
+        </p:nvSpPr>
+        <p:spPr>
+          <a:xfrm>
+            <a:off x="3805365" y="434679"/>
+            <a:ext cx="4581267" cy="369332"/>
+          </a:xfrm>
+          <a:prstGeom prst="rect">
+            <a:avLst/>
+          </a:prstGeom>
+          <a:noFill/>
+        </p:spPr>
+        <p:txBody>
+          <a:bodyPr wrap="square">
+            <a:spAutoFit/>
+          </a:bodyPr>
+          <a:lstStyle/>
+          <a:p>
+            <a:r>
+              <a:rPr lang="en-US" sz="1800" dirty="0" err="1"/>
+              <a:t>Розміри</a:t>
+            </a:r>
+            <a:r>
+              <a:rPr lang="en-US" sz="1800" dirty="0"/>
+              <a:t> hash-based </a:t>
+            </a:r>
+            <a:r>
+              <a:rPr lang="en-US" sz="1800" dirty="0" err="1"/>
+              <a:t>підписів</a:t>
+            </a:r>
+            <a:r>
+              <a:rPr lang="en-US" sz="1800" dirty="0"/>
+              <a:t> (n = 256, w = 16)</a:t>
             </a:r>
           </a:p>
         </p:txBody>
@@ -19460,7 +18716,7 @@
 </p:sld>
 </file>
 
-<file path=ppt/slides/slide24.xml><?xml version="1.0" encoding="utf-8"?>
+<file path=ppt/slides/slide23.xml><?xml version="1.0" encoding="utf-8"?>
 <p:sld xmlns:a="http://schemas.openxmlformats.org/drawingml/2006/main" xmlns:r="http://schemas.openxmlformats.org/officeDocument/2006/relationships" xmlns:p="http://schemas.openxmlformats.org/presentationml/2006/main">
   <p:cSld>
     <p:spTree>
@@ -19575,7 +18831,7 @@
           <a:p>
             <a:pPr algn="ctr"/>
             <a:r>
-              <a:rPr sz="1800" b="1">
+              <a:rPr sz="2000" b="1">
                 <a:solidFill>
                   <a:srgbClr val="FFFFFF"/>
                 </a:solidFill>
@@ -19586,7 +18842,7 @@
           <a:p>
             <a:pPr algn="ctr"/>
             <a:r>
-              <a:rPr sz="1400">
+              <a:rPr sz="1600">
                 <a:solidFill>
                   <a:srgbClr val="E8EEF9"/>
                 </a:solidFill>
@@ -19683,7 +18939,7 @@
           <a:p>
             <a:pPr algn="ctr"/>
             <a:r>
-              <a:rPr sz="1800" b="1">
+              <a:rPr sz="2000" b="1">
                 <a:solidFill>
                   <a:srgbClr val="FFFFFF"/>
                 </a:solidFill>
@@ -19694,7 +18950,7 @@
           <a:p>
             <a:pPr algn="ctr"/>
             <a:r>
-              <a:rPr sz="1400">
+              <a:rPr sz="1600">
                 <a:solidFill>
                   <a:srgbClr val="E8EEF9"/>
                 </a:solidFill>
@@ -19791,7 +19047,7 @@
           <a:p>
             <a:pPr algn="ctr"/>
             <a:r>
-              <a:rPr sz="1800" b="1">
+              <a:rPr sz="2000" b="1">
                 <a:solidFill>
                   <a:srgbClr val="FFFFFF"/>
                 </a:solidFill>
@@ -19802,7 +19058,7 @@
           <a:p>
             <a:pPr algn="ctr"/>
             <a:r>
-              <a:rPr sz="1400">
+              <a:rPr sz="1600">
                 <a:solidFill>
                   <a:srgbClr val="E8EEF9"/>
                 </a:solidFill>
@@ -19899,7 +19155,7 @@
           <a:p>
             <a:pPr algn="ctr"/>
             <a:r>
-              <a:rPr sz="1800" b="1">
+              <a:rPr sz="2000" b="1">
                 <a:solidFill>
                   <a:srgbClr val="FFFFFF"/>
                 </a:solidFill>
@@ -19910,7 +19166,7 @@
           <a:p>
             <a:pPr algn="ctr"/>
             <a:r>
-              <a:rPr sz="1400">
+              <a:rPr sz="1600">
                 <a:solidFill>
                   <a:srgbClr val="E8EEF9"/>
                 </a:solidFill>
@@ -20007,7 +19263,7 @@
           <a:p>
             <a:pPr algn="ctr"/>
             <a:r>
-              <a:rPr sz="1800" b="1">
+              <a:rPr sz="2000" b="1">
                 <a:solidFill>
                   <a:srgbClr val="FFFFFF"/>
                 </a:solidFill>
@@ -20018,7 +19274,7 @@
           <a:p>
             <a:pPr algn="ctr"/>
             <a:r>
-              <a:rPr sz="1400">
+              <a:rPr sz="1600">
                 <a:solidFill>
                   <a:srgbClr val="E8EEF9"/>
                 </a:solidFill>
@@ -20050,12 +19306,12 @@
           <a:p>
             <a:pPr algn="ctr"/>
             <a:r>
-              <a:rPr sz="1600" i="1">
+              <a:rPr sz="1800" i="1">
                 <a:solidFill>
                   <a:srgbClr val="445577"/>
                 </a:solidFill>
               </a:rPr>
-              <a:t>Один корінь = публічний ключ для 2^h підписів. Auth.path — h хешів братів вузлів на шляху до кореня</a:t>
+              <a:t>Один корінь = публічний ключ для 2^h підписів. Auth.path = h хешів братів</a:t>
             </a:r>
           </a:p>
         </p:txBody>
@@ -20102,27 +19358,27 @@
           <a:lstStyle/>
           <a:p>
             <a:r>
-              <a:rPr sz="1600">
+              <a:rPr sz="2000">
                 <a:solidFill>
                   <a:srgbClr val="222233"/>
                 </a:solidFill>
               </a:rPr>
-              <a:t>•  Висота h = 10 → 1 024 підписи; h = 20 → ~1 М підписів; h = 60 (XMSS-MT) → ~10¹⁸</a:t>
+              <a:t>•  Висота h = 10 → 1 024 підписи; h = 20 → ~1 М підписів</a:t>
             </a:r>
           </a:p>
           <a:p>
             <a:r>
-              <a:rPr sz="1600">
+              <a:rPr sz="2000">
                 <a:solidFill>
                   <a:srgbClr val="222233"/>
                 </a:solidFill>
               </a:rPr>
-              <a:t>•  Розмір PK = n байт (32 для SHA-256) — найкомпактніший серед усіх постквантових схем</a:t>
+              <a:t>•  Розмір PK = n байт (32 для SHA-256) - найкомпактніший серед усіх PQ-схем</a:t>
             </a:r>
           </a:p>
           <a:p>
             <a:r>
-              <a:rPr sz="1600">
+              <a:rPr sz="2000">
                 <a:solidFill>
                   <a:srgbClr val="222233"/>
                 </a:solidFill>
@@ -20132,7 +19388,7 @@
           </a:p>
           <a:p>
             <a:r>
-              <a:rPr sz="1600">
+              <a:rPr sz="2000">
                 <a:solidFill>
                   <a:srgbClr val="222233"/>
                 </a:solidFill>
@@ -20150,7 +19406,7 @@
 </p:sld>
 </file>
 
-<file path=ppt/slides/slide25.xml><?xml version="1.0" encoding="utf-8"?>
+<file path=ppt/slides/slide24.xml><?xml version="1.0" encoding="utf-8"?>
 <p:sld xmlns:a="http://schemas.openxmlformats.org/drawingml/2006/main" xmlns:r="http://schemas.openxmlformats.org/officeDocument/2006/relationships" xmlns:p="http://schemas.openxmlformats.org/presentationml/2006/main">
   <p:cSld>
     <p:spTree>
@@ -20179,7 +19435,7 @@
         </p:nvSpPr>
         <p:spPr>
           <a:xfrm>
-            <a:off x="-10000000" y="-10000000"/>
+            <a:off x="-10000000" y="-10296563"/>
             <a:ext cx="100" cy="100"/>
           </a:xfrm>
         </p:spPr>
@@ -20207,16 +19463,15 @@
           </p:cNvSpPr>
           <p:nvPr/>
         </p:nvSpPr>
-        <p:spPr/>
+        <p:spPr>
+          <a:xfrm>
+            <a:off x="0" y="-296563"/>
+            <a:ext cx="0" cy="0"/>
+          </a:xfrm>
+        </p:spPr>
         <p:txBody>
           <a:bodyPr/>
           <a:lstStyle/>
-          <a:p>
-            <a:r>
-              <a:rPr lang="en-US" sz="3200" dirty="0"/>
-              <a:t>SPHINCS+ / SLH-DSA: параметри FIPS 205</a:t>
-            </a:r>
-          </a:p>
           <a:p>
             <a:endParaRPr lang="uk-UA" dirty="0"/>
           </a:p>
@@ -20228,11 +19483,17 @@
           <p:cNvGraphicFramePr>
             <a:graphicFrameLocks noGrp="1"/>
           </p:cNvGraphicFramePr>
-          <p:nvPr/>
+          <p:nvPr>
+            <p:extLst>
+              <p:ext uri="{D42A27DB-BD31-4B8C-83A1-F6EECF244321}">
+                <p14:modId xmlns:p14="http://schemas.microsoft.com/office/powerpoint/2010/main" val="4014837084"/>
+              </p:ext>
+            </p:extLst>
+          </p:nvPr>
         </p:nvGraphicFramePr>
         <p:xfrm>
-          <a:off x="500000" y="1200000"/>
-          <a:ext cx="11191998" cy="4508000"/>
+          <a:off x="500000" y="1027579"/>
+          <a:ext cx="11191998" cy="4458000"/>
         </p:xfrm>
         <a:graphic>
           <a:graphicData uri="http://schemas.openxmlformats.org/drawingml/2006/table">
@@ -20284,14 +19545,14 @@
                   </a:extLst>
                 </a:gridCol>
               </a:tblGrid>
-              <a:tr h="563500">
+              <a:tr h="636857">
                 <a:tc>
                   <a:txBody>
                     <a:bodyPr/>
                     <a:lstStyle/>
                     <a:p>
                       <a:r>
-                        <a:rPr sz="1600" b="1">
+                        <a:rPr sz="1800" b="1">
                           <a:solidFill>
                             <a:srgbClr val="FFFFFF"/>
                           </a:solidFill>
@@ -20312,7 +19573,7 @@
                     <a:lstStyle/>
                     <a:p>
                       <a:r>
-                        <a:rPr sz="1600" b="1">
+                        <a:rPr sz="1800" b="1">
                           <a:solidFill>
                             <a:srgbClr val="FFFFFF"/>
                           </a:solidFill>
@@ -20333,7 +19594,7 @@
                     <a:lstStyle/>
                     <a:p>
                       <a:r>
-                        <a:rPr sz="1600" b="1">
+                        <a:rPr sz="1800" b="1">
                           <a:solidFill>
                             <a:srgbClr val="FFFFFF"/>
                           </a:solidFill>
@@ -20354,7 +19615,7 @@
                     <a:lstStyle/>
                     <a:p>
                       <a:r>
-                        <a:rPr sz="1600" b="1">
+                        <a:rPr sz="1800" b="1">
                           <a:solidFill>
                             <a:srgbClr val="FFFFFF"/>
                           </a:solidFill>
@@ -20375,7 +19636,7 @@
                     <a:lstStyle/>
                     <a:p>
                       <a:r>
-                        <a:rPr sz="1600" b="1">
+                        <a:rPr sz="1800" b="1">
                           <a:solidFill>
                             <a:srgbClr val="FFFFFF"/>
                           </a:solidFill>
@@ -20396,7 +19657,7 @@
                     <a:lstStyle/>
                     <a:p>
                       <a:r>
-                        <a:rPr sz="1600" b="1">
+                        <a:rPr sz="1800" b="1">
                           <a:solidFill>
                             <a:srgbClr val="FFFFFF"/>
                           </a:solidFill>
@@ -20417,14 +19678,14 @@
                   </a:ext>
                 </a:extLst>
               </a:tr>
-              <a:tr h="563500">
+              <a:tr h="636857">
                 <a:tc>
                   <a:txBody>
                     <a:bodyPr/>
                     <a:lstStyle/>
                     <a:p>
                       <a:r>
-                        <a:rPr sz="1400">
+                        <a:rPr sz="1600">
                           <a:solidFill>
                             <a:srgbClr val="1F1F2E"/>
                           </a:solidFill>
@@ -20445,7 +19706,7 @@
                     <a:lstStyle/>
                     <a:p>
                       <a:r>
-                        <a:rPr sz="1400">
+                        <a:rPr sz="1600">
                           <a:solidFill>
                             <a:srgbClr val="1F1F2E"/>
                           </a:solidFill>
@@ -20466,7 +19727,7 @@
                     <a:lstStyle/>
                     <a:p>
                       <a:r>
-                        <a:rPr sz="1400">
+                        <a:rPr sz="1600">
                           <a:solidFill>
                             <a:srgbClr val="1F1F2E"/>
                           </a:solidFill>
@@ -20487,7 +19748,7 @@
                     <a:lstStyle/>
                     <a:p>
                       <a:r>
-                        <a:rPr sz="1400">
+                        <a:rPr sz="1600">
                           <a:solidFill>
                             <a:srgbClr val="1F1F2E"/>
                           </a:solidFill>
@@ -20508,7 +19769,7 @@
                     <a:lstStyle/>
                     <a:p>
                       <a:r>
-                        <a:rPr sz="1400">
+                        <a:rPr sz="1600">
                           <a:solidFill>
                             <a:srgbClr val="1F1F2E"/>
                           </a:solidFill>
@@ -20529,7 +19790,7 @@
                     <a:lstStyle/>
                     <a:p>
                       <a:r>
-                        <a:rPr sz="1400">
+                        <a:rPr sz="1600">
                           <a:solidFill>
                             <a:srgbClr val="1F1F2E"/>
                           </a:solidFill>
@@ -20550,14 +19811,14 @@
                   </a:ext>
                 </a:extLst>
               </a:tr>
-              <a:tr h="563500">
+              <a:tr h="636857">
                 <a:tc>
                   <a:txBody>
                     <a:bodyPr/>
                     <a:lstStyle/>
                     <a:p>
                       <a:r>
-                        <a:rPr sz="1400">
+                        <a:rPr sz="1600" dirty="0">
                           <a:solidFill>
                             <a:srgbClr val="1F1F2E"/>
                           </a:solidFill>
@@ -20578,7 +19839,7 @@
                     <a:lstStyle/>
                     <a:p>
                       <a:r>
-                        <a:rPr sz="1400">
+                        <a:rPr sz="1600">
                           <a:solidFill>
                             <a:srgbClr val="1F1F2E"/>
                           </a:solidFill>
@@ -20599,7 +19860,7 @@
                     <a:lstStyle/>
                     <a:p>
                       <a:r>
-                        <a:rPr sz="1400">
+                        <a:rPr sz="1600">
                           <a:solidFill>
                             <a:srgbClr val="1F1F2E"/>
                           </a:solidFill>
@@ -20620,7 +19881,7 @@
                     <a:lstStyle/>
                     <a:p>
                       <a:r>
-                        <a:rPr sz="1400">
+                        <a:rPr sz="1600">
                           <a:solidFill>
                             <a:srgbClr val="1F1F2E"/>
                           </a:solidFill>
@@ -20641,7 +19902,7 @@
                     <a:lstStyle/>
                     <a:p>
                       <a:r>
-                        <a:rPr sz="1400">
+                        <a:rPr sz="1600">
                           <a:solidFill>
                             <a:srgbClr val="1F1F2E"/>
                           </a:solidFill>
@@ -20662,7 +19923,7 @@
                     <a:lstStyle/>
                     <a:p>
                       <a:r>
-                        <a:rPr sz="1400">
+                        <a:rPr sz="1600">
                           <a:solidFill>
                             <a:srgbClr val="1F1F2E"/>
                           </a:solidFill>
@@ -20683,14 +19944,14 @@
                   </a:ext>
                 </a:extLst>
               </a:tr>
-              <a:tr h="563500">
+              <a:tr h="636857">
                 <a:tc>
                   <a:txBody>
                     <a:bodyPr/>
                     <a:lstStyle/>
                     <a:p>
                       <a:r>
-                        <a:rPr sz="1400">
+                        <a:rPr sz="1600">
                           <a:solidFill>
                             <a:srgbClr val="1F1F2E"/>
                           </a:solidFill>
@@ -20711,7 +19972,7 @@
                     <a:lstStyle/>
                     <a:p>
                       <a:r>
-                        <a:rPr sz="1400">
+                        <a:rPr sz="1600">
                           <a:solidFill>
                             <a:srgbClr val="1F1F2E"/>
                           </a:solidFill>
@@ -20732,7 +19993,7 @@
                     <a:lstStyle/>
                     <a:p>
                       <a:r>
-                        <a:rPr sz="1400">
+                        <a:rPr sz="1600">
                           <a:solidFill>
                             <a:srgbClr val="1F1F2E"/>
                           </a:solidFill>
@@ -20753,7 +20014,7 @@
                     <a:lstStyle/>
                     <a:p>
                       <a:r>
-                        <a:rPr sz="1400">
+                        <a:rPr sz="1600">
                           <a:solidFill>
                             <a:srgbClr val="1F1F2E"/>
                           </a:solidFill>
@@ -20774,7 +20035,7 @@
                     <a:lstStyle/>
                     <a:p>
                       <a:r>
-                        <a:rPr sz="1400">
+                        <a:rPr sz="1600">
                           <a:solidFill>
                             <a:srgbClr val="1F1F2E"/>
                           </a:solidFill>
@@ -20795,7 +20056,7 @@
                     <a:lstStyle/>
                     <a:p>
                       <a:r>
-                        <a:rPr sz="1400">
+                        <a:rPr sz="1600">
                           <a:solidFill>
                             <a:srgbClr val="1F1F2E"/>
                           </a:solidFill>
@@ -20816,14 +20077,14 @@
                   </a:ext>
                 </a:extLst>
               </a:tr>
-              <a:tr h="563500">
+              <a:tr h="636857">
                 <a:tc>
                   <a:txBody>
                     <a:bodyPr/>
                     <a:lstStyle/>
                     <a:p>
                       <a:r>
-                        <a:rPr sz="1400">
+                        <a:rPr sz="1600">
                           <a:solidFill>
                             <a:srgbClr val="1F1F2E"/>
                           </a:solidFill>
@@ -20844,7 +20105,7 @@
                     <a:lstStyle/>
                     <a:p>
                       <a:r>
-                        <a:rPr sz="1400">
+                        <a:rPr sz="1600">
                           <a:solidFill>
                             <a:srgbClr val="1F1F2E"/>
                           </a:solidFill>
@@ -20865,7 +20126,7 @@
                     <a:lstStyle/>
                     <a:p>
                       <a:r>
-                        <a:rPr sz="1400">
+                        <a:rPr sz="1600">
                           <a:solidFill>
                             <a:srgbClr val="1F1F2E"/>
                           </a:solidFill>
@@ -20886,7 +20147,7 @@
                     <a:lstStyle/>
                     <a:p>
                       <a:r>
-                        <a:rPr sz="1400">
+                        <a:rPr sz="1600">
                           <a:solidFill>
                             <a:srgbClr val="1F1F2E"/>
                           </a:solidFill>
@@ -20907,7 +20168,7 @@
                     <a:lstStyle/>
                     <a:p>
                       <a:r>
-                        <a:rPr sz="1400">
+                        <a:rPr sz="1600">
                           <a:solidFill>
                             <a:srgbClr val="1F1F2E"/>
                           </a:solidFill>
@@ -20928,7 +20189,7 @@
                     <a:lstStyle/>
                     <a:p>
                       <a:r>
-                        <a:rPr sz="1400">
+                        <a:rPr sz="1600">
                           <a:solidFill>
                             <a:srgbClr val="1F1F2E"/>
                           </a:solidFill>
@@ -20949,14 +20210,14 @@
                   </a:ext>
                 </a:extLst>
               </a:tr>
-              <a:tr h="563500">
+              <a:tr h="636857">
                 <a:tc>
                   <a:txBody>
                     <a:bodyPr/>
                     <a:lstStyle/>
                     <a:p>
                       <a:r>
-                        <a:rPr sz="1400">
+                        <a:rPr sz="1600">
                           <a:solidFill>
                             <a:srgbClr val="1F1F2E"/>
                           </a:solidFill>
@@ -20977,7 +20238,7 @@
                     <a:lstStyle/>
                     <a:p>
                       <a:r>
-                        <a:rPr sz="1400">
+                        <a:rPr sz="1600">
                           <a:solidFill>
                             <a:srgbClr val="1F1F2E"/>
                           </a:solidFill>
@@ -20998,7 +20259,7 @@
                     <a:lstStyle/>
                     <a:p>
                       <a:r>
-                        <a:rPr sz="1400">
+                        <a:rPr sz="1600">
                           <a:solidFill>
                             <a:srgbClr val="1F1F2E"/>
                           </a:solidFill>
@@ -21019,7 +20280,7 @@
                     <a:lstStyle/>
                     <a:p>
                       <a:r>
-                        <a:rPr sz="1400">
+                        <a:rPr sz="1600">
                           <a:solidFill>
                             <a:srgbClr val="1F1F2E"/>
                           </a:solidFill>
@@ -21040,7 +20301,7 @@
                     <a:lstStyle/>
                     <a:p>
                       <a:r>
-                        <a:rPr sz="1400">
+                        <a:rPr sz="1600">
                           <a:solidFill>
                             <a:srgbClr val="1F1F2E"/>
                           </a:solidFill>
@@ -21061,7 +20322,7 @@
                     <a:lstStyle/>
                     <a:p>
                       <a:r>
-                        <a:rPr sz="1400">
+                        <a:rPr sz="1600">
                           <a:solidFill>
                             <a:srgbClr val="1F1F2E"/>
                           </a:solidFill>
@@ -21082,14 +20343,14 @@
                   </a:ext>
                 </a:extLst>
               </a:tr>
-              <a:tr h="563500">
+              <a:tr h="636858">
                 <a:tc>
                   <a:txBody>
                     <a:bodyPr/>
                     <a:lstStyle/>
                     <a:p>
                       <a:r>
-                        <a:rPr sz="1400">
+                        <a:rPr sz="1600">
                           <a:solidFill>
                             <a:srgbClr val="1F1F2E"/>
                           </a:solidFill>
@@ -21110,7 +20371,7 @@
                     <a:lstStyle/>
                     <a:p>
                       <a:r>
-                        <a:rPr sz="1400">
+                        <a:rPr sz="1600">
                           <a:solidFill>
                             <a:srgbClr val="1F1F2E"/>
                           </a:solidFill>
@@ -21131,7 +20392,7 @@
                     <a:lstStyle/>
                     <a:p>
                       <a:r>
-                        <a:rPr sz="1400">
+                        <a:rPr sz="1600">
                           <a:solidFill>
                             <a:srgbClr val="1F1F2E"/>
                           </a:solidFill>
@@ -21152,7 +20413,7 @@
                     <a:lstStyle/>
                     <a:p>
                       <a:r>
-                        <a:rPr sz="1400">
+                        <a:rPr sz="1600">
                           <a:solidFill>
                             <a:srgbClr val="1F1F2E"/>
                           </a:solidFill>
@@ -21173,7 +20434,7 @@
                     <a:lstStyle/>
                     <a:p>
                       <a:r>
-                        <a:rPr sz="1400">
+                        <a:rPr sz="1600">
                           <a:solidFill>
                             <a:srgbClr val="1F1F2E"/>
                           </a:solidFill>
@@ -21194,7 +20455,7 @@
                     <a:lstStyle/>
                     <a:p>
                       <a:r>
-                        <a:rPr sz="1400">
+                        <a:rPr sz="1600" dirty="0">
                           <a:solidFill>
                             <a:srgbClr val="1F1F2E"/>
                           </a:solidFill>
@@ -21215,139 +20476,6 @@
                   </a:ext>
                 </a:extLst>
               </a:tr>
-              <a:tr h="563500">
-                <a:tc>
-                  <a:txBody>
-                    <a:bodyPr/>
-                    <a:lstStyle/>
-                    <a:p>
-                      <a:r>
-                        <a:rPr sz="1400">
-                          <a:solidFill>
-                            <a:srgbClr val="1F1F2E"/>
-                          </a:solidFill>
-                        </a:rPr>
-                        <a:t>SLH-DSA-SHAKE-128f</a:t>
-                      </a:r>
-                    </a:p>
-                  </a:txBody>
-                  <a:tcPr>
-                    <a:solidFill>
-                      <a:srgbClr val="FFFFFF"/>
-                    </a:solidFill>
-                  </a:tcPr>
-                </a:tc>
-                <a:tc>
-                  <a:txBody>
-                    <a:bodyPr/>
-                    <a:lstStyle/>
-                    <a:p>
-                      <a:r>
-                        <a:rPr sz="1400">
-                          <a:solidFill>
-                            <a:srgbClr val="1F1F2E"/>
-                          </a:solidFill>
-                        </a:rPr>
-                        <a:t>32</a:t>
-                      </a:r>
-                    </a:p>
-                  </a:txBody>
-                  <a:tcPr>
-                    <a:solidFill>
-                      <a:srgbClr val="FFFFFF"/>
-                    </a:solidFill>
-                  </a:tcPr>
-                </a:tc>
-                <a:tc>
-                  <a:txBody>
-                    <a:bodyPr/>
-                    <a:lstStyle/>
-                    <a:p>
-                      <a:r>
-                        <a:rPr sz="1400">
-                          <a:solidFill>
-                            <a:srgbClr val="1F1F2E"/>
-                          </a:solidFill>
-                        </a:rPr>
-                        <a:t>17 088</a:t>
-                      </a:r>
-                    </a:p>
-                  </a:txBody>
-                  <a:tcPr>
-                    <a:solidFill>
-                      <a:srgbClr val="FFFFFF"/>
-                    </a:solidFill>
-                  </a:tcPr>
-                </a:tc>
-                <a:tc>
-                  <a:txBody>
-                    <a:bodyPr/>
-                    <a:lstStyle/>
-                    <a:p>
-                      <a:r>
-                        <a:rPr sz="1400">
-                          <a:solidFill>
-                            <a:srgbClr val="1F1F2E"/>
-                          </a:solidFill>
-                        </a:rPr>
-                        <a:t>~390 M cycles</a:t>
-                      </a:r>
-                    </a:p>
-                  </a:txBody>
-                  <a:tcPr>
-                    <a:solidFill>
-                      <a:srgbClr val="FFFFFF"/>
-                    </a:solidFill>
-                  </a:tcPr>
-                </a:tc>
-                <a:tc>
-                  <a:txBody>
-                    <a:bodyPr/>
-                    <a:lstStyle/>
-                    <a:p>
-                      <a:r>
-                        <a:rPr sz="1400">
-                          <a:solidFill>
-                            <a:srgbClr val="1F1F2E"/>
-                          </a:solidFill>
-                        </a:rPr>
-                        <a:t>~22 M cycles</a:t>
-                      </a:r>
-                    </a:p>
-                  </a:txBody>
-                  <a:tcPr>
-                    <a:solidFill>
-                      <a:srgbClr val="FFFFFF"/>
-                    </a:solidFill>
-                  </a:tcPr>
-                </a:tc>
-                <a:tc>
-                  <a:txBody>
-                    <a:bodyPr/>
-                    <a:lstStyle/>
-                    <a:p>
-                      <a:r>
-                        <a:rPr sz="1400">
-                          <a:solidFill>
-                            <a:srgbClr val="1F1F2E"/>
-                          </a:solidFill>
-                        </a:rPr>
-                        <a:t>Level 1</a:t>
-                      </a:r>
-                    </a:p>
-                  </a:txBody>
-                  <a:tcPr>
-                    <a:solidFill>
-                      <a:srgbClr val="FFFFFF"/>
-                    </a:solidFill>
-                  </a:tcPr>
-                </a:tc>
-                <a:extLst>
-                  <a:ext uri="{0D108BD9-81ED-4DB2-BD59-A6C34878D82A}">
-                    <a16:rowId xmlns:a16="http://schemas.microsoft.com/office/drawing/2014/main" val="10007"/>
-                  </a:ext>
-                </a:extLst>
-              </a:tr>
             </a:tbl>
           </a:graphicData>
         </a:graphic>
@@ -21360,7 +20488,7 @@
         </p:nvSpPr>
         <p:spPr>
           <a:xfrm>
-            <a:off x="500000" y="5808000"/>
+            <a:off x="500000" y="5585579"/>
             <a:ext cx="11192000" cy="500000"/>
           </a:xfrm>
           <a:prstGeom prst="rect">
@@ -21373,13 +20501,75 @@
           <a:lstStyle/>
           <a:p>
             <a:r>
-              <a:rPr sz="1600" i="1">
+              <a:rPr sz="1800" i="1" dirty="0">
                 <a:solidFill>
                   <a:srgbClr val="555566"/>
                 </a:solidFill>
               </a:rPr>
-              <a:t>12 варіантів: {SHA-2, SHAKE} × {128, 192, 256-біт} × {small, fast}. Default: SLH-DSA-SHA2-128s.</a:t>
-            </a:r>
+              <a:t>12 </a:t>
+            </a:r>
+            <a:r>
+              <a:rPr sz="1800" i="1" dirty="0" err="1">
+                <a:solidFill>
+                  <a:srgbClr val="555566"/>
+                </a:solidFill>
+              </a:rPr>
+              <a:t>варіантів</a:t>
+            </a:r>
+            <a:r>
+              <a:rPr sz="1800" i="1" dirty="0">
+                <a:solidFill>
+                  <a:srgbClr val="555566"/>
+                </a:solidFill>
+              </a:rPr>
+              <a:t>: {SHA-2, SHAKE} × {128, 192, 256-біт} × {small, fast}. Default: SLH-DSA-SHA2-128s.</a:t>
+            </a:r>
+          </a:p>
+        </p:txBody>
+      </p:sp>
+      <p:sp>
+        <p:nvSpPr>
+          <p:cNvPr id="2" name="TextBox 1">
+            <a:extLst>
+              <a:ext uri="{FF2B5EF4-FFF2-40B4-BE49-F238E27FC236}">
+                <a16:creationId xmlns:a16="http://schemas.microsoft.com/office/drawing/2014/main" id="{65096979-3FB2-922C-225A-AB5730E70AAB}"/>
+              </a:ext>
+            </a:extLst>
+          </p:cNvPr>
+          <p:cNvSpPr txBox="1"/>
+          <p:nvPr/>
+        </p:nvSpPr>
+        <p:spPr>
+          <a:xfrm>
+            <a:off x="3813803" y="492620"/>
+            <a:ext cx="4564391" cy="707886"/>
+          </a:xfrm>
+          <a:prstGeom prst="rect">
+            <a:avLst/>
+          </a:prstGeom>
+          <a:noFill/>
+        </p:spPr>
+        <p:txBody>
+          <a:bodyPr wrap="none" rtlCol="0">
+            <a:spAutoFit/>
+          </a:bodyPr>
+          <a:lstStyle/>
+          <a:p>
+            <a:r>
+              <a:rPr lang="en-US" sz="2000" dirty="0"/>
+              <a:t>SPHINCS+ / SLH-DSA: </a:t>
+            </a:r>
+            <a:r>
+              <a:rPr lang="en-US" sz="2000" dirty="0" err="1"/>
+              <a:t>параметри</a:t>
+            </a:r>
+            <a:r>
+              <a:rPr lang="en-US" sz="2000" dirty="0"/>
+              <a:t> FIPS 205</a:t>
+            </a:r>
+          </a:p>
+          <a:p>
+            <a:endParaRPr lang="en-UA" sz="2000" dirty="0"/>
           </a:p>
         </p:txBody>
       </p:sp>
@@ -21391,7 +20581,7 @@
 </p:sld>
 </file>
 
-<file path=ppt/slides/slide26.xml><?xml version="1.0" encoding="utf-8"?>
+<file path=ppt/slides/slide25.xml><?xml version="1.0" encoding="utf-8"?>
 <p:sld xmlns:a="http://schemas.openxmlformats.org/drawingml/2006/main" xmlns:r="http://schemas.openxmlformats.org/officeDocument/2006/relationships" xmlns:p="http://schemas.openxmlformats.org/presentationml/2006/main">
   <p:cSld>
     <p:spTree>
@@ -21420,7 +20610,7 @@
         </p:nvSpPr>
         <p:spPr>
           <a:xfrm>
-            <a:off x="-10000000" y="-10000000"/>
+            <a:off x="-10000000" y="-10469560"/>
             <a:ext cx="100" cy="100"/>
           </a:xfrm>
         </p:spPr>
@@ -21436,42 +20626,13 @@
       </p:sp>
       <p:sp>
         <p:nvSpPr>
-          <p:cNvPr id="730" name="Заголовок 1">
-            <a:extLst>
-              <a:ext uri="{FF2B5EF4-FFF2-40B4-BE49-F238E27FC236}">
-                <a16:creationId xmlns:a16="http://schemas.microsoft.com/office/drawing/2014/main" id="{1B6E16CF-568A-DB52-A3EB-6D4FADCDD95D}"/>
-              </a:ext>
-            </a:extLst>
-          </p:cNvPr>
-          <p:cNvSpPr>
-            <a:spLocks noGrp="1"/>
-          </p:cNvSpPr>
-          <p:nvPr/>
-        </p:nvSpPr>
-        <p:spPr/>
-        <p:txBody>
-          <a:bodyPr/>
-          <a:lstStyle/>
-          <a:p>
-            <a:r>
-              <a:rPr lang="en-US" sz="3200" dirty="0"/>
-              <a:t>NIST PQC підписи: SLH-DSA vs ML-DSA vs FN-DSA</a:t>
-            </a:r>
-          </a:p>
-          <a:p>
-            <a:endParaRPr lang="uk-UA" dirty="0"/>
-          </a:p>
-        </p:txBody>
-      </p:sp>
-      <p:sp>
-        <p:nvSpPr>
           <p:cNvPr id="731" name="Rounded Rectangle 730"/>
           <p:cNvSpPr/>
           <p:nvPr/>
         </p:nvSpPr>
         <p:spPr>
           <a:xfrm>
-            <a:off x="700000" y="1250000"/>
+            <a:off x="700000" y="1015223"/>
             <a:ext cx="5246000" cy="750000"/>
           </a:xfrm>
           <a:prstGeom prst="roundRect">
@@ -21506,7 +20667,7 @@
           <a:p>
             <a:pPr algn="ctr"/>
             <a:r>
-              <a:rPr sz="2200" b="1">
+              <a:rPr sz="2400" b="1">
                 <a:solidFill>
                   <a:srgbClr val="FFFFFF"/>
                 </a:solidFill>
@@ -21524,7 +20685,7 @@
         </p:nvSpPr>
         <p:spPr>
           <a:xfrm>
-            <a:off x="700000" y="2100000"/>
+            <a:off x="700000" y="1865223"/>
             <a:ext cx="5246000" cy="4050000"/>
           </a:xfrm>
           <a:prstGeom prst="rect">
@@ -21563,7 +20724,7 @@
               </a:spcAft>
             </a:pPr>
             <a:r>
-              <a:rPr sz="1800">
+              <a:rPr sz="2000">
                 <a:solidFill>
                   <a:srgbClr val="222233"/>
                 </a:solidFill>
@@ -21578,12 +20739,12 @@
               </a:spcAft>
             </a:pPr>
             <a:r>
-              <a:rPr sz="1800">
+              <a:rPr sz="2000">
                 <a:solidFill>
                   <a:srgbClr val="222233"/>
                 </a:solidFill>
               </a:rPr>
-              <a:t>•  PK = 32 Б, σ = 7–50 КБ</a:t>
+              <a:t>•  PK = 32 Б, σ = 7-50 КБ</a:t>
             </a:r>
           </a:p>
           <a:p>
@@ -21593,7 +20754,7 @@
               </a:spcAft>
             </a:pPr>
             <a:r>
-              <a:rPr sz="1800">
+              <a:rPr sz="2000">
                 <a:solidFill>
                   <a:srgbClr val="222233"/>
                 </a:solidFill>
@@ -21608,12 +20769,12 @@
               </a:spcAft>
             </a:pPr>
             <a:r>
-              <a:rPr sz="1800">
+              <a:rPr sz="2000">
                 <a:solidFill>
                   <a:srgbClr val="222233"/>
                 </a:solidFill>
               </a:rPr>
-              <a:t>•  Повільний sign (small), помірний (fast)</a:t>
+              <a:t>•  Повільний sign (small)</a:t>
             </a:r>
           </a:p>
           <a:p>
@@ -21623,7 +20784,7 @@
               </a:spcAft>
             </a:pPr>
             <a:r>
-              <a:rPr sz="1800">
+              <a:rPr sz="2000">
                 <a:solidFill>
                   <a:srgbClr val="222233"/>
                 </a:solidFill>
@@ -21638,7 +20799,7 @@
               </a:spcAft>
             </a:pPr>
             <a:r>
-              <a:rPr sz="1800">
+              <a:rPr sz="2000">
                 <a:solidFill>
                   <a:srgbClr val="222233"/>
                 </a:solidFill>
@@ -21656,7 +20817,7 @@
         </p:nvSpPr>
         <p:spPr>
           <a:xfrm>
-            <a:off x="6246000" y="1250000"/>
+            <a:off x="6246000" y="1015223"/>
             <a:ext cx="5246000" cy="750000"/>
           </a:xfrm>
           <a:prstGeom prst="roundRect">
@@ -21691,7 +20852,7 @@
           <a:p>
             <a:pPr algn="ctr"/>
             <a:r>
-              <a:rPr sz="2200" b="1">
+              <a:rPr sz="2400" b="1">
                 <a:solidFill>
                   <a:srgbClr val="FFFFFF"/>
                 </a:solidFill>
@@ -21709,7 +20870,7 @@
         </p:nvSpPr>
         <p:spPr>
           <a:xfrm>
-            <a:off x="6246000" y="2100000"/>
+            <a:off x="6246000" y="1865223"/>
             <a:ext cx="5246000" cy="4050000"/>
           </a:xfrm>
           <a:prstGeom prst="rect">
@@ -21748,7 +20909,7 @@
               </a:spcAft>
             </a:pPr>
             <a:r>
-              <a:rPr sz="1800">
+              <a:rPr sz="2000">
                 <a:solidFill>
                   <a:srgbClr val="222233"/>
                 </a:solidFill>
@@ -21763,12 +20924,12 @@
               </a:spcAft>
             </a:pPr>
             <a:r>
-              <a:rPr sz="1800">
+              <a:rPr sz="2000">
                 <a:solidFill>
                   <a:srgbClr val="222233"/>
                 </a:solidFill>
               </a:rPr>
-              <a:t>•  PK = 0.9–1.3 КБ, σ = 0.7–2.5 КБ</a:t>
+              <a:t>•  PK = 0.9-1.3 КБ, σ = 0.7-2.5 КБ</a:t>
             </a:r>
           </a:p>
           <a:p>
@@ -21778,7 +20939,7 @@
               </a:spcAft>
             </a:pPr>
             <a:r>
-              <a:rPr sz="1800">
+              <a:rPr sz="2000">
                 <a:solidFill>
                   <a:srgbClr val="222233"/>
                 </a:solidFill>
@@ -21793,7 +20954,7 @@
               </a:spcAft>
             </a:pPr>
             <a:r>
-              <a:rPr sz="1800">
+              <a:rPr sz="2000">
                 <a:solidFill>
                   <a:srgbClr val="222233"/>
                 </a:solidFill>
@@ -21808,7 +20969,7 @@
               </a:spcAft>
             </a:pPr>
             <a:r>
-              <a:rPr sz="1800">
+              <a:rPr sz="2000">
                 <a:solidFill>
                   <a:srgbClr val="222233"/>
                 </a:solidFill>
@@ -21823,7 +20984,7 @@
               </a:spcAft>
             </a:pPr>
             <a:r>
-              <a:rPr sz="1800">
+              <a:rPr sz="2000">
                 <a:solidFill>
                   <a:srgbClr val="222233"/>
                 </a:solidFill>
@@ -21841,7 +21002,7 @@
         </p:nvSpPr>
         <p:spPr>
           <a:xfrm>
-            <a:off x="700000" y="6330000"/>
+            <a:off x="700000" y="6082866"/>
             <a:ext cx="10792000" cy="500000"/>
           </a:xfrm>
           <a:prstGeom prst="rect">
@@ -21855,12 +21016,116 @@
           <a:p>
             <a:pPr algn="ctr"/>
             <a:r>
-              <a:rPr sz="1600" b="1">
+              <a:rPr sz="1800" b="1" dirty="0">
                 <a:solidFill>
                   <a:srgbClr val="445577"/>
                 </a:solidFill>
               </a:rPr>
-              <a:t>SLH-DSA — консервативний резерв; ML-DSA — повсякденне використання</a:t>
+              <a:t>SLH-DSA - </a:t>
+            </a:r>
+            <a:r>
+              <a:rPr sz="1800" b="1" dirty="0" err="1">
+                <a:solidFill>
+                  <a:srgbClr val="445577"/>
+                </a:solidFill>
+              </a:rPr>
+              <a:t>консервативний</a:t>
+            </a:r>
+            <a:r>
+              <a:rPr sz="1800" b="1" dirty="0">
+                <a:solidFill>
+                  <a:srgbClr val="445577"/>
+                </a:solidFill>
+              </a:rPr>
+              <a:t> </a:t>
+            </a:r>
+            <a:r>
+              <a:rPr sz="1800" b="1" dirty="0" err="1">
+                <a:solidFill>
+                  <a:srgbClr val="445577"/>
+                </a:solidFill>
+              </a:rPr>
+              <a:t>резерв</a:t>
+            </a:r>
+            <a:r>
+              <a:rPr sz="1800" b="1" dirty="0">
+                <a:solidFill>
+                  <a:srgbClr val="445577"/>
+                </a:solidFill>
+              </a:rPr>
+              <a:t>; ML-DSA - </a:t>
+            </a:r>
+            <a:r>
+              <a:rPr sz="1800" b="1" dirty="0" err="1">
+                <a:solidFill>
+                  <a:srgbClr val="445577"/>
+                </a:solidFill>
+              </a:rPr>
+              <a:t>повсякденне</a:t>
+            </a:r>
+            <a:r>
+              <a:rPr sz="1800" b="1" dirty="0">
+                <a:solidFill>
+                  <a:srgbClr val="445577"/>
+                </a:solidFill>
+              </a:rPr>
+              <a:t> </a:t>
+            </a:r>
+            <a:r>
+              <a:rPr sz="1800" b="1" dirty="0" err="1">
+                <a:solidFill>
+                  <a:srgbClr val="445577"/>
+                </a:solidFill>
+              </a:rPr>
+              <a:t>використання</a:t>
+            </a:r>
+            <a:endParaRPr sz="1800" b="1" dirty="0">
+              <a:solidFill>
+                <a:srgbClr val="445577"/>
+              </a:solidFill>
+            </a:endParaRPr>
+          </a:p>
+        </p:txBody>
+      </p:sp>
+      <p:sp>
+        <p:nvSpPr>
+          <p:cNvPr id="4" name="TextBox 3">
+            <a:extLst>
+              <a:ext uri="{FF2B5EF4-FFF2-40B4-BE49-F238E27FC236}">
+                <a16:creationId xmlns:a16="http://schemas.microsoft.com/office/drawing/2014/main" id="{8553A2D2-5BF5-7C10-80E7-03C79A4E31A3}"/>
+              </a:ext>
+            </a:extLst>
+          </p:cNvPr>
+          <p:cNvSpPr txBox="1"/>
+          <p:nvPr/>
+        </p:nvSpPr>
+        <p:spPr>
+          <a:xfrm>
+            <a:off x="3544890" y="447470"/>
+            <a:ext cx="5402220" cy="400110"/>
+          </a:xfrm>
+          <a:prstGeom prst="rect">
+            <a:avLst/>
+          </a:prstGeom>
+          <a:noFill/>
+        </p:spPr>
+        <p:txBody>
+          <a:bodyPr wrap="square">
+            <a:spAutoFit/>
+          </a:bodyPr>
+          <a:lstStyle/>
+          <a:p>
+            <a:r>
+              <a:rPr lang="en-US" sz="2000" dirty="0"/>
+              <a:t>NIST PQC </a:t>
+            </a:r>
+            <a:r>
+              <a:rPr lang="en-US" sz="2000" dirty="0" err="1"/>
+              <a:t>підписи</a:t>
+            </a:r>
+            <a:r>
+              <a:rPr lang="en-US" sz="2000" dirty="0"/>
+              <a:t>: SLH-DSA vs ML-DSA vs FN-DSA</a:t>
             </a:r>
           </a:p>
         </p:txBody>
@@ -21873,7 +21138,7 @@
 </p:sld>
 </file>
 
-<file path=ppt/slides/slide27.xml><?xml version="1.0" encoding="utf-8"?>
+<file path=ppt/slides/slide26.xml><?xml version="1.0" encoding="utf-8"?>
 <p:sld xmlns:a="http://schemas.openxmlformats.org/drawingml/2006/main" xmlns:r="http://schemas.openxmlformats.org/officeDocument/2006/relationships" xmlns:p="http://schemas.openxmlformats.org/presentationml/2006/main">
   <p:cSld>
     <p:spTree>
@@ -21902,7 +21167,7 @@
         </p:nvSpPr>
         <p:spPr>
           <a:xfrm>
-            <a:off x="-10000000" y="-10000000"/>
+            <a:off x="-10000000" y="-10383061"/>
             <a:ext cx="100" cy="100"/>
           </a:xfrm>
         </p:spPr>
@@ -21930,16 +21195,15 @@
           </p:cNvSpPr>
           <p:nvPr/>
         </p:nvSpPr>
-        <p:spPr/>
+        <p:spPr>
+          <a:xfrm>
+            <a:off x="0" y="-383061"/>
+            <a:ext cx="0" cy="0"/>
+          </a:xfrm>
+        </p:spPr>
         <p:txBody>
           <a:bodyPr/>
           <a:lstStyle/>
-          <a:p>
-            <a:r>
-              <a:rPr lang="en-US" sz="3200" dirty="0"/>
-              <a:t>Сценарії застосування hash-based підписів</a:t>
-            </a:r>
-          </a:p>
           <a:p>
             <a:endParaRPr lang="uk-UA" dirty="0"/>
           </a:p>
@@ -21951,11 +21215,17 @@
           <p:cNvGraphicFramePr>
             <a:graphicFrameLocks noGrp="1"/>
           </p:cNvGraphicFramePr>
-          <p:nvPr/>
+          <p:nvPr>
+            <p:extLst>
+              <p:ext uri="{D42A27DB-BD31-4B8C-83A1-F6EECF244321}">
+                <p14:modId xmlns:p14="http://schemas.microsoft.com/office/powerpoint/2010/main" val="4055099855"/>
+              </p:ext>
+            </p:extLst>
+          </p:nvPr>
         </p:nvGraphicFramePr>
         <p:xfrm>
-          <a:off x="500000" y="1200000"/>
-          <a:ext cx="11191999" cy="4508000"/>
+          <a:off x="500000" y="866939"/>
+          <a:ext cx="11191999" cy="4458000"/>
         </p:xfrm>
         <a:graphic>
           <a:graphicData uri="http://schemas.openxmlformats.org/drawingml/2006/table">
@@ -21986,14 +21256,14 @@
                   </a:extLst>
                 </a:gridCol>
               </a:tblGrid>
-              <a:tr h="500888">
+              <a:tr h="495333">
                 <a:tc>
                   <a:txBody>
                     <a:bodyPr/>
                     <a:lstStyle/>
                     <a:p>
                       <a:r>
-                        <a:rPr sz="1600" b="1">
+                        <a:rPr sz="1800" b="1">
                           <a:solidFill>
                             <a:srgbClr val="FFFFFF"/>
                           </a:solidFill>
@@ -22014,7 +21284,7 @@
                     <a:lstStyle/>
                     <a:p>
                       <a:r>
-                        <a:rPr sz="1600" b="1">
+                        <a:rPr sz="1800" b="1">
                           <a:solidFill>
                             <a:srgbClr val="FFFFFF"/>
                           </a:solidFill>
@@ -22035,7 +21305,7 @@
                     <a:lstStyle/>
                     <a:p>
                       <a:r>
-                        <a:rPr sz="1600" b="1">
+                        <a:rPr sz="1800" b="1">
                           <a:solidFill>
                             <a:srgbClr val="FFFFFF"/>
                           </a:solidFill>
@@ -22056,14 +21326,14 @@
                   </a:ext>
                 </a:extLst>
               </a:tr>
-              <a:tr h="500888">
+              <a:tr h="495333">
                 <a:tc>
                   <a:txBody>
                     <a:bodyPr/>
                     <a:lstStyle/>
                     <a:p>
                       <a:r>
-                        <a:rPr sz="1400">
+                        <a:rPr sz="1600">
                           <a:solidFill>
                             <a:srgbClr val="1F1F2E"/>
                           </a:solidFill>
@@ -22084,7 +21354,7 @@
                     <a:lstStyle/>
                     <a:p>
                       <a:r>
-                        <a:rPr sz="1400">
+                        <a:rPr sz="1600">
                           <a:solidFill>
                             <a:srgbClr val="1F1F2E"/>
                           </a:solidFill>
@@ -22105,7 +21375,7 @@
                     <a:lstStyle/>
                     <a:p>
                       <a:r>
-                        <a:rPr sz="1400">
+                        <a:rPr sz="1600">
                           <a:solidFill>
                             <a:srgbClr val="1F1F2E"/>
                           </a:solidFill>
@@ -22126,14 +21396,14 @@
                   </a:ext>
                 </a:extLst>
               </a:tr>
-              <a:tr h="500888">
+              <a:tr h="495333">
                 <a:tc>
                   <a:txBody>
                     <a:bodyPr/>
                     <a:lstStyle/>
                     <a:p>
                       <a:r>
-                        <a:rPr sz="1400">
+                        <a:rPr sz="1600">
                           <a:solidFill>
                             <a:srgbClr val="1F1F2E"/>
                           </a:solidFill>
@@ -22154,7 +21424,7 @@
                     <a:lstStyle/>
                     <a:p>
                       <a:r>
-                        <a:rPr sz="1400">
+                        <a:rPr sz="1600">
                           <a:solidFill>
                             <a:srgbClr val="1F1F2E"/>
                           </a:solidFill>
@@ -22175,7 +21445,7 @@
                     <a:lstStyle/>
                     <a:p>
                       <a:r>
-                        <a:rPr sz="1400">
+                        <a:rPr sz="1600">
                           <a:solidFill>
                             <a:srgbClr val="1F1F2E"/>
                           </a:solidFill>
@@ -22196,14 +21466,14 @@
                   </a:ext>
                 </a:extLst>
               </a:tr>
-              <a:tr h="500888">
+              <a:tr h="495333">
                 <a:tc>
                   <a:txBody>
                     <a:bodyPr/>
                     <a:lstStyle/>
                     <a:p>
                       <a:r>
-                        <a:rPr sz="1400">
+                        <a:rPr sz="1600">
                           <a:solidFill>
                             <a:srgbClr val="1F1F2E"/>
                           </a:solidFill>
@@ -22224,7 +21494,7 @@
                     <a:lstStyle/>
                     <a:p>
                       <a:r>
-                        <a:rPr sz="1400">
+                        <a:rPr sz="1600">
                           <a:solidFill>
                             <a:srgbClr val="1F1F2E"/>
                           </a:solidFill>
@@ -22245,7 +21515,7 @@
                     <a:lstStyle/>
                     <a:p>
                       <a:r>
-                        <a:rPr sz="1400">
+                        <a:rPr sz="1600">
                           <a:solidFill>
                             <a:srgbClr val="1F1F2E"/>
                           </a:solidFill>
@@ -22266,14 +21536,14 @@
                   </a:ext>
                 </a:extLst>
               </a:tr>
-              <a:tr h="500888">
+              <a:tr h="495333">
                 <a:tc>
                   <a:txBody>
                     <a:bodyPr/>
                     <a:lstStyle/>
                     <a:p>
                       <a:r>
-                        <a:rPr sz="1400">
+                        <a:rPr sz="1600">
                           <a:solidFill>
                             <a:srgbClr val="1F1F2E"/>
                           </a:solidFill>
@@ -22294,7 +21564,7 @@
                     <a:lstStyle/>
                     <a:p>
                       <a:r>
-                        <a:rPr sz="1400">
+                        <a:rPr sz="1600">
                           <a:solidFill>
                             <a:srgbClr val="1F1F2E"/>
                           </a:solidFill>
@@ -22315,7 +21585,7 @@
                     <a:lstStyle/>
                     <a:p>
                       <a:r>
-                        <a:rPr sz="1400">
+                        <a:rPr sz="1600">
                           <a:solidFill>
                             <a:srgbClr val="1F1F2E"/>
                           </a:solidFill>
@@ -22336,14 +21606,14 @@
                   </a:ext>
                 </a:extLst>
               </a:tr>
-              <a:tr h="500888">
+              <a:tr h="495333">
                 <a:tc>
                   <a:txBody>
                     <a:bodyPr/>
                     <a:lstStyle/>
                     <a:p>
                       <a:r>
-                        <a:rPr sz="1400">
+                        <a:rPr sz="1600">
                           <a:solidFill>
                             <a:srgbClr val="1F1F2E"/>
                           </a:solidFill>
@@ -22364,7 +21634,7 @@
                     <a:lstStyle/>
                     <a:p>
                       <a:r>
-                        <a:rPr sz="1400">
+                        <a:rPr sz="1600">
                           <a:solidFill>
                             <a:srgbClr val="1F1F2E"/>
                           </a:solidFill>
@@ -22385,7 +21655,7 @@
                     <a:lstStyle/>
                     <a:p>
                       <a:r>
-                        <a:rPr sz="1400">
+                        <a:rPr sz="1600">
                           <a:solidFill>
                             <a:srgbClr val="1F1F2E"/>
                           </a:solidFill>
@@ -22406,14 +21676,14 @@
                   </a:ext>
                 </a:extLst>
               </a:tr>
-              <a:tr h="500888">
+              <a:tr h="495333">
                 <a:tc>
                   <a:txBody>
                     <a:bodyPr/>
                     <a:lstStyle/>
                     <a:p>
                       <a:r>
-                        <a:rPr sz="1400">
+                        <a:rPr sz="1600">
                           <a:solidFill>
                             <a:srgbClr val="1F1F2E"/>
                           </a:solidFill>
@@ -22434,7 +21704,7 @@
                     <a:lstStyle/>
                     <a:p>
                       <a:r>
-                        <a:rPr sz="1400">
+                        <a:rPr sz="1600">
                           <a:solidFill>
                             <a:srgbClr val="1F1F2E"/>
                           </a:solidFill>
@@ -22455,7 +21725,7 @@
                     <a:lstStyle/>
                     <a:p>
                       <a:r>
-                        <a:rPr sz="1400">
+                        <a:rPr sz="1600">
                           <a:solidFill>
                             <a:srgbClr val="1F1F2E"/>
                           </a:solidFill>
@@ -22476,14 +21746,14 @@
                   </a:ext>
                 </a:extLst>
               </a:tr>
-              <a:tr h="500888">
+              <a:tr h="495333">
                 <a:tc>
                   <a:txBody>
                     <a:bodyPr/>
                     <a:lstStyle/>
                     <a:p>
                       <a:r>
-                        <a:rPr sz="1400">
+                        <a:rPr sz="1600">
                           <a:solidFill>
                             <a:srgbClr val="1F1F2E"/>
                           </a:solidFill>
@@ -22504,7 +21774,7 @@
                     <a:lstStyle/>
                     <a:p>
                       <a:r>
-                        <a:rPr sz="1400">
+                        <a:rPr sz="1600">
                           <a:solidFill>
                             <a:srgbClr val="1F1F2E"/>
                           </a:solidFill>
@@ -22525,7 +21795,7 @@
                     <a:lstStyle/>
                     <a:p>
                       <a:r>
-                        <a:rPr sz="1400">
+                        <a:rPr sz="1600">
                           <a:solidFill>
                             <a:srgbClr val="1F1F2E"/>
                           </a:solidFill>
@@ -22546,14 +21816,14 @@
                   </a:ext>
                 </a:extLst>
               </a:tr>
-              <a:tr h="500896">
+              <a:tr h="495336">
                 <a:tc>
                   <a:txBody>
                     <a:bodyPr/>
                     <a:lstStyle/>
                     <a:p>
                       <a:r>
-                        <a:rPr sz="1400">
+                        <a:rPr sz="1600">
                           <a:solidFill>
                             <a:srgbClr val="1F1F2E"/>
                           </a:solidFill>
@@ -22574,7 +21844,7 @@
                     <a:lstStyle/>
                     <a:p>
                       <a:r>
-                        <a:rPr sz="1400">
+                        <a:rPr sz="1600">
                           <a:solidFill>
                             <a:srgbClr val="1F1F2E"/>
                           </a:solidFill>
@@ -22595,7 +21865,7 @@
                     <a:lstStyle/>
                     <a:p>
                       <a:r>
-                        <a:rPr sz="1400">
+                        <a:rPr sz="1600">
                           <a:solidFill>
                             <a:srgbClr val="1F1F2E"/>
                           </a:solidFill>
@@ -22628,7 +21898,7 @@
         </p:nvSpPr>
         <p:spPr>
           <a:xfrm>
-            <a:off x="500000" y="5808000"/>
+            <a:off x="500000" y="5424939"/>
             <a:ext cx="11192000" cy="500000"/>
           </a:xfrm>
           <a:prstGeom prst="rect">
@@ -22641,13 +21911,65 @@
           <a:lstStyle/>
           <a:p>
             <a:r>
-              <a:rPr sz="1600" i="1">
+              <a:rPr sz="1800" i="1">
                 <a:solidFill>
                   <a:srgbClr val="555566"/>
                 </a:solidFill>
               </a:rPr>
               <a:t>Cloudflare, Microsoft, Apple, Linux Kernel вже інтегрують hash-based схеми у production</a:t>
             </a:r>
+          </a:p>
+        </p:txBody>
+      </p:sp>
+      <p:sp>
+        <p:nvSpPr>
+          <p:cNvPr id="3" name="TextBox 2">
+            <a:extLst>
+              <a:ext uri="{FF2B5EF4-FFF2-40B4-BE49-F238E27FC236}">
+                <a16:creationId xmlns:a16="http://schemas.microsoft.com/office/drawing/2014/main" id="{57B90DC1-A42E-55D9-C577-589463DC0F99}"/>
+              </a:ext>
+            </a:extLst>
+          </p:cNvPr>
+          <p:cNvSpPr txBox="1"/>
+          <p:nvPr/>
+        </p:nvSpPr>
+        <p:spPr>
+          <a:xfrm>
+            <a:off x="3670727" y="366829"/>
+            <a:ext cx="4850543" cy="400110"/>
+          </a:xfrm>
+          <a:prstGeom prst="rect">
+            <a:avLst/>
+          </a:prstGeom>
+          <a:noFill/>
+        </p:spPr>
+        <p:txBody>
+          <a:bodyPr wrap="square">
+            <a:spAutoFit/>
+          </a:bodyPr>
+          <a:lstStyle/>
+          <a:p>
+            <a:r>
+              <a:rPr lang="en-US" sz="2000" dirty="0" err="1"/>
+              <a:t>Сценарії</a:t>
+            </a:r>
+            <a:r>
+              <a:rPr lang="en-US" sz="2000" dirty="0"/>
+              <a:t> </a:t>
+            </a:r>
+            <a:r>
+              <a:rPr lang="en-US" sz="2000" dirty="0" err="1"/>
+              <a:t>застосування</a:t>
+            </a:r>
+            <a:r>
+              <a:rPr lang="en-US" sz="2000" dirty="0"/>
+              <a:t> hash-based </a:t>
+            </a:r>
+            <a:r>
+              <a:rPr lang="en-US" sz="2000" dirty="0" err="1"/>
+              <a:t>підписів</a:t>
+            </a:r>
+            <a:endParaRPr lang="en-US" sz="2000" dirty="0"/>
           </a:p>
         </p:txBody>
       </p:sp>
@@ -22659,7 +21981,7 @@
 </p:sld>
 </file>
 
-<file path=ppt/slides/slide28.xml><?xml version="1.0" encoding="utf-8"?>
+<file path=ppt/slides/slide27.xml><?xml version="1.0" encoding="utf-8"?>
 <p:sld xmlns:a="http://schemas.openxmlformats.org/drawingml/2006/main" xmlns:r="http://schemas.openxmlformats.org/officeDocument/2006/relationships" xmlns:p="http://schemas.openxmlformats.org/presentationml/2006/main">
   <p:cSld>
     <p:spTree>
@@ -22688,7 +22010,7 @@
         </p:nvSpPr>
         <p:spPr>
           <a:xfrm>
-            <a:off x="-10000000" y="-10000000"/>
+            <a:off x="-10000000" y="-10333633"/>
             <a:ext cx="100" cy="100"/>
           </a:xfrm>
         </p:spPr>
@@ -22716,16 +22038,15 @@
           </p:cNvSpPr>
           <p:nvPr/>
         </p:nvSpPr>
-        <p:spPr/>
+        <p:spPr>
+          <a:xfrm>
+            <a:off x="0" y="-333633"/>
+            <a:ext cx="0" cy="0"/>
+          </a:xfrm>
+        </p:spPr>
         <p:txBody>
           <a:bodyPr/>
           <a:lstStyle/>
-          <a:p>
-            <a:r>
-              <a:rPr lang="en-US" sz="3200" dirty="0"/>
-              <a:t>Підсумки лекції 7</a:t>
-            </a:r>
-          </a:p>
           <a:p>
             <a:endParaRPr lang="uk-UA" dirty="0"/>
           </a:p>
@@ -22739,7 +22060,7 @@
         </p:nvSpPr>
         <p:spPr>
           <a:xfrm>
-            <a:off x="700000" y="1250000"/>
+            <a:off x="700000" y="916367"/>
             <a:ext cx="5246000" cy="750000"/>
           </a:xfrm>
           <a:prstGeom prst="roundRect">
@@ -22774,7 +22095,7 @@
           <a:p>
             <a:pPr algn="ctr"/>
             <a:r>
-              <a:rPr sz="2200" b="1">
+              <a:rPr sz="2400" b="1">
                 <a:solidFill>
                   <a:srgbClr val="FFFFFF"/>
                 </a:solidFill>
@@ -22792,7 +22113,7 @@
         </p:nvSpPr>
         <p:spPr>
           <a:xfrm>
-            <a:off x="700000" y="2100000"/>
+            <a:off x="700000" y="1766367"/>
             <a:ext cx="5246000" cy="4050000"/>
           </a:xfrm>
           <a:prstGeom prst="rect">
@@ -22831,12 +22152,12 @@
               </a:spcAft>
             </a:pPr>
             <a:r>
-              <a:rPr sz="1800">
+              <a:rPr sz="2000">
                 <a:solidFill>
                   <a:srgbClr val="222233"/>
                 </a:solidFill>
               </a:rPr>
-              <a:t>•  Lamport OTS — перший hash-based підпис (1979)</a:t>
+              <a:t>•  Lamport OTS - перший hash-based підпис (1979)</a:t>
             </a:r>
           </a:p>
           <a:p>
@@ -22846,12 +22167,12 @@
               </a:spcAft>
             </a:pPr>
             <a:r>
-              <a:rPr sz="1800">
+              <a:rPr sz="2000">
                 <a:solidFill>
                   <a:srgbClr val="222233"/>
                 </a:solidFill>
               </a:rPr>
-              <a:t>•  WOTS+ — компактний OTS з ланцюгом хешів</a:t>
+              <a:t>•  WOTS+ - компактний OTS з ланцюгом хешів</a:t>
             </a:r>
           </a:p>
           <a:p>
@@ -22861,12 +22182,12 @@
               </a:spcAft>
             </a:pPr>
             <a:r>
-              <a:rPr sz="1800">
+              <a:rPr sz="2000">
                 <a:solidFill>
                   <a:srgbClr val="222233"/>
                 </a:solidFill>
               </a:rPr>
-              <a:t>•  Дерево Меркла — багато OTS під одним PK</a:t>
+              <a:t>•  Дерево Меркла - багато OTS під одним PK</a:t>
             </a:r>
           </a:p>
           <a:p>
@@ -22876,12 +22197,12 @@
               </a:spcAft>
             </a:pPr>
             <a:r>
-              <a:rPr sz="1800">
+              <a:rPr sz="2000">
                 <a:solidFill>
                   <a:srgbClr val="222233"/>
                 </a:solidFill>
               </a:rPr>
-              <a:t>•  XMSS / LMS — stateful, RFC 8391 / 8554</a:t>
+              <a:t>•  XMSS / LMS - stateful, RFC 8391 / 8554</a:t>
             </a:r>
           </a:p>
           <a:p>
@@ -22891,12 +22212,12 @@
               </a:spcAft>
             </a:pPr>
             <a:r>
-              <a:rPr sz="1800">
+              <a:rPr sz="2000">
                 <a:solidFill>
                   <a:srgbClr val="222233"/>
                 </a:solidFill>
               </a:rPr>
-              <a:t>•  SPHINCS+ — stateless, гіпердерево + FORS</a:t>
+              <a:t>•  SPHINCS+ - stateless, гіпердерево + FORS</a:t>
             </a:r>
           </a:p>
           <a:p>
@@ -22906,12 +22227,12 @@
               </a:spcAft>
             </a:pPr>
             <a:r>
-              <a:rPr sz="1800">
+              <a:rPr sz="2000">
                 <a:solidFill>
                   <a:srgbClr val="222233"/>
                 </a:solidFill>
               </a:rPr>
-              <a:t>•  SLH-DSA — стандарт NIST FIPS 205 (2024)</a:t>
+              <a:t>•  SLH-DSA - стандарт NIST FIPS 205 (2024)</a:t>
             </a:r>
           </a:p>
         </p:txBody>
@@ -22924,7 +22245,7 @@
         </p:nvSpPr>
         <p:spPr>
           <a:xfrm>
-            <a:off x="6246000" y="1250000"/>
+            <a:off x="6246000" y="916367"/>
             <a:ext cx="5246000" cy="750000"/>
           </a:xfrm>
           <a:prstGeom prst="roundRect">
@@ -22959,7 +22280,7 @@
           <a:p>
             <a:pPr algn="ctr"/>
             <a:r>
-              <a:rPr sz="2200" b="1">
+              <a:rPr sz="2400" b="1">
                 <a:solidFill>
                   <a:srgbClr val="FFFFFF"/>
                 </a:solidFill>
@@ -22977,7 +22298,7 @@
         </p:nvSpPr>
         <p:spPr>
           <a:xfrm>
-            <a:off x="6246000" y="2100000"/>
+            <a:off x="6246000" y="1766367"/>
             <a:ext cx="5246000" cy="4050000"/>
           </a:xfrm>
           <a:prstGeom prst="rect">
@@ -23016,12 +22337,12 @@
               </a:spcAft>
             </a:pPr>
             <a:r>
-              <a:rPr sz="1800">
+              <a:rPr sz="2000">
                 <a:solidFill>
                   <a:srgbClr val="222233"/>
                 </a:solidFill>
               </a:rPr>
-              <a:t>•  Безпека лише на хеш-функції — мінімум припущень</a:t>
+              <a:t>•  Безпека лише на хеш-функції</a:t>
             </a:r>
           </a:p>
           <a:p>
@@ -23031,12 +22352,12 @@
               </a:spcAft>
             </a:pPr>
             <a:r>
-              <a:rPr sz="1800">
+              <a:rPr sz="2000">
                 <a:solidFill>
                   <a:srgbClr val="222233"/>
                 </a:solidFill>
               </a:rPr>
-              <a:t>•  σ великий (8–50 КБ), PK дуже малий (32–64 Б)</a:t>
+              <a:t>•  σ великий (8-50 КБ), PK дуже малий (32-64 Б)</a:t>
             </a:r>
           </a:p>
           <a:p>
@@ -23046,12 +22367,12 @@
               </a:spcAft>
             </a:pPr>
             <a:r>
-              <a:rPr sz="1800">
+              <a:rPr sz="2000">
                 <a:solidFill>
                   <a:srgbClr val="222233"/>
                 </a:solidFill>
               </a:rPr>
-              <a:t>•  XMSS/LMS — для firmware signing з HSM</a:t>
+              <a:t>•  XMSS/LMS - для firmware signing з HSM</a:t>
             </a:r>
           </a:p>
           <a:p>
@@ -23061,12 +22382,12 @@
               </a:spcAft>
             </a:pPr>
             <a:r>
-              <a:rPr sz="1800">
+              <a:rPr sz="2000">
                 <a:solidFill>
                   <a:srgbClr val="222233"/>
                 </a:solidFill>
               </a:rPr>
-              <a:t>•  SLH-DSA — для довгострокових артефактів</a:t>
+              <a:t>•  SLH-DSA - для довгострокових артефактів</a:t>
             </a:r>
           </a:p>
           <a:p>
@@ -23076,12 +22397,12 @@
               </a:spcAft>
             </a:pPr>
             <a:r>
-              <a:rPr sz="1800">
+              <a:rPr sz="2000">
                 <a:solidFill>
                   <a:srgbClr val="222233"/>
                 </a:solidFill>
               </a:rPr>
-              <a:t>•  ML-DSA — default для більшості випадків</a:t>
+              <a:t>•  ML-DSA - default для більшості випадків</a:t>
             </a:r>
           </a:p>
           <a:p>
@@ -23091,12 +22412,12 @@
               </a:spcAft>
             </a:pPr>
             <a:r>
-              <a:rPr sz="1800">
+              <a:rPr sz="2000">
                 <a:solidFill>
                   <a:srgbClr val="222233"/>
                 </a:solidFill>
               </a:rPr>
-              <a:t>•  Гібрид ECDSA + SLH-DSA — best practice</a:t>
+              <a:t>•  Гібрид ECDSA + SLH-DSA - best practice</a:t>
             </a:r>
           </a:p>
         </p:txBody>
@@ -23109,7 +22430,7 @@
         </p:nvSpPr>
         <p:spPr>
           <a:xfrm>
-            <a:off x="700000" y="6330000"/>
+            <a:off x="700000" y="5996367"/>
             <a:ext cx="10792000" cy="500000"/>
           </a:xfrm>
           <a:prstGeom prst="rect">
@@ -23123,12 +22444,59 @@
           <a:p>
             <a:pPr algn="ctr"/>
             <a:r>
-              <a:rPr sz="1600" b="1">
+              <a:rPr sz="1800" b="1">
                 <a:solidFill>
                   <a:srgbClr val="445577"/>
                 </a:solidFill>
               </a:rPr>
-              <a:t>Hash-based підпис — найконсервативніший постквантовий вибір для критичної інфраструктури</a:t>
+              <a:t>Hash-based підпис - найконсервативніший постквантовий вибір</a:t>
+            </a:r>
+          </a:p>
+        </p:txBody>
+      </p:sp>
+      <p:sp>
+        <p:nvSpPr>
+          <p:cNvPr id="3" name="TextBox 2">
+            <a:extLst>
+              <a:ext uri="{FF2B5EF4-FFF2-40B4-BE49-F238E27FC236}">
+                <a16:creationId xmlns:a16="http://schemas.microsoft.com/office/drawing/2014/main" id="{B8E1D234-B7A1-8EEC-FCB2-3BD7E835AF63}"/>
+              </a:ext>
+            </a:extLst>
+          </p:cNvPr>
+          <p:cNvSpPr txBox="1"/>
+          <p:nvPr/>
+        </p:nvSpPr>
+        <p:spPr>
+          <a:xfrm>
+            <a:off x="5064597" y="361633"/>
+            <a:ext cx="2062806" cy="400110"/>
+          </a:xfrm>
+          <a:prstGeom prst="rect">
+            <a:avLst/>
+          </a:prstGeom>
+          <a:noFill/>
+        </p:spPr>
+        <p:txBody>
+          <a:bodyPr wrap="square">
+            <a:spAutoFit/>
+          </a:bodyPr>
+          <a:lstStyle/>
+          <a:p>
+            <a:r>
+              <a:rPr lang="ru-RU" sz="2000" dirty="0" err="1"/>
+              <a:t>Підсумки</a:t>
+            </a:r>
+            <a:r>
+              <a:rPr lang="ru-RU" sz="2000" dirty="0"/>
+              <a:t> </a:t>
+            </a:r>
+            <a:r>
+              <a:rPr lang="ru-RU" sz="2000" dirty="0" err="1"/>
+              <a:t>лекції</a:t>
+            </a:r>
+            <a:r>
+              <a:rPr lang="ru-RU" sz="2000" dirty="0"/>
+              <a:t> 7</a:t>
             </a:r>
           </a:p>
         </p:txBody>
@@ -23141,7 +22509,7 @@
 </p:sld>
 </file>
 
-<file path=ppt/slides/slide29.xml><?xml version="1.0" encoding="utf-8"?>
+<file path=ppt/slides/slide28.xml><?xml version="1.0" encoding="utf-8"?>
 <p:sld xmlns:a="http://schemas.openxmlformats.org/drawingml/2006/main" xmlns:r="http://schemas.openxmlformats.org/officeDocument/2006/relationships" xmlns:p="http://schemas.openxmlformats.org/presentationml/2006/main">
   <p:cSld>
     <p:spTree>
@@ -23305,7 +22673,7 @@
                 </a:solidFill>
                 <a:latin typeface="Calibri"/>
               </a:rPr>
-              <a:t>ЦИФРОВИЙ ПІДПИС ЛАМПОРТА </a:t>
+              <a:t>Цифровий підпис Лампорта</a:t>
             </a:r>
           </a:p>
         </p:txBody>
@@ -23328,17 +22696,20 @@
         </p:nvSpPr>
         <p:spPr>
           <a:xfrm>
-            <a:off x="838200" y="2105247"/>
-            <a:ext cx="10515600" cy="4238404"/>
+            <a:off x="838200" y="1442720"/>
+            <a:ext cx="10515600" cy="4900931"/>
           </a:xfrm>
         </p:spPr>
         <p:txBody>
           <a:bodyPr>
-            <a:normAutofit/>
+            <a:normAutofit fontScale="92500" lnSpcReduction="20000"/>
           </a:bodyPr>
           <a:lstStyle/>
           <a:p>
             <a:pPr algn="l">
+              <a:lnSpc>
+                <a:spcPct val="150000"/>
+              </a:lnSpc>
               <a:buFont typeface="Arial" panose="020B0604020202020204" pitchFamily="34" charset="0"/>
               <a:buChar char="•"/>
             </a:pPr>
@@ -23426,6 +22797,9 @@
           </a:p>
           <a:p>
             <a:pPr algn="l">
+              <a:lnSpc>
+                <a:spcPct val="150000"/>
+              </a:lnSpc>
               <a:spcBef>
                 <a:spcPts val="300"/>
               </a:spcBef>
@@ -23596,6 +22970,9 @@
           </a:p>
           <a:p>
             <a:pPr algn="l">
+              <a:lnSpc>
+                <a:spcPct val="150000"/>
+              </a:lnSpc>
               <a:spcBef>
                 <a:spcPts val="300"/>
               </a:spcBef>
@@ -23619,6 +22996,9 @@
           </a:p>
           <a:p>
             <a:pPr algn="l">
+              <a:lnSpc>
+                <a:spcPct val="150000"/>
+              </a:lnSpc>
               <a:spcAft>
                 <a:spcPts val="300"/>
               </a:spcAft>
@@ -23656,6 +23036,9 @@
           </a:p>
           <a:p>
             <a:pPr marL="457200" lvl="1" indent="0" algn="l">
+              <a:lnSpc>
+                <a:spcPct val="150000"/>
+              </a:lnSpc>
               <a:spcBef>
                 <a:spcPts val="300"/>
               </a:spcBef>
@@ -23839,6 +23222,9 @@
           </a:p>
           <a:p>
             <a:pPr algn="l">
+              <a:lnSpc>
+                <a:spcPct val="150000"/>
+              </a:lnSpc>
               <a:spcBef>
                 <a:spcPts val="300"/>
               </a:spcBef>
@@ -23865,6 +23251,9 @@
           </a:p>
           <a:p>
             <a:pPr marL="457200" lvl="1" indent="0" algn="l">
+              <a:lnSpc>
+                <a:spcPct val="150000"/>
+              </a:lnSpc>
               <a:spcBef>
                 <a:spcPts val="300"/>
               </a:spcBef>
@@ -23919,6 +23308,9 @@
           </a:p>
           <a:p>
             <a:pPr algn="l">
+              <a:lnSpc>
+                <a:spcPct val="150000"/>
+              </a:lnSpc>
               <a:spcBef>
                 <a:spcPts val="300"/>
               </a:spcBef>
@@ -23945,6 +23337,9 @@
           </a:p>
           <a:p>
             <a:pPr marL="457200" lvl="1" indent="0" algn="l">
+              <a:lnSpc>
+                <a:spcPct val="150000"/>
+              </a:lnSpc>
               <a:spcBef>
                 <a:spcPts val="300"/>
               </a:spcBef>
@@ -23999,6 +23394,9 @@
           </a:p>
           <a:p>
             <a:pPr algn="l">
+              <a:lnSpc>
+                <a:spcPct val="150000"/>
+              </a:lnSpc>
               <a:spcBef>
                 <a:spcPts val="300"/>
               </a:spcBef>
@@ -24025,6 +23423,9 @@
           </a:p>
           <a:p>
             <a:pPr marL="457200" lvl="1" indent="0" algn="just">
+              <a:lnSpc>
+                <a:spcPct val="150000"/>
+              </a:lnSpc>
               <a:spcBef>
                 <a:spcPts val="300"/>
               </a:spcBef>
@@ -24133,7 +23534,7 @@
                 </a:solidFill>
                 <a:latin typeface="Calibri"/>
               </a:rPr>
-              <a:t>Генерація ключів</a:t>
+              <a:t>Lamport: генерація ключів</a:t>
             </a:r>
           </a:p>
         </p:txBody>
@@ -24313,7 +23714,7 @@
                     <a:ea typeface="Calibri"/>
                     <a:cs typeface="Calibri"/>
                   </a:rPr>
-                  <a:t> — довжина хешу повідомлення.</a:t>
+                  <a:t> - довжина хешу повідомлення.</a:t>
                 </a:r>
               </a:p>
               <a:p>
@@ -25411,7 +24812,7 @@
             </p:spPr>
             <p:txBody>
               <a:bodyPr>
-                <a:normAutoFit/>
+                <a:normAutoFit fontScale="75000" lnSpcReduction="20000"/>
               </a:bodyPr>
               <a:lstStyle/>
               <a:p>
@@ -25493,7 +24894,7 @@
                 </a:solidFill>
                 <a:latin typeface="Calibri"/>
               </a:rPr>
-              <a:t>Формування цифрового підпису</a:t>
+              <a:t>Lamport: формування підпису</a:t>
             </a:r>
             <a:endParaRPr lang="en-US" b="1" dirty="0">
               <a:solidFill>
@@ -25506,8 +24907,8 @@
           </a:p>
         </p:txBody>
       </p:sp>
-      <mc:AlternateContent xmlns:mc="http://schemas.openxmlformats.org/markup-compatibility/2006">
-        <mc:Choice xmlns:a14="http://schemas.microsoft.com/office/drawing/2010/main" Requires="a14">
+      <mc:AlternateContent xmlns:mc="http://schemas.openxmlformats.org/markup-compatibility/2006" xmlns:a14="http://schemas.microsoft.com/office/drawing/2010/main">
+        <mc:Choice Requires="a14">
           <p:sp>
             <p:nvSpPr>
               <p:cNvPr id="5" name="TextBox 4">
@@ -25724,7 +25125,8 @@
                   </a:rPr>
                   <a:t>.</a:t>
                 </a:r>
-                <a:endParaRPr lang="en-US" dirty="0">
+                <a:endParaRPr lang="uk-UA" sz="1800" dirty="0">
+                  <a:effectLst/>
                   <a:latin typeface="Calibri"/>
                   <a:ea typeface="Calibri"/>
                   <a:cs typeface="Calibri"/>
@@ -26554,7 +25956,7 @@
                     <a:ea typeface="Calibri"/>
                     <a:cs typeface="Calibri"/>
                   </a:rPr>
-                  <a:t>Підпис — це сукупність вибраних елементів приватного ключа:</a:t>
+                  <a:t>Підпис - це сукупність вибраних елементів приватного ключа:</a:t>
                 </a:r>
               </a:p>
               <a:p>
@@ -26744,7 +26146,7 @@
             </p:txBody>
           </p:sp>
         </mc:Choice>
-        <mc:Fallback>
+        <mc:Fallback xmlns="">
           <p:sp>
             <p:nvSpPr>
               <p:cNvPr id="5" name="TextBox 4">
@@ -26850,7 +26252,7 @@
                 </a:solidFill>
                 <a:latin typeface="Calibri"/>
               </a:rPr>
-              <a:t>ПЕРЕВІРКА ПІДПИСУ</a:t>
+              <a:t>Lamport: перевірка підпису</a:t>
             </a:r>
           </a:p>
         </p:txBody>
@@ -27485,7 +26887,7 @@
             </p:spPr>
             <p:txBody>
               <a:bodyPr>
-                <a:normAutoFit/>
+                <a:normAutoFit fontScale="75000" lnSpcReduction="20000"/>
               </a:bodyPr>
               <a:lstStyle/>
               <a:p>
@@ -27818,17 +27220,20 @@
         </p:nvSpPr>
         <p:spPr>
           <a:xfrm>
-            <a:off x="838200" y="1818168"/>
-            <a:ext cx="10820400" cy="3941060"/>
+            <a:off x="838200" y="1544319"/>
+            <a:ext cx="10820400" cy="4948555"/>
           </a:xfrm>
         </p:spPr>
         <p:txBody>
           <a:bodyPr>
-            <a:normAutofit/>
+            <a:normAutofit fontScale="92500" lnSpcReduction="20000"/>
           </a:bodyPr>
           <a:lstStyle/>
           <a:p>
             <a:pPr algn="l">
+              <a:lnSpc>
+                <a:spcPct val="150000"/>
+              </a:lnSpc>
               <a:buFont typeface="Arial" panose="020B0604020202020204" pitchFamily="34" charset="0"/>
               <a:buChar char="•"/>
             </a:pPr>
@@ -27867,6 +27272,9 @@
           </a:p>
           <a:p>
             <a:pPr algn="l">
+              <a:lnSpc>
+                <a:spcPct val="150000"/>
+              </a:lnSpc>
               <a:spcBef>
                 <a:spcPts val="300"/>
               </a:spcBef>
@@ -27897,6 +27305,9 @@
           </a:p>
           <a:p>
             <a:pPr algn="l">
+              <a:lnSpc>
+                <a:spcPct val="150000"/>
+              </a:lnSpc>
               <a:spcBef>
                 <a:spcPts val="300"/>
               </a:spcBef>
@@ -27913,6 +27324,9 @@
           </a:p>
           <a:p>
             <a:pPr algn="l">
+              <a:lnSpc>
+                <a:spcPct val="150000"/>
+              </a:lnSpc>
               <a:spcAft>
                 <a:spcPts val="300"/>
               </a:spcAft>
@@ -27936,6 +27350,9 @@
           </a:p>
           <a:p>
             <a:pPr marL="457200" lvl="1" indent="0" algn="l">
+              <a:lnSpc>
+                <a:spcPct val="150000"/>
+              </a:lnSpc>
               <a:spcBef>
                 <a:spcPts val="300"/>
               </a:spcBef>
@@ -27965,6 +27382,9 @@
           </a:p>
           <a:p>
             <a:pPr algn="l">
+              <a:lnSpc>
+                <a:spcPct val="150000"/>
+              </a:lnSpc>
               <a:spcBef>
                 <a:spcPts val="300"/>
               </a:spcBef>
@@ -27991,6 +27411,9 @@
           </a:p>
           <a:p>
             <a:pPr marL="457200" lvl="1" indent="0" algn="l">
+              <a:lnSpc>
+                <a:spcPct val="150000"/>
+              </a:lnSpc>
               <a:spcBef>
                 <a:spcPts val="300"/>
               </a:spcBef>
@@ -28034,6 +27457,9 @@
           </a:p>
           <a:p>
             <a:pPr algn="l">
+              <a:lnSpc>
+                <a:spcPct val="150000"/>
+              </a:lnSpc>
               <a:spcBef>
                 <a:spcPts val="300"/>
               </a:spcBef>
@@ -28060,6 +27486,9 @@
           </a:p>
           <a:p>
             <a:pPr marL="457200" lvl="1" indent="0" algn="l">
+              <a:lnSpc>
+                <a:spcPct val="150000"/>
+              </a:lnSpc>
               <a:spcBef>
                 <a:spcPts val="300"/>
               </a:spcBef>
@@ -28089,6 +27518,9 @@
           </a:p>
           <a:p>
             <a:pPr algn="l">
+              <a:lnSpc>
+                <a:spcPct val="150000"/>
+              </a:lnSpc>
               <a:spcBef>
                 <a:spcPts val="300"/>
               </a:spcBef>
@@ -28115,6 +27547,9 @@
           </a:p>
           <a:p>
             <a:pPr marL="457200" lvl="1" indent="0" algn="l">
+              <a:lnSpc>
+                <a:spcPct val="150000"/>
+              </a:lnSpc>
               <a:spcBef>
                 <a:spcPts val="300"/>
               </a:spcBef>
@@ -28155,9 +27590,6 @@
               </a:rPr>
               <a:t>).</a:t>
             </a:r>
-            <a:br>
-              <a:rPr lang="en-US" sz="1800" dirty="0"/>
-            </a:br>
             <a:endParaRPr lang="en-US" sz="1800" dirty="0"/>
           </a:p>
         </p:txBody>
@@ -28197,7 +27629,7 @@
           <p:cNvPr id="2" name="Title 1">
             <a:extLst>
               <a:ext uri="{FF2B5EF4-FFF2-40B4-BE49-F238E27FC236}">
-                <a16:creationId xmlns:a16="http://schemas.microsoft.com/office/drawing/2014/main" id="{8F01933B-E217-6775-DDDE-950A77023B33}"/>
+                <a16:creationId xmlns:a16="http://schemas.microsoft.com/office/drawing/2014/main" id="{AF1A706C-8A51-C366-F59D-C8D08DDF3D9E}"/>
               </a:ext>
             </a:extLst>
           </p:cNvPr>
@@ -28223,45 +27655,967 @@
                 </a:solidFill>
                 <a:latin typeface="Calibri"/>
               </a:rPr>
-              <a:t>ХЕШ-ЛАНЦЮГ</a:t>
+              <a:t>WOTS: генерація ключів</a:t>
             </a:r>
           </a:p>
         </p:txBody>
       </p:sp>
-      <p:pic>
-        <p:nvPicPr>
-          <p:cNvPr id="6" name="Picture 5">
-            <a:extLst>
-              <a:ext uri="{FF2B5EF4-FFF2-40B4-BE49-F238E27FC236}">
-                <a16:creationId xmlns:a16="http://schemas.microsoft.com/office/drawing/2014/main" id="{0F8FEEB0-754B-E35F-DFA1-D11DB051B6D3}"/>
-              </a:ext>
-            </a:extLst>
-          </p:cNvPr>
-          <p:cNvPicPr>
-            <a:picLocks noChangeAspect="1"/>
-          </p:cNvPicPr>
-          <p:nvPr/>
-        </p:nvPicPr>
-        <p:blipFill>
-          <a:blip r:embed="rId2"/>
-          <a:stretch>
-            <a:fillRect/>
-          </a:stretch>
-        </p:blipFill>
-        <p:spPr>
-          <a:xfrm>
-            <a:off x="1042911" y="3338512"/>
-            <a:ext cx="10106177" cy="1325563"/>
-          </a:xfrm>
-          <a:prstGeom prst="rect">
-            <a:avLst/>
-          </a:prstGeom>
-        </p:spPr>
-      </p:pic>
+      <mc:AlternateContent xmlns:mc="http://schemas.openxmlformats.org/markup-compatibility/2006" xmlns:a14="http://schemas.microsoft.com/office/drawing/2010/main">
+        <mc:Choice Requires="a14">
+          <p:sp>
+            <p:nvSpPr>
+              <p:cNvPr id="3" name="Content Placeholder 2">
+                <a:extLst>
+                  <a:ext uri="{FF2B5EF4-FFF2-40B4-BE49-F238E27FC236}">
+                    <a16:creationId xmlns:a16="http://schemas.microsoft.com/office/drawing/2014/main" id="{D36B7EE6-B544-03BD-0F62-90C00428CD7B}"/>
+                  </a:ext>
+                </a:extLst>
+              </p:cNvPr>
+              <p:cNvSpPr>
+                <a:spLocks noGrp="1"/>
+              </p:cNvSpPr>
+              <p:nvPr>
+                <p:ph idx="1"/>
+              </p:nvPr>
+            </p:nvSpPr>
+            <p:spPr>
+              <a:xfrm>
+                <a:off x="1793240" y="1690688"/>
+                <a:ext cx="8305800" cy="4667250"/>
+              </a:xfrm>
+            </p:spPr>
+            <p:txBody>
+              <a:bodyPr/>
+              <a:lstStyle/>
+              <a:p>
+                <a:pPr marL="0" marR="0" lvl="0" indent="0">
+                  <a:lnSpc>
+                    <a:spcPts val="1200"/>
+                  </a:lnSpc>
+                  <a:spcAft>
+                    <a:spcPts val="600"/>
+                  </a:spcAft>
+                  <a:buNone/>
+                  <a:tabLst>
+                    <a:tab pos="685800" algn="l"/>
+                  </a:tabLst>
+                </a:pPr>
+                <a:r>
+                  <a:rPr lang="en-US" sz="1800" dirty="0">
+                    <a:effectLst/>
+                    <a:latin typeface="Calibri"/>
+                    <a:ea typeface="Calibri"/>
+                    <a:cs typeface="Calibri"/>
+                  </a:rPr>
+                  <a:t>Приватний ключ (</a:t>
+                </a:r>
+                <a14:m>
+                  <m:oMath xmlns:m="http://schemas.openxmlformats.org/officeDocument/2006/math">
+                    <m:r>
+                      <a:rPr lang="en-US" sz="1800" i="1" smtClean="0">
+                        <a:effectLst/>
+                        <a:latin typeface="Cambria Math" panose="02040503050406030204" pitchFamily="18" charset="0"/>
+                        <a:ea typeface="Calibri"/>
+                        <a:cs typeface="Calibri"/>
+                      </a:rPr>
+                      <m:t>𝑥</m:t>
+                    </m:r>
+                  </m:oMath>
+                </a14:m>
+                <a:r>
+                  <a:rPr lang="en-US" sz="1800" dirty="0">
+                    <a:effectLst/>
+                    <a:latin typeface="Calibri"/>
+                    <a:ea typeface="Calibri"/>
+                    <a:cs typeface="Calibri"/>
+                  </a:rPr>
+                  <a:t>):</a:t>
+                </a:r>
+              </a:p>
+              <a:p>
+                <a:pPr marL="36000" marR="0" lvl="0" indent="-342900">
+                  <a:lnSpc>
+                    <a:spcPts val="1200"/>
+                  </a:lnSpc>
+                  <a:spcAft>
+                    <a:spcPts val="600"/>
+                  </a:spcAft>
+                  <a:buFont typeface="Symbol" panose="05050102010706020507" pitchFamily="18" charset="2"/>
+                  <a:buChar char=""/>
+                  <a:tabLst>
+                    <a:tab pos="685800" algn="l"/>
+                  </a:tabLst>
+                </a:pPr>
+                <a:r>
+                  <a:rPr lang="en-US" sz="1800" dirty="0">
+                    <a:effectLst/>
+                    <a:latin typeface="Calibri"/>
+                    <a:ea typeface="Calibri"/>
+                    <a:cs typeface="Calibri"/>
+                  </a:rPr>
+                  <a:t>Набір випадкових значень: </a:t>
+                </a:r>
+                <a14:m>
+                  <m:oMath xmlns:m="http://schemas.openxmlformats.org/officeDocument/2006/math">
+                    <m:r>
+                      <a:rPr lang="en-US" sz="1800" i="1" smtClean="0">
+                        <a:effectLst/>
+                        <a:latin typeface="Cambria Math" panose="02040503050406030204" pitchFamily="18" charset="0"/>
+                        <a:ea typeface="Calibri"/>
+                        <a:cs typeface="Calibri"/>
+                      </a:rPr>
+                      <m:t>𝑥</m:t>
+                    </m:r>
+                    <m:r>
+                      <a:rPr lang="en-US" sz="1800">
+                        <a:effectLst/>
+                        <a:latin typeface="Cambria Math" panose="02040503050406030204" pitchFamily="18" charset="0"/>
+                        <a:ea typeface="Calibri"/>
+                        <a:cs typeface="Calibri"/>
+                      </a:rPr>
+                      <m:t>=</m:t>
+                    </m:r>
+                    <m:d>
+                      <m:dPr>
+                        <m:ctrlPr>
+                          <a:rPr lang="en-US" sz="1800" i="1">
+                            <a:effectLst/>
+                            <a:latin typeface="Cambria Math" panose="02040503050406030204" pitchFamily="18" charset="0"/>
+                            <a:ea typeface="Calibri"/>
+                            <a:cs typeface="Calibri"/>
+                          </a:rPr>
+                        </m:ctrlPr>
+                      </m:dPr>
+                      <m:e>
+                        <m:sSub>
+                          <m:sSubPr>
+                            <m:ctrlPr>
+                              <a:rPr lang="en-US" sz="1800" i="1">
+                                <a:effectLst/>
+                                <a:latin typeface="Cambria Math" panose="02040503050406030204" pitchFamily="18" charset="0"/>
+                                <a:ea typeface="Calibri"/>
+                                <a:cs typeface="Calibri"/>
+                              </a:rPr>
+                            </m:ctrlPr>
+                          </m:sSubPr>
+                          <m:e>
+                            <m:r>
+                              <a:rPr lang="en-US" sz="1800" i="1">
+                                <a:effectLst/>
+                                <a:latin typeface="Cambria Math" panose="02040503050406030204" pitchFamily="18" charset="0"/>
+                                <a:ea typeface="Calibri"/>
+                                <a:cs typeface="Calibri"/>
+                              </a:rPr>
+                              <m:t>𝑥</m:t>
+                            </m:r>
+                          </m:e>
+                          <m:sub>
+                            <m:r>
+                              <a:rPr lang="en-US" sz="1800">
+                                <a:effectLst/>
+                                <a:latin typeface="Cambria Math" panose="02040503050406030204" pitchFamily="18" charset="0"/>
+                                <a:ea typeface="Calibri"/>
+                                <a:cs typeface="Calibri"/>
+                              </a:rPr>
+                              <m:t>1</m:t>
+                            </m:r>
+                          </m:sub>
+                        </m:sSub>
+                        <m:r>
+                          <a:rPr lang="en-US" sz="1800">
+                            <a:effectLst/>
+                            <a:latin typeface="Cambria Math" panose="02040503050406030204" pitchFamily="18" charset="0"/>
+                            <a:ea typeface="Calibri"/>
+                            <a:cs typeface="Calibri"/>
+                          </a:rPr>
+                          <m:t>,</m:t>
+                        </m:r>
+                        <m:sSub>
+                          <m:sSubPr>
+                            <m:ctrlPr>
+                              <a:rPr lang="en-US" sz="1800" i="1">
+                                <a:effectLst/>
+                                <a:latin typeface="Cambria Math" panose="02040503050406030204" pitchFamily="18" charset="0"/>
+                                <a:ea typeface="Calibri"/>
+                                <a:cs typeface="Calibri"/>
+                              </a:rPr>
+                            </m:ctrlPr>
+                          </m:sSubPr>
+                          <m:e>
+                            <m:r>
+                              <a:rPr lang="en-US" sz="1800" i="1">
+                                <a:effectLst/>
+                                <a:latin typeface="Cambria Math" panose="02040503050406030204" pitchFamily="18" charset="0"/>
+                                <a:ea typeface="Calibri"/>
+                                <a:cs typeface="Calibri"/>
+                              </a:rPr>
+                              <m:t>𝑥</m:t>
+                            </m:r>
+                          </m:e>
+                          <m:sub>
+                            <m:r>
+                              <a:rPr lang="en-US" sz="1800">
+                                <a:effectLst/>
+                                <a:latin typeface="Cambria Math" panose="02040503050406030204" pitchFamily="18" charset="0"/>
+                                <a:ea typeface="Calibri"/>
+                                <a:cs typeface="Calibri"/>
+                              </a:rPr>
+                              <m:t>2</m:t>
+                            </m:r>
+                          </m:sub>
+                        </m:sSub>
+                        <m:r>
+                          <a:rPr lang="en-US" sz="1800">
+                            <a:effectLst/>
+                            <a:latin typeface="Cambria Math" panose="02040503050406030204" pitchFamily="18" charset="0"/>
+                            <a:ea typeface="Calibri"/>
+                            <a:cs typeface="Calibri"/>
+                          </a:rPr>
+                          <m:t>,…,</m:t>
+                        </m:r>
+                        <m:sSub>
+                          <m:sSubPr>
+                            <m:ctrlPr>
+                              <a:rPr lang="en-US" sz="1800" i="1">
+                                <a:effectLst/>
+                                <a:latin typeface="Cambria Math" panose="02040503050406030204" pitchFamily="18" charset="0"/>
+                                <a:ea typeface="Calibri"/>
+                                <a:cs typeface="Calibri"/>
+                              </a:rPr>
+                            </m:ctrlPr>
+                          </m:sSubPr>
+                          <m:e>
+                            <m:r>
+                              <a:rPr lang="en-US" sz="1800" i="1">
+                                <a:effectLst/>
+                                <a:latin typeface="Cambria Math" panose="02040503050406030204" pitchFamily="18" charset="0"/>
+                                <a:ea typeface="Calibri"/>
+                                <a:cs typeface="Calibri"/>
+                              </a:rPr>
+                              <m:t>𝑥</m:t>
+                            </m:r>
+                          </m:e>
+                          <m:sub>
+                            <m:r>
+                              <a:rPr lang="en-US" sz="1800" i="1">
+                                <a:effectLst/>
+                                <a:latin typeface="Cambria Math" panose="02040503050406030204" pitchFamily="18" charset="0"/>
+                                <a:ea typeface="Calibri"/>
+                                <a:cs typeface="Calibri"/>
+                              </a:rPr>
+                              <m:t>𝑛</m:t>
+                            </m:r>
+                          </m:sub>
+                        </m:sSub>
+                      </m:e>
+                    </m:d>
+                  </m:oMath>
+                </a14:m>
+                <a:endParaRPr lang="en-US" sz="1800" dirty="0">
+                  <a:effectLst/>
+                  <a:latin typeface="Calibri"/>
+                  <a:ea typeface="Calibri"/>
+                  <a:cs typeface="Calibri"/>
+                </a:endParaRPr>
+              </a:p>
+              <a:p>
+                <a:pPr marL="36000" marR="0" lvl="0" indent="-342900">
+                  <a:lnSpc>
+                    <a:spcPts val="1200"/>
+                  </a:lnSpc>
+                  <a:spcAft>
+                    <a:spcPts val="600"/>
+                  </a:spcAft>
+                  <a:buFont typeface="Symbol" panose="05050102010706020507" pitchFamily="18" charset="2"/>
+                  <a:buChar char=""/>
+                  <a:tabLst>
+                    <a:tab pos="685800" algn="l"/>
+                  </a:tabLst>
+                </a:pPr>
+                <a:r>
+                  <a:rPr lang="en-US" sz="1800" dirty="0">
+                    <a:effectLst/>
+                    <a:latin typeface="Calibri"/>
+                    <a:ea typeface="Calibri"/>
+                    <a:cs typeface="Calibri"/>
+                  </a:rPr>
+                  <a:t>Кожен є випадковим числом (наприклад, 256 бітів).</a:t>
+                </a:r>
+              </a:p>
+              <a:p>
+                <a:pPr marL="0" marR="0" lvl="0" indent="0">
+                  <a:lnSpc>
+                    <a:spcPts val="1200"/>
+                  </a:lnSpc>
+                  <a:spcAft>
+                    <a:spcPts val="600"/>
+                  </a:spcAft>
+                  <a:buNone/>
+                  <a:tabLst>
+                    <a:tab pos="685800" algn="l"/>
+                  </a:tabLst>
+                </a:pPr>
+                <a:endParaRPr lang="uk-UA" sz="1800" dirty="0">
+                  <a:effectLst/>
+                  <a:latin typeface="Calibri"/>
+                  <a:ea typeface="Calibri"/>
+                  <a:cs typeface="Calibri"/>
+                </a:endParaRPr>
+              </a:p>
+              <a:p>
+                <a:pPr marL="0" marR="0" lvl="0" indent="0">
+                  <a:lnSpc>
+                    <a:spcPts val="1200"/>
+                  </a:lnSpc>
+                  <a:spcAft>
+                    <a:spcPts val="600"/>
+                  </a:spcAft>
+                  <a:buNone/>
+                  <a:tabLst>
+                    <a:tab pos="685800" algn="l"/>
+                  </a:tabLst>
+                </a:pPr>
+                <a:r>
+                  <a:rPr lang="en-US" sz="1800" dirty="0" err="1">
+                    <a:effectLst/>
+                    <a:latin typeface="Calibri"/>
+                    <a:ea typeface="Calibri"/>
+                    <a:cs typeface="Calibri"/>
+                  </a:rPr>
+                  <a:t>Відкритий</a:t>
+                </a:r>
+                <a:r>
+                  <a:rPr lang="en-US" sz="1800" dirty="0">
+                    <a:effectLst/>
+                    <a:latin typeface="Calibri"/>
+                    <a:ea typeface="Calibri"/>
+                    <a:cs typeface="Calibri"/>
+                  </a:rPr>
+                  <a:t> ключ (y):</a:t>
+                </a:r>
+              </a:p>
+              <a:p>
+                <a:pPr marL="36000" marR="0" lvl="0" indent="-342900">
+                  <a:lnSpc>
+                    <a:spcPts val="1200"/>
+                  </a:lnSpc>
+                  <a:spcAft>
+                    <a:spcPts val="1200"/>
+                  </a:spcAft>
+                  <a:buFont typeface="Symbol" panose="05050102010706020507" pitchFamily="18" charset="2"/>
+                  <a:buChar char=""/>
+                  <a:tabLst>
+                    <a:tab pos="685800" algn="l"/>
+                  </a:tabLst>
+                </a:pPr>
+                <a:r>
+                  <a:rPr lang="en-US" sz="1800" dirty="0">
+                    <a:effectLst/>
+                    <a:latin typeface="Calibri"/>
+                    <a:ea typeface="Calibri"/>
+                    <a:cs typeface="Calibri"/>
+                  </a:rPr>
+                  <a:t>Отримується шляхом застосування хеш-функції </a:t>
+                </a:r>
+                <a14:m>
+                  <m:oMath xmlns:m="http://schemas.openxmlformats.org/officeDocument/2006/math">
+                    <m:r>
+                      <a:rPr lang="en-US" sz="1800" i="1" smtClean="0">
+                        <a:effectLst/>
+                        <a:latin typeface="Cambria Math" panose="02040503050406030204" pitchFamily="18" charset="0"/>
+                        <a:ea typeface="Calibri"/>
+                        <a:cs typeface="Calibri"/>
+                      </a:rPr>
+                      <m:t>𝑤</m:t>
+                    </m:r>
+                    <m:r>
+                      <a:rPr lang="en-US" sz="1800" i="1" smtClean="0">
+                        <a:effectLst/>
+                        <a:latin typeface="Cambria Math" panose="02040503050406030204" pitchFamily="18" charset="0"/>
+                        <a:ea typeface="Calibri"/>
+                        <a:cs typeface="Calibri"/>
+                      </a:rPr>
+                      <m:t> </m:t>
+                    </m:r>
+                  </m:oMath>
+                </a14:m>
+                <a:r>
+                  <a:rPr lang="en-US" sz="1800" dirty="0">
+                    <a:effectLst/>
+                    <a:latin typeface="Calibri"/>
+                    <a:ea typeface="Calibri"/>
+                    <a:cs typeface="Calibri"/>
+                  </a:rPr>
+                  <a:t>разів до кожного </a:t>
+                </a:r>
+                <a14:m>
+                  <m:oMath xmlns:m="http://schemas.openxmlformats.org/officeDocument/2006/math">
+                    <m:sSub>
+                      <m:sSubPr>
+                        <m:ctrlPr>
+                          <a:rPr lang="en-US" sz="1800" i="1">
+                            <a:latin typeface="Cambria Math" panose="02040503050406030204" pitchFamily="18" charset="0"/>
+                            <a:ea typeface="Calibri"/>
+                            <a:cs typeface="Calibri"/>
+                          </a:rPr>
+                        </m:ctrlPr>
+                      </m:sSubPr>
+                      <m:e>
+                        <m:r>
+                          <a:rPr lang="en-US" sz="1800" i="1">
+                            <a:latin typeface="Cambria Math" panose="02040503050406030204" pitchFamily="18" charset="0"/>
+                            <a:ea typeface="Calibri"/>
+                            <a:cs typeface="Calibri"/>
+                          </a:rPr>
+                          <m:t>𝑥</m:t>
+                        </m:r>
+                      </m:e>
+                      <m:sub>
+                        <m:r>
+                          <a:rPr lang="en-US" sz="1800" i="1">
+                            <a:latin typeface="Cambria Math" panose="02040503050406030204" pitchFamily="18" charset="0"/>
+                            <a:ea typeface="Calibri"/>
+                            <a:cs typeface="Calibri"/>
+                          </a:rPr>
+                          <m:t>𝑖</m:t>
+                        </m:r>
+                      </m:sub>
+                    </m:sSub>
+                    <m:r>
+                      <a:rPr lang="en-US" sz="1800" i="1">
+                        <a:latin typeface="Cambria Math" panose="02040503050406030204" pitchFamily="18" charset="0"/>
+                        <a:ea typeface="Calibri"/>
+                        <a:cs typeface="Calibri"/>
+                      </a:rPr>
+                      <m:t> </m:t>
+                    </m:r>
+                  </m:oMath>
+                </a14:m>
+                <a:r>
+                  <a:rPr lang="en-US" sz="1800" dirty="0">
+                    <a:effectLst/>
+                    <a:latin typeface="Calibri"/>
+                    <a:ea typeface="Calibri"/>
+                    <a:cs typeface="Calibri"/>
+                  </a:rPr>
+                  <a:t>:</a:t>
+                </a:r>
+              </a:p>
+              <a:p>
+                <a:pPr marL="36000" marR="0" indent="0">
+                  <a:lnSpc>
+                    <a:spcPts val="1200"/>
+                  </a:lnSpc>
+                  <a:spcAft>
+                    <a:spcPts val="1100"/>
+                  </a:spcAft>
+                  <a:buNone/>
+                </a:pPr>
+                <a14:m>
+                  <m:oMathPara xmlns:m="http://schemas.openxmlformats.org/officeDocument/2006/math">
+                    <m:oMathParaPr>
+                      <m:jc m:val="centerGroup"/>
+                    </m:oMathParaPr>
+                    <m:oMath xmlns:m="http://schemas.openxmlformats.org/officeDocument/2006/math">
+                      <m:r>
+                        <a:rPr lang="en-US" sz="1800" i="1">
+                          <a:effectLst/>
+                          <a:latin typeface="Cambria Math" panose="02040503050406030204" pitchFamily="18" charset="0"/>
+                          <a:ea typeface="Calibri"/>
+                          <a:cs typeface="Calibri"/>
+                        </a:rPr>
+                        <m:t>𝑦</m:t>
+                      </m:r>
+                      <m:r>
+                        <a:rPr lang="en-US" sz="1800">
+                          <a:effectLst/>
+                          <a:latin typeface="Cambria Math" panose="02040503050406030204" pitchFamily="18" charset="0"/>
+                          <a:ea typeface="Calibri"/>
+                          <a:cs typeface="Calibri"/>
+                        </a:rPr>
+                        <m:t>=</m:t>
+                      </m:r>
+                      <m:d>
+                        <m:dPr>
+                          <m:ctrlPr>
+                            <a:rPr lang="en-US" sz="1800" i="1">
+                              <a:effectLst/>
+                              <a:latin typeface="Cambria Math" panose="02040503050406030204" pitchFamily="18" charset="0"/>
+                              <a:ea typeface="Calibri"/>
+                              <a:cs typeface="Calibri"/>
+                            </a:rPr>
+                          </m:ctrlPr>
+                        </m:dPr>
+                        <m:e>
+                          <m:sSup>
+                            <m:sSupPr>
+                              <m:ctrlPr>
+                                <a:rPr lang="en-US" sz="1800" i="1">
+                                  <a:effectLst/>
+                                  <a:latin typeface="Cambria Math" panose="02040503050406030204" pitchFamily="18" charset="0"/>
+                                  <a:ea typeface="Calibri"/>
+                                  <a:cs typeface="Calibri"/>
+                                </a:rPr>
+                              </m:ctrlPr>
+                            </m:sSupPr>
+                            <m:e>
+                              <m:r>
+                                <a:rPr lang="en-US" sz="1800" i="1">
+                                  <a:effectLst/>
+                                  <a:latin typeface="Cambria Math" panose="02040503050406030204" pitchFamily="18" charset="0"/>
+                                  <a:ea typeface="Calibri"/>
+                                  <a:cs typeface="Calibri"/>
+                                </a:rPr>
+                                <m:t>𝐻</m:t>
+                              </m:r>
+                            </m:e>
+                            <m:sup>
+                              <m:r>
+                                <a:rPr lang="en-US" sz="1800" i="1">
+                                  <a:effectLst/>
+                                  <a:latin typeface="Cambria Math" panose="02040503050406030204" pitchFamily="18" charset="0"/>
+                                  <a:ea typeface="Calibri"/>
+                                  <a:cs typeface="Calibri"/>
+                                </a:rPr>
+                                <m:t>𝑤</m:t>
+                              </m:r>
+                            </m:sup>
+                          </m:sSup>
+                          <m:d>
+                            <m:dPr>
+                              <m:ctrlPr>
+                                <a:rPr lang="en-US" sz="1800" i="1">
+                                  <a:effectLst/>
+                                  <a:latin typeface="Cambria Math" panose="02040503050406030204" pitchFamily="18" charset="0"/>
+                                  <a:ea typeface="Calibri"/>
+                                  <a:cs typeface="Calibri"/>
+                                </a:rPr>
+                              </m:ctrlPr>
+                            </m:dPr>
+                            <m:e>
+                              <m:sSub>
+                                <m:sSubPr>
+                                  <m:ctrlPr>
+                                    <a:rPr lang="en-US" sz="1800" i="1">
+                                      <a:effectLst/>
+                                      <a:latin typeface="Cambria Math" panose="02040503050406030204" pitchFamily="18" charset="0"/>
+                                      <a:ea typeface="Calibri"/>
+                                      <a:cs typeface="Calibri"/>
+                                    </a:rPr>
+                                  </m:ctrlPr>
+                                </m:sSubPr>
+                                <m:e>
+                                  <m:r>
+                                    <a:rPr lang="en-US" sz="1800" i="1">
+                                      <a:effectLst/>
+                                      <a:latin typeface="Cambria Math" panose="02040503050406030204" pitchFamily="18" charset="0"/>
+                                      <a:ea typeface="Calibri"/>
+                                      <a:cs typeface="Calibri"/>
+                                    </a:rPr>
+                                    <m:t>𝑥</m:t>
+                                  </m:r>
+                                </m:e>
+                                <m:sub>
+                                  <m:r>
+                                    <a:rPr lang="en-US" sz="1800">
+                                      <a:effectLst/>
+                                      <a:latin typeface="Cambria Math" panose="02040503050406030204" pitchFamily="18" charset="0"/>
+                                      <a:ea typeface="Calibri"/>
+                                      <a:cs typeface="Calibri"/>
+                                    </a:rPr>
+                                    <m:t>1</m:t>
+                                  </m:r>
+                                </m:sub>
+                              </m:sSub>
+                            </m:e>
+                          </m:d>
+                          <m:r>
+                            <a:rPr lang="en-US" sz="1800">
+                              <a:effectLst/>
+                              <a:latin typeface="Cambria Math" panose="02040503050406030204" pitchFamily="18" charset="0"/>
+                              <a:ea typeface="Calibri"/>
+                              <a:cs typeface="Calibri"/>
+                            </a:rPr>
+                            <m:t>,</m:t>
+                          </m:r>
+                          <m:sSup>
+                            <m:sSupPr>
+                              <m:ctrlPr>
+                                <a:rPr lang="en-US" sz="1800" i="1">
+                                  <a:effectLst/>
+                                  <a:latin typeface="Cambria Math" panose="02040503050406030204" pitchFamily="18" charset="0"/>
+                                  <a:ea typeface="Calibri"/>
+                                  <a:cs typeface="Calibri"/>
+                                </a:rPr>
+                              </m:ctrlPr>
+                            </m:sSupPr>
+                            <m:e>
+                              <m:r>
+                                <a:rPr lang="en-US" sz="1800" i="1">
+                                  <a:effectLst/>
+                                  <a:latin typeface="Cambria Math" panose="02040503050406030204" pitchFamily="18" charset="0"/>
+                                  <a:ea typeface="Calibri"/>
+                                  <a:cs typeface="Calibri"/>
+                                </a:rPr>
+                                <m:t>𝐻</m:t>
+                              </m:r>
+                            </m:e>
+                            <m:sup>
+                              <m:r>
+                                <a:rPr lang="en-US" sz="1800" i="1">
+                                  <a:effectLst/>
+                                  <a:latin typeface="Cambria Math" panose="02040503050406030204" pitchFamily="18" charset="0"/>
+                                  <a:ea typeface="Calibri"/>
+                                  <a:cs typeface="Calibri"/>
+                                </a:rPr>
+                                <m:t>𝑤</m:t>
+                              </m:r>
+                            </m:sup>
+                          </m:sSup>
+                          <m:d>
+                            <m:dPr>
+                              <m:ctrlPr>
+                                <a:rPr lang="en-US" sz="1800" i="1">
+                                  <a:effectLst/>
+                                  <a:latin typeface="Cambria Math" panose="02040503050406030204" pitchFamily="18" charset="0"/>
+                                  <a:ea typeface="Calibri"/>
+                                  <a:cs typeface="Calibri"/>
+                                </a:rPr>
+                              </m:ctrlPr>
+                            </m:dPr>
+                            <m:e>
+                              <m:sSub>
+                                <m:sSubPr>
+                                  <m:ctrlPr>
+                                    <a:rPr lang="en-US" sz="1800" i="1">
+                                      <a:effectLst/>
+                                      <a:latin typeface="Cambria Math" panose="02040503050406030204" pitchFamily="18" charset="0"/>
+                                      <a:ea typeface="Calibri"/>
+                                      <a:cs typeface="Calibri"/>
+                                    </a:rPr>
+                                  </m:ctrlPr>
+                                </m:sSubPr>
+                                <m:e>
+                                  <m:r>
+                                    <a:rPr lang="en-US" sz="1800" i="1">
+                                      <a:effectLst/>
+                                      <a:latin typeface="Cambria Math" panose="02040503050406030204" pitchFamily="18" charset="0"/>
+                                      <a:ea typeface="Calibri"/>
+                                      <a:cs typeface="Calibri"/>
+                                    </a:rPr>
+                                    <m:t>𝑥</m:t>
+                                  </m:r>
+                                </m:e>
+                                <m:sub>
+                                  <m:r>
+                                    <a:rPr lang="en-US" sz="1800">
+                                      <a:effectLst/>
+                                      <a:latin typeface="Cambria Math" panose="02040503050406030204" pitchFamily="18" charset="0"/>
+                                      <a:ea typeface="Calibri"/>
+                                      <a:cs typeface="Calibri"/>
+                                    </a:rPr>
+                                    <m:t>2</m:t>
+                                  </m:r>
+                                </m:sub>
+                              </m:sSub>
+                            </m:e>
+                          </m:d>
+                          <m:r>
+                            <a:rPr lang="en-US" sz="1800">
+                              <a:effectLst/>
+                              <a:latin typeface="Cambria Math" panose="02040503050406030204" pitchFamily="18" charset="0"/>
+                              <a:ea typeface="Calibri"/>
+                              <a:cs typeface="Calibri"/>
+                            </a:rPr>
+                            <m:t>,…,</m:t>
+                          </m:r>
+                          <m:sSup>
+                            <m:sSupPr>
+                              <m:ctrlPr>
+                                <a:rPr lang="en-US" sz="1800" i="1">
+                                  <a:effectLst/>
+                                  <a:latin typeface="Cambria Math" panose="02040503050406030204" pitchFamily="18" charset="0"/>
+                                  <a:ea typeface="Calibri"/>
+                                  <a:cs typeface="Calibri"/>
+                                </a:rPr>
+                              </m:ctrlPr>
+                            </m:sSupPr>
+                            <m:e>
+                              <m:r>
+                                <a:rPr lang="en-US" sz="1800" i="1">
+                                  <a:effectLst/>
+                                  <a:latin typeface="Cambria Math" panose="02040503050406030204" pitchFamily="18" charset="0"/>
+                                  <a:ea typeface="Calibri"/>
+                                  <a:cs typeface="Calibri"/>
+                                </a:rPr>
+                                <m:t>𝐻</m:t>
+                              </m:r>
+                            </m:e>
+                            <m:sup>
+                              <m:r>
+                                <a:rPr lang="en-US" sz="1800" i="1">
+                                  <a:effectLst/>
+                                  <a:latin typeface="Cambria Math" panose="02040503050406030204" pitchFamily="18" charset="0"/>
+                                  <a:ea typeface="Calibri"/>
+                                  <a:cs typeface="Calibri"/>
+                                </a:rPr>
+                                <m:t>𝑤</m:t>
+                              </m:r>
+                            </m:sup>
+                          </m:sSup>
+                          <m:d>
+                            <m:dPr>
+                              <m:ctrlPr>
+                                <a:rPr lang="en-US" sz="1800" i="1">
+                                  <a:effectLst/>
+                                  <a:latin typeface="Cambria Math" panose="02040503050406030204" pitchFamily="18" charset="0"/>
+                                  <a:ea typeface="Calibri"/>
+                                  <a:cs typeface="Calibri"/>
+                                </a:rPr>
+                              </m:ctrlPr>
+                            </m:dPr>
+                            <m:e>
+                              <m:sSub>
+                                <m:sSubPr>
+                                  <m:ctrlPr>
+                                    <a:rPr lang="en-US" sz="1800" i="1">
+                                      <a:effectLst/>
+                                      <a:latin typeface="Cambria Math" panose="02040503050406030204" pitchFamily="18" charset="0"/>
+                                      <a:ea typeface="Calibri"/>
+                                      <a:cs typeface="Calibri"/>
+                                    </a:rPr>
+                                  </m:ctrlPr>
+                                </m:sSubPr>
+                                <m:e>
+                                  <m:r>
+                                    <a:rPr lang="en-US" sz="1800" i="1">
+                                      <a:effectLst/>
+                                      <a:latin typeface="Cambria Math" panose="02040503050406030204" pitchFamily="18" charset="0"/>
+                                      <a:ea typeface="Calibri"/>
+                                      <a:cs typeface="Calibri"/>
+                                    </a:rPr>
+                                    <m:t>𝑥</m:t>
+                                  </m:r>
+                                </m:e>
+                                <m:sub>
+                                  <m:r>
+                                    <a:rPr lang="en-US" sz="1800" i="1">
+                                      <a:effectLst/>
+                                      <a:latin typeface="Cambria Math" panose="02040503050406030204" pitchFamily="18" charset="0"/>
+                                      <a:ea typeface="Calibri"/>
+                                      <a:cs typeface="Calibri"/>
+                                    </a:rPr>
+                                    <m:t>𝑛</m:t>
+                                  </m:r>
+                                </m:sub>
+                              </m:sSub>
+                            </m:e>
+                          </m:d>
+                        </m:e>
+                      </m:d>
+                    </m:oMath>
+                  </m:oMathPara>
+                </a14:m>
+                <a:endParaRPr lang="en-US" sz="1800" dirty="0">
+                  <a:effectLst/>
+                  <a:latin typeface="Calibri"/>
+                  <a:ea typeface="Calibri"/>
+                  <a:cs typeface="Calibri"/>
+                </a:endParaRPr>
+              </a:p>
+              <a:p>
+                <a:pPr marL="36000" marR="0" lvl="0" indent="-342900">
+                  <a:lnSpc>
+                    <a:spcPts val="1200"/>
+                  </a:lnSpc>
+                  <a:spcAft>
+                    <a:spcPts val="600"/>
+                  </a:spcAft>
+                  <a:buFont typeface="Symbol" panose="05050102010706020507" pitchFamily="18" charset="2"/>
+                  <a:buChar char=""/>
+                  <a:tabLst>
+                    <a:tab pos="685800" algn="l"/>
+                  </a:tabLst>
+                </a:pPr>
+                <a14:m>
+                  <m:oMath xmlns:m="http://schemas.openxmlformats.org/officeDocument/2006/math">
+                    <m:r>
+                      <a:rPr lang="en-US" sz="1800" i="1" smtClean="0">
+                        <a:effectLst/>
+                        <a:latin typeface="Cambria Math" panose="02040503050406030204" pitchFamily="18" charset="0"/>
+                        <a:ea typeface="Calibri"/>
+                        <a:cs typeface="Calibri"/>
+                      </a:rPr>
+                      <m:t>𝐻</m:t>
+                    </m:r>
+                  </m:oMath>
+                </a14:m>
+                <a:r>
+                  <a:rPr lang="en-US" sz="1800" dirty="0">
+                    <a:effectLst/>
+                    <a:latin typeface="Calibri"/>
+                    <a:ea typeface="Calibri"/>
+                    <a:cs typeface="Calibri"/>
+                  </a:rPr>
+                  <a:t> є криптографічною хеш-функцією (наприклад, SHA-256).</a:t>
+                </a:r>
+              </a:p>
+              <a:p>
+                <a:pPr marL="36000" marR="0" lvl="0" indent="-342900">
+                  <a:lnSpc>
+                    <a:spcPts val="1200"/>
+                  </a:lnSpc>
+                  <a:spcAft>
+                    <a:spcPts val="600"/>
+                  </a:spcAft>
+                  <a:buFont typeface="Symbol" panose="05050102010706020507" pitchFamily="18" charset="2"/>
+                  <a:buChar char=""/>
+                  <a:tabLst>
+                    <a:tab pos="685800" algn="l"/>
+                  </a:tabLst>
+                </a:pPr>
+                <a14:m>
+                  <m:oMath xmlns:m="http://schemas.openxmlformats.org/officeDocument/2006/math">
+                    <m:r>
+                      <a:rPr lang="en-US" sz="1800" i="1" smtClean="0">
+                        <a:effectLst/>
+                        <a:latin typeface="Cambria Math" panose="02040503050406030204" pitchFamily="18" charset="0"/>
+                        <a:ea typeface="Calibri"/>
+                        <a:cs typeface="Calibri"/>
+                      </a:rPr>
+                      <m:t>𝑤</m:t>
+                    </m:r>
+                    <m:r>
+                      <a:rPr lang="en-US" sz="1800" i="1" smtClean="0">
+                        <a:effectLst/>
+                        <a:latin typeface="Cambria Math" panose="02040503050406030204" pitchFamily="18" charset="0"/>
+                        <a:ea typeface="Calibri"/>
+                        <a:cs typeface="Calibri"/>
+                      </a:rPr>
+                      <m:t> </m:t>
+                    </m:r>
+                  </m:oMath>
+                </a14:m>
+                <a:r>
+                  <a:rPr lang="en-US" sz="1800" dirty="0">
+                    <a:effectLst/>
+                    <a:latin typeface="Calibri"/>
+                    <a:ea typeface="Calibri"/>
+                    <a:cs typeface="Calibri"/>
+                  </a:rPr>
+                  <a:t>є параметром (</a:t>
+                </a:r>
+                <a:r>
+                  <a:rPr lang="en-US" sz="1800" dirty="0" err="1">
+                    <a:effectLst/>
+                    <a:latin typeface="Calibri"/>
+                    <a:ea typeface="Calibri"/>
+                    <a:cs typeface="Calibri"/>
+                  </a:rPr>
+                  <a:t>наприклад</a:t>
+                </a:r>
+                <a:r>
+                  <a:rPr lang="en-US" sz="1800" dirty="0">
+                    <a:effectLst/>
+                    <a:latin typeface="Calibri"/>
+                    <a:ea typeface="Calibri"/>
+                    <a:cs typeface="Calibri"/>
+                  </a:rPr>
+                  <a:t>,</a:t>
+                </a:r>
+                <a:r>
+                  <a:rPr lang="uk-UA" sz="1800" dirty="0">
+                    <a:effectLst/>
+                    <a:latin typeface="Calibri"/>
+                    <a:ea typeface="Calibri"/>
+                    <a:cs typeface="Calibri"/>
+                  </a:rPr>
+                  <a:t> </a:t>
+                </a:r>
+                <a14:m>
+                  <m:oMath xmlns:m="http://schemas.openxmlformats.org/officeDocument/2006/math">
+                    <m:r>
+                      <a:rPr lang="en-US" sz="1800" i="1">
+                        <a:latin typeface="Cambria Math" panose="02040503050406030204" pitchFamily="18" charset="0"/>
+                        <a:ea typeface="Calibri"/>
+                        <a:cs typeface="Calibri"/>
+                      </a:rPr>
+                      <m:t>𝑤</m:t>
+                    </m:r>
+                    <m:r>
+                      <a:rPr lang="en-US" sz="1800">
+                        <a:latin typeface="Cambria Math" panose="02040503050406030204" pitchFamily="18" charset="0"/>
+                        <a:ea typeface="Calibri"/>
+                        <a:cs typeface="Calibri"/>
+                      </a:rPr>
+                      <m:t>=16</m:t>
+                    </m:r>
+                  </m:oMath>
+                </a14:m>
+                <a:r>
+                  <a:rPr lang="en-US" sz="1800" dirty="0">
+                    <a:effectLst/>
+                    <a:latin typeface="Calibri"/>
+                    <a:ea typeface="Calibri"/>
+                    <a:cs typeface="Calibri"/>
+                  </a:rPr>
+                  <a:t> ).</a:t>
+                </a:r>
+              </a:p>
+              <a:p>
+                <a:endParaRPr lang="en-US" dirty="0"/>
+              </a:p>
+            </p:txBody>
+          </p:sp>
+        </mc:Choice>
+        <mc:Fallback xmlns="">
+          <p:sp>
+            <p:nvSpPr>
+              <p:cNvPr id="3" name="Content Placeholder 2">
+                <a:extLst>
+                  <a:ext uri="{FF2B5EF4-FFF2-40B4-BE49-F238E27FC236}">
+                    <a16:creationId xmlns:a16="http://schemas.microsoft.com/office/drawing/2014/main" id="{D36B7EE6-B544-03BD-0F62-90C00428CD7B}"/>
+                  </a:ext>
+                </a:extLst>
+              </p:cNvPr>
+              <p:cNvSpPr>
+                <a:spLocks noGrp="1" noRot="1" noChangeAspect="1" noMove="1" noResize="1" noEditPoints="1" noAdjustHandles="1" noChangeArrowheads="1" noChangeShapeType="1" noTextEdit="1"/>
+              </p:cNvSpPr>
+              <p:nvPr>
+                <p:ph idx="1"/>
+              </p:nvPr>
+            </p:nvSpPr>
+            <p:spPr>
+              <a:xfrm>
+                <a:off x="1793240" y="1690688"/>
+                <a:ext cx="8305800" cy="4667250"/>
+              </a:xfrm>
+              <a:blipFill>
+                <a:blip r:embed="rId2"/>
+                <a:stretch>
+                  <a:fillRect l="-611" t="-2710"/>
+                </a:stretch>
+              </a:blipFill>
+            </p:spPr>
+            <p:txBody>
+              <a:bodyPr/>
+              <a:lstStyle/>
+              <a:p>
+                <a:r>
+                  <a:rPr lang="en-UA">
+                    <a:noFill/>
+                  </a:rPr>
+                  <a:t> </a:t>
+                </a:r>
+              </a:p>
+            </p:txBody>
+          </p:sp>
+        </mc:Fallback>
+      </mc:AlternateContent>
     </p:spTree>
     <p:extLst>
       <p:ext uri="{BB962C8B-B14F-4D97-AF65-F5344CB8AC3E}">
-        <p14:creationId xmlns:p14="http://schemas.microsoft.com/office/powerpoint/2010/main" val="3857741798"/>
+        <p14:creationId xmlns:p14="http://schemas.microsoft.com/office/powerpoint/2010/main" val="169095086"/>
       </p:ext>
     </p:extLst>
   </p:cSld>
